--- a/static/teaching/Lecture05ConsumptionSaving.pptx
+++ b/static/teaching/Lecture05ConsumptionSaving.pptx
@@ -5,10 +5,10 @@
     <p:sldMasterId id="2147483672" r:id="rId1"/>
   </p:sldMasterIdLst>
   <p:notesMasterIdLst>
-    <p:notesMasterId r:id="rId51"/>
+    <p:notesMasterId r:id="rId52"/>
   </p:notesMasterIdLst>
   <p:handoutMasterIdLst>
-    <p:handoutMasterId r:id="rId52"/>
+    <p:handoutMasterId r:id="rId53"/>
   </p:handoutMasterIdLst>
   <p:sldIdLst>
     <p:sldId id="257" r:id="rId2"/>
@@ -31,35 +31,36 @@
     <p:sldId id="545" r:id="rId19"/>
     <p:sldId id="546" r:id="rId20"/>
     <p:sldId id="547" r:id="rId21"/>
-    <p:sldId id="548" r:id="rId22"/>
-    <p:sldId id="549" r:id="rId23"/>
-    <p:sldId id="550" r:id="rId24"/>
-    <p:sldId id="551" r:id="rId25"/>
-    <p:sldId id="552" r:id="rId26"/>
-    <p:sldId id="553" r:id="rId27"/>
-    <p:sldId id="589" r:id="rId28"/>
-    <p:sldId id="554" r:id="rId29"/>
-    <p:sldId id="555" r:id="rId30"/>
-    <p:sldId id="556" r:id="rId31"/>
-    <p:sldId id="557" r:id="rId32"/>
-    <p:sldId id="558" r:id="rId33"/>
-    <p:sldId id="559" r:id="rId34"/>
-    <p:sldId id="560" r:id="rId35"/>
-    <p:sldId id="564" r:id="rId36"/>
-    <p:sldId id="565" r:id="rId37"/>
-    <p:sldId id="566" r:id="rId38"/>
-    <p:sldId id="567" r:id="rId39"/>
-    <p:sldId id="568" r:id="rId40"/>
-    <p:sldId id="579" r:id="rId41"/>
-    <p:sldId id="580" r:id="rId42"/>
-    <p:sldId id="581" r:id="rId43"/>
-    <p:sldId id="582" r:id="rId44"/>
-    <p:sldId id="588" r:id="rId45"/>
-    <p:sldId id="583" r:id="rId46"/>
-    <p:sldId id="584" r:id="rId47"/>
-    <p:sldId id="585" r:id="rId48"/>
-    <p:sldId id="586" r:id="rId49"/>
-    <p:sldId id="587" r:id="rId50"/>
+    <p:sldId id="591" r:id="rId22"/>
+    <p:sldId id="548" r:id="rId23"/>
+    <p:sldId id="549" r:id="rId24"/>
+    <p:sldId id="550" r:id="rId25"/>
+    <p:sldId id="551" r:id="rId26"/>
+    <p:sldId id="552" r:id="rId27"/>
+    <p:sldId id="553" r:id="rId28"/>
+    <p:sldId id="589" r:id="rId29"/>
+    <p:sldId id="554" r:id="rId30"/>
+    <p:sldId id="555" r:id="rId31"/>
+    <p:sldId id="556" r:id="rId32"/>
+    <p:sldId id="557" r:id="rId33"/>
+    <p:sldId id="558" r:id="rId34"/>
+    <p:sldId id="559" r:id="rId35"/>
+    <p:sldId id="560" r:id="rId36"/>
+    <p:sldId id="564" r:id="rId37"/>
+    <p:sldId id="565" r:id="rId38"/>
+    <p:sldId id="566" r:id="rId39"/>
+    <p:sldId id="567" r:id="rId40"/>
+    <p:sldId id="568" r:id="rId41"/>
+    <p:sldId id="579" r:id="rId42"/>
+    <p:sldId id="580" r:id="rId43"/>
+    <p:sldId id="581" r:id="rId44"/>
+    <p:sldId id="582" r:id="rId45"/>
+    <p:sldId id="588" r:id="rId46"/>
+    <p:sldId id="583" r:id="rId47"/>
+    <p:sldId id="584" r:id="rId48"/>
+    <p:sldId id="585" r:id="rId49"/>
+    <p:sldId id="586" r:id="rId50"/>
+    <p:sldId id="587" r:id="rId51"/>
   </p:sldIdLst>
   <p:sldSz cx="12192000" cy="6858000"/>
   <p:notesSz cx="7315200" cy="9601200"/>
@@ -290,7 +291,7 @@
             <a:fld id="{40DA98C2-FD87-4D1B-AC8F-1ED8006DCF99}" type="datetimeFigureOut">
               <a:rPr lang="is-IS" smtClean="0"/>
               <a:pPr/>
-              <a:t>7.10.2025</a:t>
+              <a:t>18.10.2026</a:t>
             </a:fld>
             <a:endParaRPr lang="is-IS"/>
           </a:p>
@@ -483,7 +484,7 @@
               <a:pPr>
                 <a:defRPr/>
               </a:pPr>
-              <a:t>10/7/2025</a:t>
+              <a:t>10/18/2026</a:t>
             </a:fld>
             <a:endParaRPr lang="en-US" dirty="0"/>
           </a:p>
@@ -2075,7 +2076,7 @@
               <a:pPr>
                 <a:defRPr/>
               </a:pPr>
-              <a:t>21</a:t>
+              <a:t>22</a:t>
             </a:fld>
             <a:endParaRPr lang="en-US" dirty="0"/>
           </a:p>
@@ -2172,7 +2173,7 @@
               <a:pPr>
                 <a:defRPr/>
               </a:pPr>
-              <a:t>22</a:t>
+              <a:t>23</a:t>
             </a:fld>
             <a:endParaRPr lang="en-US" dirty="0"/>
           </a:p>
@@ -2269,7 +2270,7 @@
               <a:pPr>
                 <a:defRPr/>
               </a:pPr>
-              <a:t>23</a:t>
+              <a:t>24</a:t>
             </a:fld>
             <a:endParaRPr lang="en-US" dirty="0"/>
           </a:p>
@@ -2364,7 +2365,7 @@
               <a:pPr>
                 <a:defRPr/>
               </a:pPr>
-              <a:t>24</a:t>
+              <a:t>25</a:t>
             </a:fld>
             <a:endParaRPr lang="en-US" dirty="0"/>
           </a:p>
@@ -2459,7 +2460,7 @@
               <a:pPr>
                 <a:defRPr/>
               </a:pPr>
-              <a:t>25</a:t>
+              <a:t>26</a:t>
             </a:fld>
             <a:endParaRPr lang="en-US" dirty="0"/>
           </a:p>
@@ -2556,7 +2557,7 @@
               <a:pPr>
                 <a:defRPr/>
               </a:pPr>
-              <a:t>26</a:t>
+              <a:t>27</a:t>
             </a:fld>
             <a:endParaRPr lang="en-US" dirty="0"/>
           </a:p>
@@ -2651,7 +2652,7 @@
               <a:pPr>
                 <a:defRPr/>
               </a:pPr>
-              <a:t>28</a:t>
+              <a:t>29</a:t>
             </a:fld>
             <a:endParaRPr lang="en-US" dirty="0"/>
           </a:p>
@@ -2746,7 +2747,7 @@
               <a:pPr>
                 <a:defRPr/>
               </a:pPr>
-              <a:t>29</a:t>
+              <a:t>30</a:t>
             </a:fld>
             <a:endParaRPr lang="en-US" dirty="0"/>
           </a:p>
@@ -2841,7 +2842,7 @@
               <a:pPr>
                 <a:defRPr/>
               </a:pPr>
-              <a:t>30</a:t>
+              <a:t>31</a:t>
             </a:fld>
             <a:endParaRPr lang="en-US" dirty="0"/>
           </a:p>
@@ -2936,7 +2937,7 @@
               <a:pPr>
                 <a:defRPr/>
               </a:pPr>
-              <a:t>31</a:t>
+              <a:t>32</a:t>
             </a:fld>
             <a:endParaRPr lang="en-US" dirty="0"/>
           </a:p>
@@ -3126,7 +3127,7 @@
               <a:pPr>
                 <a:defRPr/>
               </a:pPr>
-              <a:t>32</a:t>
+              <a:t>33</a:t>
             </a:fld>
             <a:endParaRPr lang="en-US" dirty="0"/>
           </a:p>
@@ -3221,7 +3222,7 @@
               <a:pPr>
                 <a:defRPr/>
               </a:pPr>
-              <a:t>33</a:t>
+              <a:t>34</a:t>
             </a:fld>
             <a:endParaRPr lang="en-US" dirty="0"/>
           </a:p>
@@ -3316,7 +3317,7 @@
               <a:pPr>
                 <a:defRPr/>
               </a:pPr>
-              <a:t>34</a:t>
+              <a:t>35</a:t>
             </a:fld>
             <a:endParaRPr lang="en-US" dirty="0"/>
           </a:p>
@@ -4094,7 +4095,7 @@
               <a:pPr>
                 <a:defRPr/>
               </a:pPr>
-              <a:t>10/7/2025</a:t>
+              <a:t>10/18/2026</a:t>
             </a:fld>
             <a:endParaRPr lang="en-US" dirty="0"/>
           </a:p>
@@ -4284,7 +4285,7 @@
               <a:pPr>
                 <a:defRPr/>
               </a:pPr>
-              <a:t>10/7/2025</a:t>
+              <a:t>10/18/2026</a:t>
             </a:fld>
             <a:endParaRPr lang="en-US" dirty="0"/>
           </a:p>
@@ -4484,7 +4485,7 @@
               <a:pPr>
                 <a:defRPr/>
               </a:pPr>
-              <a:t>10/7/2025</a:t>
+              <a:t>10/18/2026</a:t>
             </a:fld>
             <a:endParaRPr lang="en-US" dirty="0"/>
           </a:p>
@@ -4805,7 +4806,7 @@
               <a:pPr>
                 <a:defRPr/>
               </a:pPr>
-              <a:t>10/7/2025</a:t>
+              <a:t>10/18/2026</a:t>
             </a:fld>
             <a:endParaRPr lang="en-US" dirty="0"/>
           </a:p>
@@ -5079,7 +5080,7 @@
               <a:pPr>
                 <a:defRPr/>
               </a:pPr>
-              <a:t>10/7/2025</a:t>
+              <a:t>10/18/2026</a:t>
             </a:fld>
             <a:endParaRPr lang="en-US" dirty="0"/>
           </a:p>
@@ -5279,7 +5280,7 @@
               <a:pPr>
                 <a:defRPr/>
               </a:pPr>
-              <a:t>10/7/2025</a:t>
+              <a:t>10/18/2026</a:t>
             </a:fld>
             <a:endParaRPr lang="en-US" dirty="0"/>
           </a:p>
@@ -5546,7 +5547,7 @@
               <a:pPr>
                 <a:defRPr/>
               </a:pPr>
-              <a:t>10/7/2025</a:t>
+              <a:t>10/18/2026</a:t>
             </a:fld>
             <a:endParaRPr lang="en-US" dirty="0"/>
           </a:p>
@@ -5853,7 +5854,7 @@
               <a:pPr>
                 <a:defRPr/>
               </a:pPr>
-              <a:t>10/7/2025</a:t>
+              <a:t>10/18/2026</a:t>
             </a:fld>
             <a:endParaRPr lang="en-US" dirty="0"/>
           </a:p>
@@ -6294,7 +6295,7 @@
               <a:pPr>
                 <a:defRPr/>
               </a:pPr>
-              <a:t>10/7/2025</a:t>
+              <a:t>10/18/2026</a:t>
             </a:fld>
             <a:endParaRPr lang="en-US" dirty="0"/>
           </a:p>
@@ -6433,7 +6434,7 @@
               <a:pPr>
                 <a:defRPr/>
               </a:pPr>
-              <a:t>10/7/2025</a:t>
+              <a:t>10/18/2026</a:t>
             </a:fld>
             <a:endParaRPr lang="en-US" dirty="0"/>
           </a:p>
@@ -6550,7 +6551,7 @@
               <a:pPr>
                 <a:defRPr/>
               </a:pPr>
-              <a:t>10/7/2025</a:t>
+              <a:t>10/18/2026</a:t>
             </a:fld>
             <a:endParaRPr lang="en-US" dirty="0"/>
           </a:p>
@@ -6847,7 +6848,7 @@
               <a:pPr>
                 <a:defRPr/>
               </a:pPr>
-              <a:t>10/7/2025</a:t>
+              <a:t>10/18/2026</a:t>
             </a:fld>
             <a:endParaRPr lang="en-US" dirty="0"/>
           </a:p>
@@ -7124,7 +7125,7 @@
               <a:pPr>
                 <a:defRPr/>
               </a:pPr>
-              <a:t>10/7/2025</a:t>
+              <a:t>10/18/2026</a:t>
             </a:fld>
             <a:endParaRPr lang="en-US" dirty="0"/>
           </a:p>
@@ -7380,7 +7381,7 @@
               <a:pPr>
                 <a:defRPr/>
               </a:pPr>
-              <a:t>10/7/2025</a:t>
+              <a:t>10/18/2026</a:t>
             </a:fld>
             <a:endParaRPr lang="en-US" dirty="0"/>
           </a:p>
@@ -8119,10 +8120,7 @@
                 </a:pPr>
                 <a14:m>
                   <m:oMathPara xmlns:m="http://schemas.openxmlformats.org/officeDocument/2006/math">
-                    <m:oMathParaPr>
-                      <m:jc m:val="centerGroup"/>
-                    </m:oMathParaPr>
-                    <m:oMath xmlns:m="http://schemas.openxmlformats.org/officeDocument/2006/math">
+                    <m:oMath>
                       <m:r>
                         <a:rPr lang="en-US" i="1">
                           <a:latin typeface="Cambria Math"/>
@@ -8142,7 +8140,7 @@
                             <m:sSubPr>
                               <m:ctrlPr>
                                 <a:rPr lang="en-US" i="1">
-                                  <a:latin typeface="Cambria Math" panose="02040503050406030204" pitchFamily="18" charset="0"/>
+                                  <a:latin typeface="Cambria Math"/>
                                 </a:rPr>
                               </m:ctrlPr>
                             </m:sSubPr>
@@ -8199,7 +8197,7 @@
                             <m:sSubPr>
                               <m:ctrlPr>
                                 <a:rPr lang="en-US" i="1">
-                                  <a:latin typeface="Cambria Math" panose="02040503050406030204" pitchFamily="18" charset="0"/>
+                                  <a:latin typeface="Cambria Math"/>
                                   <a:ea typeface="Cambria Math"/>
                                 </a:rPr>
                               </m:ctrlPr>
@@ -8242,15 +8240,12 @@
                 </a:pPr>
                 <a14:m>
                   <m:oMathPara xmlns:m="http://schemas.openxmlformats.org/officeDocument/2006/math">
-                    <m:oMathParaPr>
-                      <m:jc m:val="centerGroup"/>
-                    </m:oMathParaPr>
-                    <m:oMath xmlns:m="http://schemas.openxmlformats.org/officeDocument/2006/math">
+                    <m:oMath>
                       <m:sSub>
                         <m:sSubPr>
                           <m:ctrlPr>
                             <a:rPr lang="en-US" i="1">
-                              <a:latin typeface="Cambria Math" panose="02040503050406030204" pitchFamily="18" charset="0"/>
+                              <a:latin typeface="Cambria Math"/>
                             </a:rPr>
                           </m:ctrlPr>
                         </m:sSubPr>
@@ -8293,7 +8288,7 @@
                         <m:sSubPr>
                           <m:ctrlPr>
                             <a:rPr lang="en-US" i="1">
-                              <a:latin typeface="Cambria Math" panose="02040503050406030204" pitchFamily="18" charset="0"/>
+                              <a:latin typeface="Cambria Math"/>
                             </a:rPr>
                           </m:ctrlPr>
                         </m:sSubPr>
@@ -8325,15 +8320,12 @@
                 </a:pPr>
                 <a14:m>
                   <m:oMathPara xmlns:m="http://schemas.openxmlformats.org/officeDocument/2006/math">
-                    <m:oMathParaPr>
-                      <m:jc m:val="centerGroup"/>
-                    </m:oMathParaPr>
-                    <m:oMath xmlns:m="http://schemas.openxmlformats.org/officeDocument/2006/math">
+                    <m:oMath>
                       <m:sSub>
                         <m:sSubPr>
                           <m:ctrlPr>
                             <a:rPr lang="en-US" i="1">
-                              <a:latin typeface="Cambria Math" panose="02040503050406030204" pitchFamily="18" charset="0"/>
+                              <a:latin typeface="Cambria Math"/>
                             </a:rPr>
                           </m:ctrlPr>
                         </m:sSubPr>
@@ -8364,7 +8356,7 @@
                         <m:sSubPr>
                           <m:ctrlPr>
                             <a:rPr lang="en-US" i="1">
-                              <a:latin typeface="Cambria Math" panose="02040503050406030204" pitchFamily="18" charset="0"/>
+                              <a:latin typeface="Cambria Math"/>
                             </a:rPr>
                           </m:ctrlPr>
                         </m:sSubPr>
@@ -8395,7 +8387,7 @@
                         <m:dPr>
                           <m:ctrlPr>
                             <a:rPr lang="en-US" i="1">
-                              <a:latin typeface="Cambria Math" panose="02040503050406030204" pitchFamily="18" charset="0"/>
+                              <a:latin typeface="Cambria Math"/>
                             </a:rPr>
                           </m:ctrlPr>
                         </m:dPr>
@@ -8451,8 +8443,8 @@
                     <m:sSub>
                       <m:sSubPr>
                         <m:ctrlPr>
-                          <a:rPr lang="en-US" i="1" smtClean="0">
-                            <a:latin typeface="Cambria Math" panose="02040503050406030204" pitchFamily="18" charset="0"/>
+                          <a:rPr lang="en-US" b="0" i="1" smtClean="0">
+                            <a:latin typeface="Cambria Math"/>
                           </a:rPr>
                         </m:ctrlPr>
                       </m:sSubPr>
@@ -8483,7 +8475,7 @@
                       <m:sSubPr>
                         <m:ctrlPr>
                           <a:rPr lang="en-US" b="0" i="1" smtClean="0">
-                            <a:latin typeface="Cambria Math" panose="02040503050406030204" pitchFamily="18" charset="0"/>
+                            <a:latin typeface="Cambria Math"/>
                           </a:rPr>
                         </m:ctrlPr>
                       </m:sSubPr>
@@ -8637,15 +8629,12 @@
                 <a:pPr/>
                 <a14:m>
                   <m:oMathPara xmlns:m="http://schemas.openxmlformats.org/officeDocument/2006/math">
-                    <m:oMathParaPr>
-                      <m:jc m:val="centerGroup"/>
-                    </m:oMathParaPr>
-                    <m:oMath xmlns:m="http://schemas.openxmlformats.org/officeDocument/2006/math">
+                    <m:oMath>
                       <m:sSub>
                         <m:sSubPr>
                           <m:ctrlPr>
                             <a:rPr lang="en-US" sz="3200" i="1">
-                              <a:latin typeface="Cambria Math" panose="02040503050406030204" pitchFamily="18" charset="0"/>
+                              <a:latin typeface="Cambria Math"/>
                             </a:rPr>
                           </m:ctrlPr>
                         </m:sSubPr>
@@ -8676,7 +8665,7 @@
                         <m:sSubPr>
                           <m:ctrlPr>
                             <a:rPr lang="en-US" sz="3200" i="1">
-                              <a:latin typeface="Cambria Math" panose="02040503050406030204" pitchFamily="18" charset="0"/>
+                              <a:latin typeface="Cambria Math"/>
                             </a:rPr>
                           </m:ctrlPr>
                         </m:sSubPr>
@@ -9202,15 +9191,12 @@
                 </a:pPr>
                 <a14:m>
                   <m:oMathPara xmlns:m="http://schemas.openxmlformats.org/officeDocument/2006/math">
-                    <m:oMathParaPr>
-                      <m:jc m:val="centerGroup"/>
-                    </m:oMathParaPr>
-                    <m:oMath xmlns:m="http://schemas.openxmlformats.org/officeDocument/2006/math">
+                    <m:oMath>
                       <m:sSub>
                         <m:sSubPr>
                           <m:ctrlPr>
-                            <a:rPr lang="en-US" i="1" smtClean="0">
-                              <a:latin typeface="Cambria Math" panose="02040503050406030204" pitchFamily="18" charset="0"/>
+                            <a:rPr lang="en-US" b="0" i="1" smtClean="0">
+                              <a:latin typeface="Cambria Math"/>
                             </a:rPr>
                           </m:ctrlPr>
                         </m:sSubPr>
@@ -9241,7 +9227,7 @@
                         <m:fPr>
                           <m:ctrlPr>
                             <a:rPr lang="en-US" b="0" i="1" smtClean="0">
-                              <a:latin typeface="Cambria Math" panose="02040503050406030204" pitchFamily="18" charset="0"/>
+                              <a:latin typeface="Cambria Math"/>
                             </a:rPr>
                           </m:ctrlPr>
                         </m:fPr>
@@ -9272,7 +9258,7 @@
                         <m:sSubPr>
                           <m:ctrlPr>
                             <a:rPr lang="en-US" b="0" i="1" smtClean="0">
-                              <a:latin typeface="Cambria Math" panose="02040503050406030204" pitchFamily="18" charset="0"/>
+                              <a:latin typeface="Cambria Math"/>
                             </a:rPr>
                           </m:ctrlPr>
                         </m:sSubPr>
@@ -9303,7 +9289,7 @@
                         <m:sSubPr>
                           <m:ctrlPr>
                             <a:rPr lang="en-US" b="0" i="1" smtClean="0">
-                              <a:latin typeface="Cambria Math" panose="02040503050406030204" pitchFamily="18" charset="0"/>
+                              <a:latin typeface="Cambria Math"/>
                             </a:rPr>
                           </m:ctrlPr>
                         </m:sSubPr>
@@ -9334,7 +9320,7 @@
                         <m:fPr>
                           <m:ctrlPr>
                             <a:rPr lang="en-US" b="0" i="1" smtClean="0">
-                              <a:latin typeface="Cambria Math" panose="02040503050406030204" pitchFamily="18" charset="0"/>
+                              <a:latin typeface="Cambria Math"/>
                             </a:rPr>
                           </m:ctrlPr>
                         </m:fPr>
@@ -9365,7 +9351,7 @@
                         <m:sSubPr>
                           <m:ctrlPr>
                             <a:rPr lang="en-US" b="0" i="1" smtClean="0">
-                              <a:latin typeface="Cambria Math" panose="02040503050406030204" pitchFamily="18" charset="0"/>
+                              <a:latin typeface="Cambria Math"/>
                             </a:rPr>
                           </m:ctrlPr>
                         </m:sSubPr>
@@ -9918,15 +9904,12 @@
                 </a:pPr>
                 <a14:m>
                   <m:oMathPara xmlns:m="http://schemas.openxmlformats.org/officeDocument/2006/math">
-                    <m:oMathParaPr>
-                      <m:jc m:val="centerGroup"/>
-                    </m:oMathParaPr>
-                    <m:oMath xmlns:m="http://schemas.openxmlformats.org/officeDocument/2006/math">
+                    <m:oMath>
                       <m:f>
                         <m:fPr>
                           <m:ctrlPr>
-                            <a:rPr lang="en-US" i="1" smtClean="0">
-                              <a:latin typeface="Cambria Math" panose="02040503050406030204" pitchFamily="18" charset="0"/>
+                            <a:rPr lang="en-US" b="0" i="1" smtClean="0">
+                              <a:latin typeface="Cambria Math"/>
                             </a:rPr>
                           </m:ctrlPr>
                         </m:fPr>
@@ -9975,7 +9958,7 @@
                       <m:dPr>
                         <m:ctrlPr>
                           <a:rPr lang="en-US" b="0" i="1" smtClean="0">
-                            <a:latin typeface="Cambria Math" panose="02040503050406030204" pitchFamily="18" charset="0"/>
+                            <a:latin typeface="Cambria Math"/>
                           </a:rPr>
                         </m:ctrlPr>
                       </m:dPr>
@@ -10348,10 +10331,7 @@
                 </a:pPr>
                 <a14:m>
                   <m:oMathPara xmlns:m="http://schemas.openxmlformats.org/officeDocument/2006/math">
-                    <m:oMathParaPr>
-                      <m:jc m:val="centerGroup"/>
-                    </m:oMathParaPr>
-                    <m:oMath xmlns:m="http://schemas.openxmlformats.org/officeDocument/2006/math">
+                    <m:oMath>
                       <m:r>
                         <a:rPr lang="en-US" b="0" i="1" smtClean="0">
                           <a:latin typeface="Cambria Math"/>
@@ -10371,7 +10351,7 @@
                             <m:sSubPr>
                               <m:ctrlPr>
                                 <a:rPr lang="en-US" b="0" i="1" smtClean="0">
-                                  <a:latin typeface="Cambria Math" panose="02040503050406030204" pitchFamily="18" charset="0"/>
+                                  <a:latin typeface="Cambria Math"/>
                                 </a:rPr>
                               </m:ctrlPr>
                             </m:sSubPr>
@@ -10428,7 +10408,7 @@
                             <m:sSubPr>
                               <m:ctrlPr>
                                 <a:rPr lang="en-US" b="0" i="1" smtClean="0">
-                                  <a:latin typeface="Cambria Math" panose="02040503050406030204" pitchFamily="18" charset="0"/>
+                                  <a:latin typeface="Cambria Math"/>
                                   <a:ea typeface="Cambria Math"/>
                                 </a:rPr>
                               </m:ctrlPr>
@@ -10468,10 +10448,7 @@
                 </a:pPr>
                 <a14:m>
                   <m:oMathPara xmlns:m="http://schemas.openxmlformats.org/officeDocument/2006/math">
-                    <m:oMathParaPr>
-                      <m:jc m:val="centerGroup"/>
-                    </m:oMathParaPr>
-                    <m:oMath xmlns:m="http://schemas.openxmlformats.org/officeDocument/2006/math">
+                    <m:oMath>
                       <m:r>
                         <a:rPr lang="en-US" i="1">
                           <a:latin typeface="Cambria Math"/>
@@ -10491,7 +10468,7 @@
                             <m:sSubPr>
                               <m:ctrlPr>
                                 <a:rPr lang="en-US" i="1">
-                                  <a:latin typeface="Cambria Math" panose="02040503050406030204" pitchFamily="18" charset="0"/>
+                                  <a:latin typeface="Cambria Math"/>
                                 </a:rPr>
                               </m:ctrlPr>
                             </m:sSubPr>
@@ -10537,7 +10514,7 @@
                       <m:d>
                         <m:dPr>
                           <m:ctrlPr>
-                            <a:rPr lang="en-US" i="1">
+                            <a:rPr lang="en-US" i="1" smtClean="0">
                               <a:latin typeface="Cambria Math" panose="02040503050406030204" pitchFamily="18" charset="0"/>
                               <a:ea typeface="Cambria Math"/>
                             </a:rPr>
@@ -10547,7 +10524,7 @@
                           <m:sSub>
                             <m:sSubPr>
                               <m:ctrlPr>
-                                <a:rPr lang="en-US" i="1" smtClean="0">
+                                <a:rPr lang="en-US" b="0" i="1" smtClean="0">
                                   <a:latin typeface="Cambria Math" panose="02040503050406030204" pitchFamily="18" charset="0"/>
                                   <a:ea typeface="Cambria Math"/>
                                 </a:rPr>
@@ -10557,8 +10534,8 @@
                               <m:d>
                                 <m:dPr>
                                   <m:ctrlPr>
-                                    <a:rPr lang="en-US" i="1" smtClean="0">
-                                      <a:latin typeface="Cambria Math" panose="02040503050406030204" pitchFamily="18" charset="0"/>
+                                    <a:rPr lang="en-US" b="0" i="1" smtClean="0">
+                                      <a:latin typeface="Cambria Math"/>
                                       <a:ea typeface="Cambria Math"/>
                                     </a:rPr>
                                   </m:ctrlPr>
@@ -10609,7 +10586,7 @@
                             <m:sSubPr>
                               <m:ctrlPr>
                                 <a:rPr lang="en-US" b="0" i="1" smtClean="0">
-                                  <a:latin typeface="Cambria Math" panose="02040503050406030204" pitchFamily="18" charset="0"/>
+                                  <a:latin typeface="Cambria Math"/>
                                   <a:ea typeface="Cambria Math"/>
                                 </a:rPr>
                               </m:ctrlPr>
@@ -10654,7 +10631,7 @@
                                 <m:dPr>
                                   <m:ctrlPr>
                                     <a:rPr lang="en-US" b="0" i="1" smtClean="0">
-                                      <a:latin typeface="Cambria Math" panose="02040503050406030204" pitchFamily="18" charset="0"/>
+                                      <a:latin typeface="Cambria Math"/>
                                       <a:ea typeface="Cambria Math"/>
                                     </a:rPr>
                                   </m:ctrlPr>
@@ -10712,7 +10689,7 @@
                     <m:sSub>
                       <m:sSubPr>
                         <m:ctrlPr>
-                          <a:rPr lang="en-US" i="1" smtClean="0">
+                          <a:rPr lang="en-US" b="0" i="1" smtClean="0">
                             <a:latin typeface="Cambria Math" panose="02040503050406030204" pitchFamily="18" charset="0"/>
                           </a:rPr>
                         </m:ctrlPr>
@@ -11087,7 +11064,7 @@
                     <m:oMathParaPr>
                       <m:jc m:val="center"/>
                     </m:oMathParaPr>
-                    <m:oMath xmlns:m="http://schemas.openxmlformats.org/officeDocument/2006/math">
+                    <m:oMath>
                       <m:r>
                         <a:rPr lang="en-US" i="1" smtClean="0">
                           <a:latin typeface="Cambria Math"/>
@@ -11107,7 +11084,7 @@
                             <m:sSubPr>
                               <m:ctrlPr>
                                 <a:rPr lang="en-US" i="1">
-                                  <a:latin typeface="Cambria Math" panose="02040503050406030204" pitchFamily="18" charset="0"/>
+                                  <a:latin typeface="Cambria Math"/>
                                 </a:rPr>
                               </m:ctrlPr>
                             </m:sSubPr>
@@ -11174,7 +11151,7 @@
                                 <m:dPr>
                                   <m:ctrlPr>
                                     <a:rPr lang="en-US" i="1">
-                                      <a:latin typeface="Cambria Math" panose="02040503050406030204" pitchFamily="18" charset="0"/>
+                                      <a:latin typeface="Cambria Math"/>
                                       <a:ea typeface="Cambria Math"/>
                                     </a:rPr>
                                   </m:ctrlPr>
@@ -11225,7 +11202,7 @@
                             <m:sSubPr>
                               <m:ctrlPr>
                                 <a:rPr lang="en-US" i="1">
-                                  <a:latin typeface="Cambria Math" panose="02040503050406030204" pitchFamily="18" charset="0"/>
+                                  <a:latin typeface="Cambria Math"/>
                                   <a:ea typeface="Cambria Math"/>
                                 </a:rPr>
                               </m:ctrlPr>
@@ -11270,7 +11247,7 @@
                                 <m:dPr>
                                   <m:ctrlPr>
                                     <a:rPr lang="en-US" i="1">
-                                      <a:latin typeface="Cambria Math" panose="02040503050406030204" pitchFamily="18" charset="0"/>
+                                      <a:latin typeface="Cambria Math"/>
                                       <a:ea typeface="Cambria Math"/>
                                     </a:rPr>
                                   </m:ctrlPr>
@@ -11337,15 +11314,12 @@
                 </a:pPr>
                 <a14:m>
                   <m:oMathPara xmlns:m="http://schemas.openxmlformats.org/officeDocument/2006/math">
-                    <m:oMathParaPr>
-                      <m:jc m:val="centerGroup"/>
-                    </m:oMathParaPr>
-                    <m:oMath xmlns:m="http://schemas.openxmlformats.org/officeDocument/2006/math">
+                    <m:oMath>
                       <m:sSup>
                         <m:sSupPr>
                           <m:ctrlPr>
-                            <a:rPr lang="en-US" i="1" smtClean="0">
-                              <a:latin typeface="Cambria Math" panose="02040503050406030204" pitchFamily="18" charset="0"/>
+                            <a:rPr lang="en-US" b="0" i="1" smtClean="0">
+                              <a:latin typeface="Cambria Math"/>
                             </a:rPr>
                           </m:ctrlPr>
                         </m:sSupPr>
@@ -11369,7 +11343,7 @@
                       <m:d>
                         <m:dPr>
                           <m:ctrlPr>
-                            <a:rPr lang="en-US" i="1" smtClean="0">
+                            <a:rPr lang="en-US" b="0" i="1" smtClean="0">
                               <a:latin typeface="Cambria Math" panose="02040503050406030204" pitchFamily="18" charset="0"/>
                             </a:rPr>
                           </m:ctrlPr>
@@ -11378,8 +11352,8 @@
                           <m:sSub>
                             <m:sSubPr>
                               <m:ctrlPr>
-                                <a:rPr lang="en-US" i="1" smtClean="0">
-                                  <a:latin typeface="Cambria Math" panose="02040503050406030204" pitchFamily="18" charset="0"/>
+                                <a:rPr lang="en-US" b="0" i="1" smtClean="0">
+                                  <a:latin typeface="Cambria Math"/>
                                 </a:rPr>
                               </m:ctrlPr>
                             </m:sSubPr>
@@ -11419,7 +11393,7 @@
                         <m:dPr>
                           <m:ctrlPr>
                             <a:rPr lang="en-US" b="0" i="1" smtClean="0">
-                              <a:latin typeface="Cambria Math" panose="02040503050406030204" pitchFamily="18" charset="0"/>
+                              <a:latin typeface="Cambria Math"/>
                               <a:ea typeface="Cambria Math"/>
                             </a:rPr>
                           </m:ctrlPr>
@@ -11445,7 +11419,7 @@
                         <m:sSupPr>
                           <m:ctrlPr>
                             <a:rPr lang="en-US" b="0" i="1" smtClean="0">
-                              <a:latin typeface="Cambria Math" panose="02040503050406030204" pitchFamily="18" charset="0"/>
+                              <a:latin typeface="Cambria Math"/>
                               <a:ea typeface="Cambria Math"/>
                             </a:rPr>
                           </m:ctrlPr>
@@ -11483,7 +11457,7 @@
                             <m:sSubPr>
                               <m:ctrlPr>
                                 <a:rPr lang="en-US" b="0" i="1" smtClean="0">
-                                  <a:latin typeface="Cambria Math" panose="02040503050406030204" pitchFamily="18" charset="0"/>
+                                  <a:latin typeface="Cambria Math"/>
                                   <a:ea typeface="Cambria Math"/>
                                 </a:rPr>
                               </m:ctrlPr>
@@ -11548,15 +11522,12 @@
                 </a:pPr>
                 <a14:m>
                   <m:oMathPara xmlns:m="http://schemas.openxmlformats.org/officeDocument/2006/math">
-                    <m:oMathParaPr>
-                      <m:jc m:val="centerGroup"/>
-                    </m:oMathParaPr>
-                    <m:oMath xmlns:m="http://schemas.openxmlformats.org/officeDocument/2006/math">
+                    <m:oMath>
                       <m:sSup>
                         <m:sSupPr>
                           <m:ctrlPr>
                             <a:rPr lang="en-US" i="1">
-                              <a:latin typeface="Cambria Math" panose="02040503050406030204" pitchFamily="18" charset="0"/>
+                              <a:latin typeface="Cambria Math"/>
                             </a:rPr>
                           </m:ctrlPr>
                         </m:sSupPr>
@@ -11590,7 +11561,7 @@
                             <m:sSubPr>
                               <m:ctrlPr>
                                 <a:rPr lang="en-US" i="1">
-                                  <a:latin typeface="Cambria Math" panose="02040503050406030204" pitchFamily="18" charset="0"/>
+                                  <a:latin typeface="Cambria Math"/>
                                 </a:rPr>
                               </m:ctrlPr>
                             </m:sSubPr>
@@ -11630,7 +11601,7 @@
                         <m:dPr>
                           <m:ctrlPr>
                             <a:rPr lang="en-US" i="1">
-                              <a:latin typeface="Cambria Math" panose="02040503050406030204" pitchFamily="18" charset="0"/>
+                              <a:latin typeface="Cambria Math"/>
                               <a:ea typeface="Cambria Math"/>
                             </a:rPr>
                           </m:ctrlPr>
@@ -11656,7 +11627,7 @@
                         <m:sSupPr>
                           <m:ctrlPr>
                             <a:rPr lang="en-US" i="1">
-                              <a:latin typeface="Cambria Math" panose="02040503050406030204" pitchFamily="18" charset="0"/>
+                              <a:latin typeface="Cambria Math"/>
                               <a:ea typeface="Cambria Math"/>
                             </a:rPr>
                           </m:ctrlPr>
@@ -11694,7 +11665,7 @@
                             <m:sSubPr>
                               <m:ctrlPr>
                                 <a:rPr lang="en-US" i="1">
-                                  <a:latin typeface="Cambria Math" panose="02040503050406030204" pitchFamily="18" charset="0"/>
+                                  <a:latin typeface="Cambria Math"/>
                                   <a:ea typeface="Cambria Math"/>
                                 </a:rPr>
                               </m:ctrlPr>
@@ -12237,15 +12208,12 @@
                 </a:pPr>
                 <a14:m>
                   <m:oMathPara xmlns:m="http://schemas.openxmlformats.org/officeDocument/2006/math">
-                    <m:oMathParaPr>
-                      <m:jc m:val="centerGroup"/>
-                    </m:oMathParaPr>
-                    <m:oMath xmlns:m="http://schemas.openxmlformats.org/officeDocument/2006/math">
+                    <m:oMath>
                       <m:sSup>
                         <m:sSupPr>
                           <m:ctrlPr>
                             <a:rPr lang="en-US" i="1">
-                              <a:latin typeface="Cambria Math" panose="02040503050406030204" pitchFamily="18" charset="0"/>
+                              <a:latin typeface="Cambria Math"/>
                             </a:rPr>
                           </m:ctrlPr>
                         </m:sSupPr>
@@ -12279,7 +12247,7 @@
                             <m:sSubPr>
                               <m:ctrlPr>
                                 <a:rPr lang="en-US" i="1">
-                                  <a:latin typeface="Cambria Math" panose="02040503050406030204" pitchFamily="18" charset="0"/>
+                                  <a:latin typeface="Cambria Math"/>
                                 </a:rPr>
                               </m:ctrlPr>
                             </m:sSubPr>
@@ -12319,7 +12287,7 @@
                         <m:dPr>
                           <m:ctrlPr>
                             <a:rPr lang="en-US" i="1">
-                              <a:latin typeface="Cambria Math" panose="02040503050406030204" pitchFamily="18" charset="0"/>
+                              <a:latin typeface="Cambria Math"/>
                               <a:ea typeface="Cambria Math"/>
                             </a:rPr>
                           </m:ctrlPr>
@@ -12345,7 +12313,7 @@
                         <m:sSupPr>
                           <m:ctrlPr>
                             <a:rPr lang="en-US" i="1">
-                              <a:latin typeface="Cambria Math" panose="02040503050406030204" pitchFamily="18" charset="0"/>
+                              <a:latin typeface="Cambria Math"/>
                               <a:ea typeface="Cambria Math"/>
                             </a:rPr>
                           </m:ctrlPr>
@@ -12383,7 +12351,7 @@
                             <m:sSubPr>
                               <m:ctrlPr>
                                 <a:rPr lang="en-US" i="1">
-                                  <a:latin typeface="Cambria Math" panose="02040503050406030204" pitchFamily="18" charset="0"/>
+                                  <a:latin typeface="Cambria Math"/>
                                   <a:ea typeface="Cambria Math"/>
                                 </a:rPr>
                               </m:ctrlPr>
@@ -12517,15 +12485,12 @@
                 <a:pPr/>
                 <a14:m>
                   <m:oMathPara xmlns:m="http://schemas.openxmlformats.org/officeDocument/2006/math">
-                    <m:oMathParaPr>
-                      <m:jc m:val="centerGroup"/>
-                    </m:oMathParaPr>
-                    <m:oMath xmlns:m="http://schemas.openxmlformats.org/officeDocument/2006/math">
+                    <m:oMath>
                       <m:sSup>
                         <m:sSupPr>
                           <m:ctrlPr>
-                            <a:rPr lang="en-US" sz="3200" i="1" smtClean="0">
-                              <a:latin typeface="Cambria Math" panose="02040503050406030204" pitchFamily="18" charset="0"/>
+                            <a:rPr lang="en-US" sz="3200" i="1">
+                              <a:latin typeface="Cambria Math"/>
                             </a:rPr>
                           </m:ctrlPr>
                         </m:sSupPr>
@@ -12549,7 +12514,7 @@
                       <m:d>
                         <m:dPr>
                           <m:ctrlPr>
-                            <a:rPr lang="en-US" sz="3200" i="1">
+                            <a:rPr lang="en-US" sz="3200" b="0" i="1" smtClean="0">
                               <a:latin typeface="Cambria Math" panose="02040503050406030204" pitchFamily="18" charset="0"/>
                             </a:rPr>
                           </m:ctrlPr>
@@ -12668,10 +12633,7 @@
                 <a:pPr/>
                 <a14:m>
                   <m:oMathPara xmlns:m="http://schemas.openxmlformats.org/officeDocument/2006/math">
-                    <m:oMathParaPr>
-                      <m:jc m:val="centerGroup"/>
-                    </m:oMathParaPr>
-                    <m:oMath xmlns:m="http://schemas.openxmlformats.org/officeDocument/2006/math">
+                    <m:oMath>
                       <m:r>
                         <a:rPr lang="en-US" sz="3200" i="1" smtClean="0">
                           <a:latin typeface="Cambria Math"/>
@@ -12683,7 +12645,7 @@
                         <m:sSupPr>
                           <m:ctrlPr>
                             <a:rPr lang="en-US" sz="3200" i="1">
-                              <a:latin typeface="Cambria Math" panose="02040503050406030204" pitchFamily="18" charset="0"/>
+                              <a:latin typeface="Cambria Math"/>
                             </a:rPr>
                           </m:ctrlPr>
                         </m:sSupPr>
@@ -12707,7 +12669,7 @@
                       <m:d>
                         <m:dPr>
                           <m:ctrlPr>
-                            <a:rPr lang="en-US" sz="3200" i="1">
+                            <a:rPr lang="en-US" sz="3200" b="0" i="1" smtClean="0">
                               <a:latin typeface="Cambria Math" panose="02040503050406030204" pitchFamily="18" charset="0"/>
                             </a:rPr>
                           </m:ctrlPr>
@@ -12744,7 +12706,7 @@
                         <m:dPr>
                           <m:ctrlPr>
                             <a:rPr lang="en-US" sz="3200" i="1">
-                              <a:latin typeface="Cambria Math" panose="02040503050406030204" pitchFamily="18" charset="0"/>
+                              <a:latin typeface="Cambria Math"/>
                             </a:rPr>
                           </m:ctrlPr>
                         </m:dPr>
@@ -13265,10 +13227,7 @@
                 </a:pPr>
                 <a14:m>
                   <m:oMathPara xmlns:m="http://schemas.openxmlformats.org/officeDocument/2006/math">
-                    <m:oMathParaPr>
-                      <m:jc m:val="centerGroup"/>
-                    </m:oMathParaPr>
-                    <m:oMath xmlns:m="http://schemas.openxmlformats.org/officeDocument/2006/math">
+                    <m:oMath>
                       <m:r>
                         <a:rPr lang="en-US" b="0" i="1" smtClean="0">
                           <a:latin typeface="Cambria Math"/>
@@ -13279,7 +13238,7 @@
                         <m:dPr>
                           <m:ctrlPr>
                             <a:rPr lang="en-US" b="0" i="1" smtClean="0">
-                              <a:latin typeface="Cambria Math" panose="02040503050406030204" pitchFamily="18" charset="0"/>
+                              <a:latin typeface="Cambria Math"/>
                             </a:rPr>
                           </m:ctrlPr>
                         </m:dPr>
@@ -13301,8 +13260,8 @@
                       <m:func>
                         <m:funcPr>
                           <m:ctrlPr>
-                            <a:rPr lang="en-US" b="0" i="1" smtClean="0">
-                              <a:latin typeface="Cambria Math" panose="02040503050406030204" pitchFamily="18" charset="0"/>
+                            <a:rPr lang="en-US" b="0" i="0" smtClean="0">
+                              <a:latin typeface="Cambria Math"/>
                             </a:rPr>
                           </m:ctrlPr>
                         </m:funcPr>
@@ -13343,15 +13302,12 @@
                 </a:pPr>
                 <a14:m>
                   <m:oMathPara xmlns:m="http://schemas.openxmlformats.org/officeDocument/2006/math">
-                    <m:oMathParaPr>
-                      <m:jc m:val="centerGroup"/>
-                    </m:oMathParaPr>
-                    <m:oMath xmlns:m="http://schemas.openxmlformats.org/officeDocument/2006/math">
+                    <m:oMath>
                       <m:sSup>
                         <m:sSupPr>
                           <m:ctrlPr>
-                            <a:rPr lang="en-US" i="1" smtClean="0">
-                              <a:latin typeface="Cambria Math" panose="02040503050406030204" pitchFamily="18" charset="0"/>
+                            <a:rPr lang="en-US" b="0" i="1" smtClean="0">
+                              <a:latin typeface="Cambria Math"/>
                             </a:rPr>
                           </m:ctrlPr>
                         </m:sSupPr>
@@ -13375,8 +13331,8 @@
                       <m:d>
                         <m:dPr>
                           <m:ctrlPr>
-                            <a:rPr lang="en-US" i="1" smtClean="0">
-                              <a:latin typeface="Cambria Math" panose="02040503050406030204" pitchFamily="18" charset="0"/>
+                            <a:rPr lang="en-US" b="0" i="1" smtClean="0">
+                              <a:latin typeface="Cambria Math"/>
                             </a:rPr>
                           </m:ctrlPr>
                         </m:dPr>
@@ -13399,7 +13355,7 @@
                         <m:fPr>
                           <m:ctrlPr>
                             <a:rPr lang="en-US" b="0" i="1" smtClean="0">
-                              <a:latin typeface="Cambria Math" panose="02040503050406030204" pitchFamily="18" charset="0"/>
+                              <a:latin typeface="Cambria Math"/>
                             </a:rPr>
                           </m:ctrlPr>
                         </m:fPr>
@@ -13437,14 +13393,11 @@
                 </a:pPr>
                 <a14:m>
                   <m:oMathPara xmlns:m="http://schemas.openxmlformats.org/officeDocument/2006/math">
-                    <m:oMathParaPr>
-                      <m:jc m:val="centerGroup"/>
-                    </m:oMathParaPr>
-                    <m:oMath xmlns:m="http://schemas.openxmlformats.org/officeDocument/2006/math">
+                    <m:oMath>
                       <m:f>
                         <m:fPr>
                           <m:ctrlPr>
-                            <a:rPr lang="en-US" i="1" smtClean="0">
+                            <a:rPr lang="en-US" b="0" i="1" smtClean="0">
                               <a:latin typeface="Cambria Math" panose="02040503050406030204" pitchFamily="18" charset="0"/>
                             </a:rPr>
                           </m:ctrlPr>
@@ -13453,8 +13406,8 @@
                           <m:sSub>
                             <m:sSubPr>
                               <m:ctrlPr>
-                                <a:rPr lang="en-US" i="1" smtClean="0">
-                                  <a:latin typeface="Cambria Math" panose="02040503050406030204" pitchFamily="18" charset="0"/>
+                                <a:rPr lang="en-US" b="0" i="1" smtClean="0">
+                                  <a:latin typeface="Cambria Math"/>
                                 </a:rPr>
                               </m:ctrlPr>
                             </m:sSubPr>
@@ -13480,8 +13433,8 @@
                           <m:sSub>
                             <m:sSubPr>
                               <m:ctrlPr>
-                                <a:rPr lang="en-US" i="1" smtClean="0">
-                                  <a:latin typeface="Cambria Math" panose="02040503050406030204" pitchFamily="18" charset="0"/>
+                                <a:rPr lang="en-US" b="0" i="1" smtClean="0">
+                                  <a:latin typeface="Cambria Math"/>
                                 </a:rPr>
                               </m:ctrlPr>
                             </m:sSubPr>
@@ -13521,7 +13474,7 @@
                         <m:dPr>
                           <m:ctrlPr>
                             <a:rPr lang="en-US" b="0" i="1" smtClean="0">
-                              <a:latin typeface="Cambria Math" panose="02040503050406030204" pitchFamily="18" charset="0"/>
+                              <a:latin typeface="Cambria Math"/>
                               <a:ea typeface="Cambria Math"/>
                             </a:rPr>
                           </m:ctrlPr>
@@ -13885,14 +13838,11 @@
                 </a:pPr>
                 <a14:m>
                   <m:oMathPara xmlns:m="http://schemas.openxmlformats.org/officeDocument/2006/math">
-                    <m:oMathParaPr>
-                      <m:jc m:val="centerGroup"/>
-                    </m:oMathParaPr>
-                    <m:oMath xmlns:m="http://schemas.openxmlformats.org/officeDocument/2006/math">
+                    <m:oMath>
                       <m:f>
                         <m:fPr>
                           <m:ctrlPr>
-                            <a:rPr lang="en-US" i="1" smtClean="0">
+                            <a:rPr lang="en-US" i="1">
                               <a:latin typeface="Cambria Math" panose="02040503050406030204" pitchFamily="18" charset="0"/>
                             </a:rPr>
                           </m:ctrlPr>
@@ -13902,7 +13852,7 @@
                             <m:sSubPr>
                               <m:ctrlPr>
                                 <a:rPr lang="en-US" i="1">
-                                  <a:latin typeface="Cambria Math" panose="02040503050406030204" pitchFamily="18" charset="0"/>
+                                  <a:latin typeface="Cambria Math"/>
                                 </a:rPr>
                               </m:ctrlPr>
                             </m:sSubPr>
@@ -13929,7 +13879,7 @@
                             <m:sSubPr>
                               <m:ctrlPr>
                                 <a:rPr lang="en-US" i="1">
-                                  <a:latin typeface="Cambria Math" panose="02040503050406030204" pitchFamily="18" charset="0"/>
+                                  <a:latin typeface="Cambria Math"/>
                                 </a:rPr>
                               </m:ctrlPr>
                             </m:sSubPr>
@@ -13969,7 +13919,7 @@
                         <m:dPr>
                           <m:ctrlPr>
                             <a:rPr lang="en-US" i="1">
-                              <a:latin typeface="Cambria Math" panose="02040503050406030204" pitchFamily="18" charset="0"/>
+                              <a:latin typeface="Cambria Math"/>
                               <a:ea typeface="Cambria Math"/>
                             </a:rPr>
                           </m:ctrlPr>
@@ -14007,7 +13957,7 @@
                       <m:sSubPr>
                         <m:ctrlPr>
                           <a:rPr lang="en-US" i="1">
-                            <a:latin typeface="Cambria Math" panose="02040503050406030204" pitchFamily="18" charset="0"/>
+                            <a:latin typeface="Cambria Math"/>
                           </a:rPr>
                         </m:ctrlPr>
                       </m:sSubPr>
@@ -14038,7 +13988,7 @@
                       <m:sSubPr>
                         <m:ctrlPr>
                           <a:rPr lang="en-US" i="1">
-                            <a:latin typeface="Cambria Math" panose="02040503050406030204" pitchFamily="18" charset="0"/>
+                            <a:latin typeface="Cambria Math"/>
                           </a:rPr>
                         </m:ctrlPr>
                       </m:sSubPr>
@@ -14723,14 +14673,11 @@
                 </a:pPr>
                 <a14:m>
                   <m:oMathPara xmlns:m="http://schemas.openxmlformats.org/officeDocument/2006/math">
-                    <m:oMathParaPr>
-                      <m:jc m:val="centerGroup"/>
-                    </m:oMathParaPr>
-                    <m:oMath xmlns:m="http://schemas.openxmlformats.org/officeDocument/2006/math">
+                    <m:oMath>
                       <m:f>
                         <m:fPr>
                           <m:ctrlPr>
-                            <a:rPr lang="en-US" i="1" smtClean="0">
+                            <a:rPr lang="en-US" i="1">
                               <a:latin typeface="Cambria Math" panose="02040503050406030204" pitchFamily="18" charset="0"/>
                             </a:rPr>
                           </m:ctrlPr>
@@ -14740,7 +14687,7 @@
                             <m:sSubPr>
                               <m:ctrlPr>
                                 <a:rPr lang="en-US" i="1">
-                                  <a:latin typeface="Cambria Math" panose="02040503050406030204" pitchFamily="18" charset="0"/>
+                                  <a:latin typeface="Cambria Math"/>
                                 </a:rPr>
                               </m:ctrlPr>
                             </m:sSubPr>
@@ -14767,7 +14714,7 @@
                             <m:sSubPr>
                               <m:ctrlPr>
                                 <a:rPr lang="en-US" i="1">
-                                  <a:latin typeface="Cambria Math" panose="02040503050406030204" pitchFamily="18" charset="0"/>
+                                  <a:latin typeface="Cambria Math"/>
                                 </a:rPr>
                               </m:ctrlPr>
                             </m:sSubPr>
@@ -14807,7 +14754,7 @@
                         <m:dPr>
                           <m:ctrlPr>
                             <a:rPr lang="en-US" i="1">
-                              <a:latin typeface="Cambria Math" panose="02040503050406030204" pitchFamily="18" charset="0"/>
+                              <a:latin typeface="Cambria Math"/>
                               <a:ea typeface="Cambria Math"/>
                             </a:rPr>
                           </m:ctrlPr>
@@ -14852,7 +14799,7 @@
                       <m:dPr>
                         <m:ctrlPr>
                           <a:rPr lang="en-US" i="1">
-                            <a:latin typeface="Cambria Math" panose="02040503050406030204" pitchFamily="18" charset="0"/>
+                            <a:latin typeface="Cambria Math"/>
                             <a:ea typeface="Cambria Math"/>
                           </a:rPr>
                         </m:ctrlPr>
@@ -14897,15 +14844,12 @@
                 </a:pPr>
                 <a14:m>
                   <m:oMathPara xmlns:m="http://schemas.openxmlformats.org/officeDocument/2006/math">
-                    <m:oMathParaPr>
-                      <m:jc m:val="centerGroup"/>
-                    </m:oMathParaPr>
-                    <m:oMath xmlns:m="http://schemas.openxmlformats.org/officeDocument/2006/math">
+                    <m:oMath>
                       <m:sSub>
                         <m:sSubPr>
                           <m:ctrlPr>
-                            <a:rPr lang="en-US" i="1" smtClean="0">
-                              <a:latin typeface="Cambria Math" panose="02040503050406030204" pitchFamily="18" charset="0"/>
+                            <a:rPr lang="en-US" b="0" i="1" smtClean="0">
+                              <a:latin typeface="Cambria Math"/>
                             </a:rPr>
                           </m:ctrlPr>
                         </m:sSubPr>
@@ -14936,7 +14880,7 @@
                         <m:sSubPr>
                           <m:ctrlPr>
                             <a:rPr lang="en-US" b="0" i="1" smtClean="0">
-                              <a:latin typeface="Cambria Math" panose="02040503050406030204" pitchFamily="18" charset="0"/>
+                              <a:latin typeface="Cambria Math"/>
                             </a:rPr>
                           </m:ctrlPr>
                         </m:sSubPr>
@@ -14973,8 +14917,8 @@
                     <m:sSub>
                       <m:sSubPr>
                         <m:ctrlPr>
-                          <a:rPr lang="en-US" i="1" smtClean="0">
-                            <a:latin typeface="Cambria Math" panose="02040503050406030204" pitchFamily="18" charset="0"/>
+                          <a:rPr lang="en-US" b="0" i="1" smtClean="0">
+                            <a:latin typeface="Cambria Math"/>
                           </a:rPr>
                         </m:ctrlPr>
                       </m:sSubPr>
@@ -15006,8 +14950,8 @@
                     <m:sSub>
                       <m:sSubPr>
                         <m:ctrlPr>
-                          <a:rPr lang="en-US" i="1" smtClean="0">
-                            <a:latin typeface="Cambria Math" panose="02040503050406030204" pitchFamily="18" charset="0"/>
+                          <a:rPr lang="en-US" b="0" i="1" smtClean="0">
+                            <a:latin typeface="Cambria Math"/>
                           </a:rPr>
                         </m:ctrlPr>
                       </m:sSubPr>
@@ -15676,6 +15620,171 @@
       </p:grpSpPr>
       <p:sp>
         <p:nvSpPr>
+          <p:cNvPr id="2" name="Title 1">
+            <a:extLst>
+              <a:ext uri="{FF2B5EF4-FFF2-40B4-BE49-F238E27FC236}">
+                <a16:creationId xmlns:a16="http://schemas.microsoft.com/office/drawing/2014/main" id="{E0B6AA03-03EB-E895-3D6B-A7EFB90CA978}"/>
+              </a:ext>
+            </a:extLst>
+          </p:cNvPr>
+          <p:cNvSpPr>
+            <a:spLocks noGrp="1"/>
+          </p:cNvSpPr>
+          <p:nvPr>
+            <p:ph type="title"/>
+          </p:nvPr>
+        </p:nvSpPr>
+        <p:spPr/>
+        <p:txBody>
+          <a:bodyPr/>
+          <a:lstStyle/>
+          <a:p>
+            <a:r>
+              <a:rPr lang="en-US" dirty="0" err="1"/>
+              <a:t>iClicker</a:t>
+            </a:r>
+            <a:r>
+              <a:rPr lang="en-US" dirty="0"/>
+              <a:t> Poll</a:t>
+            </a:r>
+          </a:p>
+        </p:txBody>
+      </p:sp>
+      <p:sp>
+        <p:nvSpPr>
+          <p:cNvPr id="3" name="Content Placeholder 2">
+            <a:extLst>
+              <a:ext uri="{FF2B5EF4-FFF2-40B4-BE49-F238E27FC236}">
+                <a16:creationId xmlns:a16="http://schemas.microsoft.com/office/drawing/2014/main" id="{DC61F124-091A-E174-878D-65946E7D08B4}"/>
+              </a:ext>
+            </a:extLst>
+          </p:cNvPr>
+          <p:cNvSpPr>
+            <a:spLocks noGrp="1"/>
+          </p:cNvSpPr>
+          <p:nvPr>
+            <p:ph idx="1"/>
+          </p:nvPr>
+        </p:nvSpPr>
+        <p:spPr/>
+        <p:txBody>
+          <a:bodyPr/>
+          <a:lstStyle/>
+          <a:p>
+            <a:r>
+              <a:rPr lang="en-US" dirty="0"/>
+              <a:t>Suppose the interest rate in the economy rose by 1 percentage point. How much less would you consumer over the next year as a fraction of your annual consumption?</a:t>
+            </a:r>
+          </a:p>
+          <a:p>
+            <a:pPr marL="514350" indent="-514350">
+              <a:buFont typeface="+mj-lt"/>
+              <a:buAutoNum type="alphaLcParenR"/>
+            </a:pPr>
+            <a:r>
+              <a:rPr lang="en-US" dirty="0"/>
+              <a:t>0-0.5%</a:t>
+            </a:r>
+          </a:p>
+          <a:p>
+            <a:pPr marL="514350" indent="-514350">
+              <a:buFont typeface="+mj-lt"/>
+              <a:buAutoNum type="alphaLcParenR"/>
+            </a:pPr>
+            <a:r>
+              <a:rPr lang="en-US" dirty="0"/>
+              <a:t>0.5-1.0%</a:t>
+            </a:r>
+          </a:p>
+          <a:p>
+            <a:pPr marL="514350" indent="-514350">
+              <a:buFont typeface="+mj-lt"/>
+              <a:buAutoNum type="alphaLcParenR"/>
+            </a:pPr>
+            <a:r>
+              <a:rPr lang="en-US" dirty="0"/>
+              <a:t>1.0-2.0%</a:t>
+            </a:r>
+          </a:p>
+          <a:p>
+            <a:pPr marL="514350" indent="-514350">
+              <a:buFont typeface="+mj-lt"/>
+              <a:buAutoNum type="alphaLcParenR"/>
+            </a:pPr>
+            <a:r>
+              <a:rPr lang="en-US" dirty="0"/>
+              <a:t>&gt;2%</a:t>
+            </a:r>
+          </a:p>
+        </p:txBody>
+      </p:sp>
+      <p:sp>
+        <p:nvSpPr>
+          <p:cNvPr id="4" name="Slide Number Placeholder 3">
+            <a:extLst>
+              <a:ext uri="{FF2B5EF4-FFF2-40B4-BE49-F238E27FC236}">
+                <a16:creationId xmlns:a16="http://schemas.microsoft.com/office/drawing/2014/main" id="{B6F07E4D-0119-A605-AB63-44B8D903165B}"/>
+              </a:ext>
+            </a:extLst>
+          </p:cNvPr>
+          <p:cNvSpPr>
+            <a:spLocks noGrp="1"/>
+          </p:cNvSpPr>
+          <p:nvPr>
+            <p:ph type="sldNum" sz="quarter" idx="12"/>
+          </p:nvPr>
+        </p:nvSpPr>
+        <p:spPr/>
+        <p:txBody>
+          <a:bodyPr/>
+          <a:lstStyle/>
+          <a:p>
+            <a:pPr>
+              <a:defRPr/>
+            </a:pPr>
+            <a:fld id="{0B9AA5AD-3701-488D-8337-65701EB767E3}" type="slidenum">
+              <a:rPr lang="en-US" smtClean="0"/>
+              <a:pPr>
+                <a:defRPr/>
+              </a:pPr>
+              <a:t>21</a:t>
+            </a:fld>
+            <a:endParaRPr lang="en-US" dirty="0"/>
+          </a:p>
+        </p:txBody>
+      </p:sp>
+    </p:spTree>
+    <p:extLst>
+      <p:ext uri="{BB962C8B-B14F-4D97-AF65-F5344CB8AC3E}">
+        <p14:creationId xmlns:p14="http://schemas.microsoft.com/office/powerpoint/2010/main" val="165197684"/>
+      </p:ext>
+    </p:extLst>
+  </p:cSld>
+  <p:clrMapOvr>
+    <a:masterClrMapping/>
+  </p:clrMapOvr>
+</p:sld>
+</file>
+
+<file path=ppt/slides/slide22.xml><?xml version="1.0" encoding="utf-8"?>
+<p:sld xmlns:a="http://schemas.openxmlformats.org/drawingml/2006/main" xmlns:r="http://schemas.openxmlformats.org/officeDocument/2006/relationships" xmlns:p="http://schemas.openxmlformats.org/presentationml/2006/main">
+  <p:cSld>
+    <p:spTree>
+      <p:nvGrpSpPr>
+        <p:cNvPr id="1" name=""/>
+        <p:cNvGrpSpPr/>
+        <p:nvPr/>
+      </p:nvGrpSpPr>
+      <p:grpSpPr>
+        <a:xfrm>
+          <a:off x="0" y="0"/>
+          <a:ext cx="0" cy="0"/>
+          <a:chOff x="0" y="0"/>
+          <a:chExt cx="0" cy="0"/>
+        </a:xfrm>
+      </p:grpSpPr>
+      <p:sp>
+        <p:nvSpPr>
           <p:cNvPr id="2" name="Title 1"/>
           <p:cNvSpPr>
             <a:spLocks noGrp="1"/>
@@ -15723,14 +15832,11 @@
                 </a:pPr>
                 <a14:m>
                   <m:oMathPara xmlns:m="http://schemas.openxmlformats.org/officeDocument/2006/math">
-                    <m:oMathParaPr>
-                      <m:jc m:val="centerGroup"/>
-                    </m:oMathParaPr>
-                    <m:oMath xmlns:m="http://schemas.openxmlformats.org/officeDocument/2006/math">
+                    <m:oMath>
                       <m:f>
                         <m:fPr>
                           <m:ctrlPr>
-                            <a:rPr lang="en-US" i="1" smtClean="0">
+                            <a:rPr lang="en-US" i="1">
                               <a:latin typeface="Cambria Math" panose="02040503050406030204" pitchFamily="18" charset="0"/>
                             </a:rPr>
                           </m:ctrlPr>
@@ -15740,7 +15846,7 @@
                             <m:sSubPr>
                               <m:ctrlPr>
                                 <a:rPr lang="en-US" i="1">
-                                  <a:latin typeface="Cambria Math" panose="02040503050406030204" pitchFamily="18" charset="0"/>
+                                  <a:latin typeface="Cambria Math"/>
                                 </a:rPr>
                               </m:ctrlPr>
                             </m:sSubPr>
@@ -15767,7 +15873,7 @@
                             <m:sSubPr>
                               <m:ctrlPr>
                                 <a:rPr lang="en-US" i="1">
-                                  <a:latin typeface="Cambria Math" panose="02040503050406030204" pitchFamily="18" charset="0"/>
+                                  <a:latin typeface="Cambria Math"/>
                                 </a:rPr>
                               </m:ctrlPr>
                             </m:sSubPr>
@@ -15807,7 +15913,7 @@
                         <m:dPr>
                           <m:ctrlPr>
                             <a:rPr lang="en-US" i="1">
-                              <a:latin typeface="Cambria Math" panose="02040503050406030204" pitchFamily="18" charset="0"/>
+                              <a:latin typeface="Cambria Math"/>
                               <a:ea typeface="Cambria Math"/>
                             </a:rPr>
                           </m:ctrlPr>
@@ -15892,7 +15998,7 @@
                       <m:fPr>
                         <m:type m:val="lin"/>
                         <m:ctrlPr>
-                          <a:rPr lang="en-US" i="1" smtClean="0">
+                          <a:rPr lang="en-US" b="0" i="1" smtClean="0">
                             <a:latin typeface="Cambria Math" panose="02040503050406030204" pitchFamily="18" charset="0"/>
                           </a:rPr>
                         </m:ctrlPr>
@@ -15901,8 +16007,8 @@
                         <m:sSub>
                           <m:sSubPr>
                             <m:ctrlPr>
-                              <a:rPr lang="en-US" i="1" smtClean="0">
-                                <a:latin typeface="Cambria Math" panose="02040503050406030204" pitchFamily="18" charset="0"/>
+                              <a:rPr lang="en-US" b="0" i="1" smtClean="0">
+                                <a:latin typeface="Cambria Math"/>
                               </a:rPr>
                             </m:ctrlPr>
                           </m:sSubPr>
@@ -15928,8 +16034,8 @@
                         <m:sSub>
                           <m:sSubPr>
                             <m:ctrlPr>
-                              <a:rPr lang="en-US" i="1" smtClean="0">
-                                <a:latin typeface="Cambria Math" panose="02040503050406030204" pitchFamily="18" charset="0"/>
+                              <a:rPr lang="en-US" b="0" i="1" smtClean="0">
+                                <a:latin typeface="Cambria Math"/>
                               </a:rPr>
                             </m:ctrlPr>
                           </m:sSubPr>
@@ -16023,7 +16129,7 @@
               <a:pPr>
                 <a:defRPr/>
               </a:pPr>
-              <a:t>21</a:t>
+              <a:t>22</a:t>
             </a:fld>
             <a:endParaRPr lang="en-US" dirty="0"/>
           </a:p>
@@ -16219,7 +16325,7 @@
 </p:sld>
 </file>
 
-<file path=ppt/slides/slide22.xml><?xml version="1.0" encoding="utf-8"?>
+<file path=ppt/slides/slide23.xml><?xml version="1.0" encoding="utf-8"?>
 <p:sld xmlns:a="http://schemas.openxmlformats.org/drawingml/2006/main" xmlns:r="http://schemas.openxmlformats.org/officeDocument/2006/relationships" xmlns:p="http://schemas.openxmlformats.org/presentationml/2006/main">
   <p:cSld>
     <p:spTree>
@@ -16299,10 +16405,7 @@
                 </a:pPr>
                 <a14:m>
                   <m:oMathPara xmlns:m="http://schemas.openxmlformats.org/officeDocument/2006/math">
-                    <m:oMathParaPr>
-                      <m:jc m:val="centerGroup"/>
-                    </m:oMathParaPr>
-                    <m:oMath xmlns:m="http://schemas.openxmlformats.org/officeDocument/2006/math">
+                    <m:oMath>
                       <m:f>
                         <m:fPr>
                           <m:ctrlPr>
@@ -16316,7 +16419,7 @@
                             <m:sSubPr>
                               <m:ctrlPr>
                                 <a:rPr lang="en-US" i="1">
-                                  <a:latin typeface="Cambria Math" panose="02040503050406030204" pitchFamily="18" charset="0"/>
+                                  <a:latin typeface="Cambria Math"/>
                                 </a:rPr>
                               </m:ctrlPr>
                             </m:sSubPr>
@@ -16343,7 +16446,7 @@
                             <m:sSubPr>
                               <m:ctrlPr>
                                 <a:rPr lang="en-US" i="1">
-                                  <a:latin typeface="Cambria Math" panose="02040503050406030204" pitchFamily="18" charset="0"/>
+                                  <a:latin typeface="Cambria Math"/>
                                 </a:rPr>
                               </m:ctrlPr>
                             </m:sSubPr>
@@ -16383,7 +16486,7 @@
                         <m:dPr>
                           <m:ctrlPr>
                             <a:rPr lang="en-US" i="1">
-                              <a:latin typeface="Cambria Math" panose="02040503050406030204" pitchFamily="18" charset="0"/>
+                              <a:latin typeface="Cambria Math"/>
                               <a:ea typeface="Cambria Math"/>
                             </a:rPr>
                           </m:ctrlPr>
@@ -16419,15 +16522,12 @@
                 </a:pPr>
                 <a14:m>
                   <m:oMathPara xmlns:m="http://schemas.openxmlformats.org/officeDocument/2006/math">
-                    <m:oMathParaPr>
-                      <m:jc m:val="centerGroup"/>
-                    </m:oMathParaPr>
-                    <m:oMath xmlns:m="http://schemas.openxmlformats.org/officeDocument/2006/math">
+                    <m:oMath>
                       <m:sSub>
                         <m:sSubPr>
                           <m:ctrlPr>
                             <a:rPr lang="en-US" i="1">
-                              <a:latin typeface="Cambria Math" panose="02040503050406030204" pitchFamily="18" charset="0"/>
+                              <a:latin typeface="Cambria Math"/>
                             </a:rPr>
                           </m:ctrlPr>
                         </m:sSubPr>
@@ -16458,7 +16558,7 @@
                         <m:fPr>
                           <m:ctrlPr>
                             <a:rPr lang="en-US" i="1">
-                              <a:latin typeface="Cambria Math" panose="02040503050406030204" pitchFamily="18" charset="0"/>
+                              <a:latin typeface="Cambria Math"/>
                             </a:rPr>
                           </m:ctrlPr>
                         </m:fPr>
@@ -16489,7 +16589,7 @@
                         <m:sSubPr>
                           <m:ctrlPr>
                             <a:rPr lang="en-US" i="1">
-                              <a:latin typeface="Cambria Math" panose="02040503050406030204" pitchFamily="18" charset="0"/>
+                              <a:latin typeface="Cambria Math"/>
                             </a:rPr>
                           </m:ctrlPr>
                         </m:sSubPr>
@@ -16520,7 +16620,7 @@
                         <m:sSubPr>
                           <m:ctrlPr>
                             <a:rPr lang="en-US" i="1">
-                              <a:latin typeface="Cambria Math" panose="02040503050406030204" pitchFamily="18" charset="0"/>
+                              <a:latin typeface="Cambria Math"/>
                             </a:rPr>
                           </m:ctrlPr>
                         </m:sSubPr>
@@ -16551,7 +16651,7 @@
                         <m:fPr>
                           <m:ctrlPr>
                             <a:rPr lang="en-US" i="1">
-                              <a:latin typeface="Cambria Math" panose="02040503050406030204" pitchFamily="18" charset="0"/>
+                              <a:latin typeface="Cambria Math"/>
                             </a:rPr>
                           </m:ctrlPr>
                         </m:fPr>
@@ -16582,7 +16682,7 @@
                         <m:sSubPr>
                           <m:ctrlPr>
                             <a:rPr lang="en-US" i="1">
-                              <a:latin typeface="Cambria Math" panose="02040503050406030204" pitchFamily="18" charset="0"/>
+                              <a:latin typeface="Cambria Math"/>
                             </a:rPr>
                           </m:ctrlPr>
                         </m:sSubPr>
@@ -16640,7 +16740,7 @@
                     <m:sSub>
                       <m:sSubPr>
                         <m:ctrlPr>
-                          <a:rPr lang="en-US" i="1" smtClean="0">
+                          <a:rPr lang="en-US" b="0" i="1" smtClean="0">
                             <a:latin typeface="Cambria Math" panose="02040503050406030204" pitchFamily="18" charset="0"/>
                           </a:rPr>
                         </m:ctrlPr>
@@ -16673,7 +16773,7 @@
                     <m:sSub>
                       <m:sSubPr>
                         <m:ctrlPr>
-                          <a:rPr lang="en-US" i="1" smtClean="0">
+                          <a:rPr lang="en-US" b="0" i="1" smtClean="0">
                             <a:latin typeface="Cambria Math" panose="02040503050406030204" pitchFamily="18" charset="0"/>
                           </a:rPr>
                         </m:ctrlPr>
@@ -16763,7 +16863,7 @@
               <a:pPr>
                 <a:defRPr/>
               </a:pPr>
-              <a:t>22</a:t>
+              <a:t>23</a:t>
             </a:fld>
             <a:endParaRPr lang="en-US" dirty="0"/>
           </a:p>
@@ -17180,7 +17280,7 @@
 </p:sld>
 </file>
 
-<file path=ppt/slides/slide23.xml><?xml version="1.0" encoding="utf-8"?>
+<file path=ppt/slides/slide24.xml><?xml version="1.0" encoding="utf-8"?>
 <p:sld xmlns:a="http://schemas.openxmlformats.org/drawingml/2006/main" xmlns:r="http://schemas.openxmlformats.org/officeDocument/2006/relationships" xmlns:p="http://schemas.openxmlformats.org/presentationml/2006/main">
   <p:cSld>
     <p:spTree>
@@ -17254,15 +17354,12 @@
                 </a:pPr>
                 <a14:m>
                   <m:oMathPara xmlns:m="http://schemas.openxmlformats.org/officeDocument/2006/math">
-                    <m:oMathParaPr>
-                      <m:jc m:val="centerGroup"/>
-                    </m:oMathParaPr>
-                    <m:oMath xmlns:m="http://schemas.openxmlformats.org/officeDocument/2006/math">
+                    <m:oMath>
                       <m:sSub>
                         <m:sSubPr>
                           <m:ctrlPr>
-                            <a:rPr lang="en-US" i="1" smtClean="0">
-                              <a:latin typeface="Cambria Math" panose="02040503050406030204" pitchFamily="18" charset="0"/>
+                            <a:rPr lang="en-US" b="0" i="1" smtClean="0">
+                              <a:latin typeface="Cambria Math"/>
                             </a:rPr>
                           </m:ctrlPr>
                         </m:sSubPr>
@@ -17293,7 +17390,7 @@
                         <m:fPr>
                           <m:ctrlPr>
                             <a:rPr lang="en-US" b="0" i="1" smtClean="0">
-                              <a:latin typeface="Cambria Math" panose="02040503050406030204" pitchFamily="18" charset="0"/>
+                              <a:latin typeface="Cambria Math"/>
                             </a:rPr>
                           </m:ctrlPr>
                         </m:fPr>
@@ -17334,7 +17431,7 @@
                             <m:sSubPr>
                               <m:ctrlPr>
                                 <a:rPr lang="en-US" b="0" i="1" smtClean="0">
-                                  <a:latin typeface="Cambria Math" panose="02040503050406030204" pitchFamily="18" charset="0"/>
+                                  <a:latin typeface="Cambria Math"/>
                                 </a:rPr>
                               </m:ctrlPr>
                             </m:sSubPr>
@@ -17365,7 +17462,7 @@
                             <m:fPr>
                               <m:ctrlPr>
                                 <a:rPr lang="en-US" b="0" i="1" smtClean="0">
-                                  <a:latin typeface="Cambria Math" panose="02040503050406030204" pitchFamily="18" charset="0"/>
+                                  <a:latin typeface="Cambria Math"/>
                                 </a:rPr>
                               </m:ctrlPr>
                             </m:fPr>
@@ -17396,7 +17493,7 @@
                             <m:sSubPr>
                               <m:ctrlPr>
                                 <a:rPr lang="en-US" b="0" i="1" smtClean="0">
-                                  <a:latin typeface="Cambria Math" panose="02040503050406030204" pitchFamily="18" charset="0"/>
+                                  <a:latin typeface="Cambria Math"/>
                                 </a:rPr>
                               </m:ctrlPr>
                             </m:sSubPr>
@@ -17548,7 +17645,7 @@
               <a:pPr>
                 <a:defRPr/>
               </a:pPr>
-              <a:t>23</a:t>
+              <a:t>24</a:t>
             </a:fld>
             <a:endParaRPr lang="en-US" dirty="0"/>
           </a:p>
@@ -17677,7 +17774,7 @@
 </p:sld>
 </file>
 
-<file path=ppt/slides/slide24.xml><?xml version="1.0" encoding="utf-8"?>
+<file path=ppt/slides/slide25.xml><?xml version="1.0" encoding="utf-8"?>
 <p:sld xmlns:a="http://schemas.openxmlformats.org/drawingml/2006/main" xmlns:r="http://schemas.openxmlformats.org/officeDocument/2006/relationships" xmlns:p="http://schemas.openxmlformats.org/presentationml/2006/main">
   <p:cSld>
     <p:spTree>
@@ -17782,15 +17879,12 @@
                 </a:pPr>
                 <a14:m>
                   <m:oMathPara xmlns:m="http://schemas.openxmlformats.org/officeDocument/2006/math">
-                    <m:oMathParaPr>
-                      <m:jc m:val="centerGroup"/>
-                    </m:oMathParaPr>
-                    <m:oMath xmlns:m="http://schemas.openxmlformats.org/officeDocument/2006/math">
+                    <m:oMath>
                       <m:sSub>
                         <m:sSubPr>
                           <m:ctrlPr>
-                            <a:rPr lang="en-US" i="1" smtClean="0">
-                              <a:latin typeface="Cambria Math" panose="02040503050406030204" pitchFamily="18" charset="0"/>
+                            <a:rPr lang="en-US" b="0" i="1" smtClean="0">
+                              <a:latin typeface="Cambria Math"/>
                             </a:rPr>
                           </m:ctrlPr>
                         </m:sSubPr>
@@ -17821,7 +17915,7 @@
                         <m:fPr>
                           <m:ctrlPr>
                             <a:rPr lang="en-US" b="0" i="1" smtClean="0">
-                              <a:latin typeface="Cambria Math" panose="02040503050406030204" pitchFamily="18" charset="0"/>
+                              <a:latin typeface="Cambria Math"/>
                             </a:rPr>
                           </m:ctrlPr>
                         </m:fPr>
@@ -17847,7 +17941,7 @@
                           <m:chr m:val="∑"/>
                           <m:ctrlPr>
                             <a:rPr lang="en-US" b="0" i="1" smtClean="0">
-                              <a:latin typeface="Cambria Math" panose="02040503050406030204" pitchFamily="18" charset="0"/>
+                              <a:latin typeface="Cambria Math"/>
                             </a:rPr>
                           </m:ctrlPr>
                         </m:naryPr>
@@ -17899,7 +17993,7 @@
                                     <m:fPr>
                                       <m:ctrlPr>
                                         <a:rPr lang="en-US" b="0" i="1" smtClean="0">
-                                          <a:latin typeface="Cambria Math" panose="02040503050406030204" pitchFamily="18" charset="0"/>
+                                          <a:latin typeface="Cambria Math"/>
                                         </a:rPr>
                                       </m:ctrlPr>
                                     </m:fPr>
@@ -17948,7 +18042,7 @@
                             <m:sSubPr>
                               <m:ctrlPr>
                                 <a:rPr lang="en-US" b="0" i="1" smtClean="0">
-                                  <a:latin typeface="Cambria Math" panose="02040503050406030204" pitchFamily="18" charset="0"/>
+                                  <a:latin typeface="Cambria Math"/>
                                 </a:rPr>
                               </m:ctrlPr>
                             </m:sSubPr>
@@ -18046,7 +18140,7 @@
               <a:pPr>
                 <a:defRPr/>
               </a:pPr>
-              <a:t>24</a:t>
+              <a:t>25</a:t>
             </a:fld>
             <a:endParaRPr lang="en-US" dirty="0"/>
           </a:p>
@@ -18273,7 +18367,7 @@
 </p:sld>
 </file>
 
-<file path=ppt/slides/slide25.xml><?xml version="1.0" encoding="utf-8"?>
+<file path=ppt/slides/slide26.xml><?xml version="1.0" encoding="utf-8"?>
 <p:sld xmlns:a="http://schemas.openxmlformats.org/drawingml/2006/main" xmlns:r="http://schemas.openxmlformats.org/officeDocument/2006/relationships" xmlns:p="http://schemas.openxmlformats.org/presentationml/2006/main">
   <p:cSld>
     <p:spTree>
@@ -18341,15 +18435,12 @@
                 </a:pPr>
                 <a14:m>
                   <m:oMathPara xmlns:m="http://schemas.openxmlformats.org/officeDocument/2006/math">
-                    <m:oMathParaPr>
-                      <m:jc m:val="centerGroup"/>
-                    </m:oMathParaPr>
-                    <m:oMath xmlns:m="http://schemas.openxmlformats.org/officeDocument/2006/math">
+                    <m:oMath>
                       <m:sSub>
                         <m:sSubPr>
                           <m:ctrlPr>
-                            <a:rPr lang="en-US" i="1" smtClean="0">
-                              <a:latin typeface="Cambria Math" panose="02040503050406030204" pitchFamily="18" charset="0"/>
+                            <a:rPr lang="en-US" i="1">
+                              <a:latin typeface="Cambria Math"/>
                             </a:rPr>
                           </m:ctrlPr>
                         </m:sSubPr>
@@ -18380,7 +18471,7 @@
                         <m:fPr>
                           <m:ctrlPr>
                             <a:rPr lang="en-US" i="1">
-                              <a:latin typeface="Cambria Math" panose="02040503050406030204" pitchFamily="18" charset="0"/>
+                              <a:latin typeface="Cambria Math"/>
                             </a:rPr>
                           </m:ctrlPr>
                         </m:fPr>
@@ -18406,7 +18497,7 @@
                           <m:chr m:val="∑"/>
                           <m:ctrlPr>
                             <a:rPr lang="en-US" i="1">
-                              <a:latin typeface="Cambria Math" panose="02040503050406030204" pitchFamily="18" charset="0"/>
+                              <a:latin typeface="Cambria Math"/>
                             </a:rPr>
                           </m:ctrlPr>
                         </m:naryPr>
@@ -18458,7 +18549,7 @@
                                     <m:fPr>
                                       <m:ctrlPr>
                                         <a:rPr lang="en-US" i="1">
-                                          <a:latin typeface="Cambria Math" panose="02040503050406030204" pitchFamily="18" charset="0"/>
+                                          <a:latin typeface="Cambria Math"/>
                                         </a:rPr>
                                       </m:ctrlPr>
                                     </m:fPr>
@@ -18507,7 +18598,7 @@
                             <m:sSubPr>
                               <m:ctrlPr>
                                 <a:rPr lang="en-US" i="1">
-                                  <a:latin typeface="Cambria Math" panose="02040503050406030204" pitchFamily="18" charset="0"/>
+                                  <a:latin typeface="Cambria Math"/>
                                 </a:rPr>
                               </m:ctrlPr>
                             </m:sSubPr>
@@ -18637,7 +18728,7 @@
               <a:pPr>
                 <a:defRPr/>
               </a:pPr>
-              <a:t>25</a:t>
+              <a:t>26</a:t>
             </a:fld>
             <a:endParaRPr lang="en-US" dirty="0"/>
           </a:p>
@@ -18766,7 +18857,7 @@
 </p:sld>
 </file>
 
-<file path=ppt/slides/slide26.xml><?xml version="1.0" encoding="utf-8"?>
+<file path=ppt/slides/slide27.xml><?xml version="1.0" encoding="utf-8"?>
 <p:sld xmlns:a="http://schemas.openxmlformats.org/drawingml/2006/main" xmlns:r="http://schemas.openxmlformats.org/officeDocument/2006/relationships" xmlns:p="http://schemas.openxmlformats.org/presentationml/2006/main">
   <p:cSld>
     <p:spTree>
@@ -18828,7 +18919,7 @@
               <a:pPr>
                 <a:defRPr/>
               </a:pPr>
-              <a:t>26</a:t>
+              <a:t>27</a:t>
             </a:fld>
             <a:endParaRPr lang="en-US" dirty="0"/>
           </a:p>
@@ -18881,7 +18972,7 @@
 </p:sld>
 </file>
 
-<file path=ppt/slides/slide27.xml><?xml version="1.0" encoding="utf-8"?>
+<file path=ppt/slides/slide28.xml><?xml version="1.0" encoding="utf-8"?>
 <p:sld xmlns:a="http://schemas.openxmlformats.org/drawingml/2006/main" xmlns:r="http://schemas.openxmlformats.org/officeDocument/2006/relationships" xmlns:p="http://schemas.openxmlformats.org/presentationml/2006/main">
   <p:cSld>
     <p:spTree>
@@ -18920,8 +19011,12 @@
           <a:lstStyle/>
           <a:p>
             <a:r>
+              <a:rPr lang="en-US" dirty="0" err="1"/>
+              <a:t>iClicker</a:t>
+            </a:r>
+            <a:r>
               <a:rPr lang="en-US" dirty="0"/>
-              <a:t>Poll</a:t>
+              <a:t> Poll</a:t>
             </a:r>
           </a:p>
         </p:txBody>
@@ -19040,7 +19135,7 @@
               <a:pPr>
                 <a:defRPr/>
               </a:pPr>
-              <a:t>27</a:t>
+              <a:t>28</a:t>
             </a:fld>
             <a:endParaRPr lang="en-US" dirty="0"/>
           </a:p>
@@ -19059,7 +19154,7 @@
 </p:sld>
 </file>
 
-<file path=ppt/slides/slide28.xml><?xml version="1.0" encoding="utf-8"?>
+<file path=ppt/slides/slide29.xml><?xml version="1.0" encoding="utf-8"?>
 <p:sld xmlns:a="http://schemas.openxmlformats.org/drawingml/2006/main" xmlns:r="http://schemas.openxmlformats.org/officeDocument/2006/relationships" xmlns:p="http://schemas.openxmlformats.org/presentationml/2006/main">
   <p:cSld>
     <p:spTree>
@@ -19125,12 +19220,12 @@
                     <m:oMathParaPr>
                       <m:jc m:val="center"/>
                     </m:oMathParaPr>
-                    <m:oMath xmlns:m="http://schemas.openxmlformats.org/officeDocument/2006/math">
+                    <m:oMath>
                       <m:sSub>
                         <m:sSubPr>
                           <m:ctrlPr>
                             <a:rPr lang="en-US" i="1">
-                              <a:latin typeface="Cambria Math" panose="02040503050406030204" pitchFamily="18" charset="0"/>
+                              <a:latin typeface="Cambria Math"/>
                             </a:rPr>
                           </m:ctrlPr>
                         </m:sSubPr>
@@ -19161,7 +19256,7 @@
                         <m:fPr>
                           <m:ctrlPr>
                             <a:rPr lang="en-US" i="1">
-                              <a:latin typeface="Cambria Math" panose="02040503050406030204" pitchFamily="18" charset="0"/>
+                              <a:latin typeface="Cambria Math"/>
                             </a:rPr>
                           </m:ctrlPr>
                         </m:fPr>
@@ -19187,7 +19282,7 @@
                           <m:chr m:val="∑"/>
                           <m:ctrlPr>
                             <a:rPr lang="en-US" i="1">
-                              <a:latin typeface="Cambria Math" panose="02040503050406030204" pitchFamily="18" charset="0"/>
+                              <a:latin typeface="Cambria Math"/>
                             </a:rPr>
                           </m:ctrlPr>
                         </m:naryPr>
@@ -19239,7 +19334,7 @@
                                     <m:fPr>
                                       <m:ctrlPr>
                                         <a:rPr lang="en-US" i="1">
-                                          <a:latin typeface="Cambria Math" panose="02040503050406030204" pitchFamily="18" charset="0"/>
+                                          <a:latin typeface="Cambria Math"/>
                                         </a:rPr>
                                       </m:ctrlPr>
                                     </m:fPr>
@@ -19288,7 +19383,7 @@
                             <m:sSubPr>
                               <m:ctrlPr>
                                 <a:rPr lang="en-US" i="1">
-                                  <a:latin typeface="Cambria Math" panose="02040503050406030204" pitchFamily="18" charset="0"/>
+                                  <a:latin typeface="Cambria Math"/>
                                 </a:rPr>
                               </m:ctrlPr>
                             </m:sSubPr>
@@ -19327,7 +19422,7 @@
                       <m:sSubPr>
                         <m:ctrlPr>
                           <a:rPr lang="en-US" i="1">
-                            <a:latin typeface="Cambria Math" panose="02040503050406030204" pitchFamily="18" charset="0"/>
+                            <a:latin typeface="Cambria Math"/>
                           </a:rPr>
                         </m:ctrlPr>
                       </m:sSubPr>
@@ -19430,7 +19525,7 @@
               <a:pPr>
                 <a:defRPr/>
               </a:pPr>
-              <a:t>28</a:t>
+              <a:t>29</a:t>
             </a:fld>
             <a:endParaRPr lang="en-US" dirty="0"/>
           </a:p>
@@ -19562,530 +19657,6 @@
 </p:sld>
 </file>
 
-<file path=ppt/slides/slide29.xml><?xml version="1.0" encoding="utf-8"?>
-<p:sld xmlns:a="http://schemas.openxmlformats.org/drawingml/2006/main" xmlns:r="http://schemas.openxmlformats.org/officeDocument/2006/relationships" xmlns:p="http://schemas.openxmlformats.org/presentationml/2006/main">
-  <p:cSld>
-    <p:spTree>
-      <p:nvGrpSpPr>
-        <p:cNvPr id="1" name=""/>
-        <p:cNvGrpSpPr/>
-        <p:nvPr/>
-      </p:nvGrpSpPr>
-      <p:grpSpPr>
-        <a:xfrm>
-          <a:off x="0" y="0"/>
-          <a:ext cx="0" cy="0"/>
-          <a:chOff x="0" y="0"/>
-          <a:chExt cx="0" cy="0"/>
-        </a:xfrm>
-      </p:grpSpPr>
-      <p:sp>
-        <p:nvSpPr>
-          <p:cNvPr id="2" name="Title 1"/>
-          <p:cNvSpPr>
-            <a:spLocks noGrp="1"/>
-          </p:cNvSpPr>
-          <p:nvPr>
-            <p:ph type="title"/>
-          </p:nvPr>
-        </p:nvSpPr>
-        <p:spPr/>
-        <p:txBody>
-          <a:bodyPr/>
-          <a:lstStyle/>
-          <a:p>
-            <a:r>
-              <a:rPr lang="en-US" dirty="0"/>
-              <a:t>Marginal Propensity to Consume</a:t>
-            </a:r>
-          </a:p>
-        </p:txBody>
-      </p:sp>
-      <mc:AlternateContent xmlns:mc="http://schemas.openxmlformats.org/markup-compatibility/2006" xmlns:a14="http://schemas.microsoft.com/office/drawing/2010/main">
-        <mc:Choice Requires="a14">
-          <p:sp>
-            <p:nvSpPr>
-              <p:cNvPr id="3" name="Content Placeholder 2"/>
-              <p:cNvSpPr>
-                <a:spLocks noGrp="1"/>
-              </p:cNvSpPr>
-              <p:nvPr>
-                <p:ph idx="1"/>
-              </p:nvPr>
-            </p:nvSpPr>
-            <p:spPr>
-              <a:xfrm>
-                <a:off x="609600" y="1600200"/>
-                <a:ext cx="10972800" cy="4800600"/>
-              </a:xfrm>
-            </p:spPr>
-            <p:txBody>
-              <a:bodyPr/>
-              <a:lstStyle/>
-              <a:p>
-                <a:pPr marL="0" indent="0" algn="ctr">
-                  <a:buNone/>
-                </a:pPr>
-                <a14:m>
-                  <m:oMathPara xmlns:m="http://schemas.openxmlformats.org/officeDocument/2006/math">
-                    <m:oMathParaPr>
-                      <m:jc m:val="centerGroup"/>
-                    </m:oMathParaPr>
-                    <m:oMath xmlns:m="http://schemas.openxmlformats.org/officeDocument/2006/math">
-                      <m:sSub>
-                        <m:sSubPr>
-                          <m:ctrlPr>
-                            <a:rPr lang="en-US" i="1">
-                              <a:latin typeface="Cambria Math" panose="02040503050406030204" pitchFamily="18" charset="0"/>
-                            </a:rPr>
-                          </m:ctrlPr>
-                        </m:sSubPr>
-                        <m:e>
-                          <m:r>
-                            <a:rPr lang="en-US" i="1">
-                              <a:latin typeface="Cambria Math"/>
-                            </a:rPr>
-                            <m:t>𝐶</m:t>
-                          </m:r>
-                        </m:e>
-                        <m:sub>
-                          <m:r>
-                            <a:rPr lang="en-US" i="1">
-                              <a:latin typeface="Cambria Math"/>
-                            </a:rPr>
-                            <m:t>1</m:t>
-                          </m:r>
-                        </m:sub>
-                      </m:sSub>
-                      <m:r>
-                        <a:rPr lang="en-US" i="1">
-                          <a:latin typeface="Cambria Math"/>
-                        </a:rPr>
-                        <m:t>=</m:t>
-                      </m:r>
-                      <m:f>
-                        <m:fPr>
-                          <m:ctrlPr>
-                            <a:rPr lang="en-US" i="1">
-                              <a:latin typeface="Cambria Math" panose="02040503050406030204" pitchFamily="18" charset="0"/>
-                            </a:rPr>
-                          </m:ctrlPr>
-                        </m:fPr>
-                        <m:num>
-                          <m:r>
-                            <a:rPr lang="en-US" i="1">
-                              <a:latin typeface="Cambria Math"/>
-                            </a:rPr>
-                            <m:t>1</m:t>
-                          </m:r>
-                        </m:num>
-                        <m:den>
-                          <m:r>
-                            <a:rPr lang="en-US" i="1">
-                              <a:latin typeface="Cambria Math"/>
-                            </a:rPr>
-                            <m:t>45</m:t>
-                          </m:r>
-                        </m:den>
-                      </m:f>
-                      <m:nary>
-                        <m:naryPr>
-                          <m:chr m:val="∑"/>
-                          <m:ctrlPr>
-                            <a:rPr lang="en-US" i="1">
-                              <a:latin typeface="Cambria Math" panose="02040503050406030204" pitchFamily="18" charset="0"/>
-                            </a:rPr>
-                          </m:ctrlPr>
-                        </m:naryPr>
-                        <m:sub>
-                          <m:r>
-                            <m:rPr>
-                              <m:brk m:alnAt="23"/>
-                            </m:rPr>
-                            <a:rPr lang="en-US" i="1">
-                              <a:latin typeface="Cambria Math"/>
-                            </a:rPr>
-                            <m:t>𝑡</m:t>
-                          </m:r>
-                          <m:r>
-                            <a:rPr lang="en-US" i="1">
-                              <a:latin typeface="Cambria Math"/>
-                            </a:rPr>
-                            <m:t>=1</m:t>
-                          </m:r>
-                        </m:sub>
-                        <m:sup>
-                          <m:r>
-                            <a:rPr lang="en-US" i="1">
-                              <a:latin typeface="Cambria Math"/>
-                            </a:rPr>
-                            <m:t>45</m:t>
-                          </m:r>
-                        </m:sup>
-                        <m:e>
-                          <m:sSup>
-                            <m:sSupPr>
-                              <m:ctrlPr>
-                                <a:rPr lang="en-US" i="1">
-                                  <a:latin typeface="Cambria Math" panose="02040503050406030204" pitchFamily="18" charset="0"/>
-                                </a:rPr>
-                              </m:ctrlPr>
-                            </m:sSupPr>
-                            <m:e>
-                              <m:d>
-                                <m:dPr>
-                                  <m:ctrlPr>
-                                    <a:rPr lang="en-US" i="1">
-                                      <a:latin typeface="Cambria Math" panose="02040503050406030204" pitchFamily="18" charset="0"/>
-                                    </a:rPr>
-                                  </m:ctrlPr>
-                                </m:dPr>
-                                <m:e>
-                                  <m:f>
-                                    <m:fPr>
-                                      <m:ctrlPr>
-                                        <a:rPr lang="en-US" i="1">
-                                          <a:latin typeface="Cambria Math" panose="02040503050406030204" pitchFamily="18" charset="0"/>
-                                        </a:rPr>
-                                      </m:ctrlPr>
-                                    </m:fPr>
-                                    <m:num>
-                                      <m:r>
-                                        <a:rPr lang="en-US" i="1">
-                                          <a:latin typeface="Cambria Math"/>
-                                        </a:rPr>
-                                        <m:t>1</m:t>
-                                      </m:r>
-                                    </m:num>
-                                    <m:den>
-                                      <m:r>
-                                        <a:rPr lang="en-US" i="1">
-                                          <a:latin typeface="Cambria Math"/>
-                                        </a:rPr>
-                                        <m:t>1+</m:t>
-                                      </m:r>
-                                      <m:r>
-                                        <a:rPr lang="en-US" i="1">
-                                          <a:latin typeface="Cambria Math"/>
-                                        </a:rPr>
-                                        <m:t>𝑅</m:t>
-                                      </m:r>
-                                    </m:den>
-                                  </m:f>
-                                </m:e>
-                              </m:d>
-                            </m:e>
-                            <m:sup>
-                              <m:r>
-                                <a:rPr lang="en-US" i="1">
-                                  <a:latin typeface="Cambria Math"/>
-                                </a:rPr>
-                                <m:t>𝑡</m:t>
-                              </m:r>
-                              <m:r>
-                                <a:rPr lang="en-US" i="1">
-                                  <a:latin typeface="Cambria Math"/>
-                                </a:rPr>
-                                <m:t>−1</m:t>
-                              </m:r>
-                            </m:sup>
-                          </m:sSup>
-                          <m:sSub>
-                            <m:sSubPr>
-                              <m:ctrlPr>
-                                <a:rPr lang="en-US" i="1">
-                                  <a:latin typeface="Cambria Math" panose="02040503050406030204" pitchFamily="18" charset="0"/>
-                                </a:rPr>
-                              </m:ctrlPr>
-                            </m:sSubPr>
-                            <m:e>
-                              <m:r>
-                                <a:rPr lang="en-US" i="1">
-                                  <a:latin typeface="Cambria Math"/>
-                                </a:rPr>
-                                <m:t>𝑌</m:t>
-                              </m:r>
-                            </m:e>
-                            <m:sub>
-                              <m:r>
-                                <a:rPr lang="en-US" i="1">
-                                  <a:latin typeface="Cambria Math"/>
-                                </a:rPr>
-                                <m:t>𝑡</m:t>
-                              </m:r>
-                            </m:sub>
-                          </m:sSub>
-                        </m:e>
-                      </m:nary>
-                    </m:oMath>
-                  </m:oMathPara>
-                </a14:m>
-                <a:endParaRPr lang="en-US" dirty="0"/>
-              </a:p>
-              <a:p>
-                <a:r>
-                  <a:rPr lang="en-US" dirty="0"/>
-                  <a:t>An extra dollar of income today only raises consumption today by about </a:t>
-                </a:r>
-                <a14:m>
-                  <m:oMath xmlns:m="http://schemas.openxmlformats.org/officeDocument/2006/math">
-                    <m:r>
-                      <a:rPr lang="en-US" i="1" smtClean="0">
-                        <a:latin typeface="Cambria Math" panose="02040503050406030204" pitchFamily="18" charset="0"/>
-                        <a:ea typeface="Cambria Math" panose="02040503050406030204" pitchFamily="18" charset="0"/>
-                      </a:rPr>
-                      <m:t>≈</m:t>
-                    </m:r>
-                  </m:oMath>
-                </a14:m>
-                <a:r>
-                  <a:rPr lang="en-US" dirty="0"/>
-                  <a:t>2% (1/45)</a:t>
-                </a:r>
-              </a:p>
-              <a:p>
-                <a:r>
-                  <a:rPr lang="en-US" dirty="0">
-                    <a:solidFill>
-                      <a:schemeClr val="accent2"/>
-                    </a:solidFill>
-                  </a:rPr>
-                  <a:t>Marginal propensity to consume </a:t>
-                </a:r>
-                <a:r>
-                  <a:rPr lang="en-US" dirty="0"/>
-                  <a:t>(MPC)</a:t>
-                </a:r>
-                <a:r>
-                  <a:rPr lang="en-US" dirty="0">
-                    <a:solidFill>
-                      <a:schemeClr val="accent2"/>
-                    </a:solidFill>
-                  </a:rPr>
-                  <a:t> </a:t>
-                </a:r>
-                <a:r>
-                  <a:rPr lang="en-US" dirty="0"/>
-                  <a:t>is said to be 2%</a:t>
-                </a:r>
-              </a:p>
-              <a:p>
-                <a:r>
-                  <a:rPr lang="en-US" dirty="0"/>
-                  <a:t>MPC should be higher later in life </a:t>
-                </a:r>
-              </a:p>
-            </p:txBody>
-          </p:sp>
-        </mc:Choice>
-        <mc:Fallback xmlns="">
-          <p:sp>
-            <p:nvSpPr>
-              <p:cNvPr id="3" name="Content Placeholder 2"/>
-              <p:cNvSpPr>
-                <a:spLocks noGrp="1" noRot="1" noChangeAspect="1" noMove="1" noResize="1" noEditPoints="1" noAdjustHandles="1" noChangeArrowheads="1" noChangeShapeType="1" noTextEdit="1"/>
-              </p:cNvSpPr>
-              <p:nvPr>
-                <p:ph idx="1"/>
-              </p:nvPr>
-            </p:nvSpPr>
-            <p:spPr>
-              <a:xfrm>
-                <a:off x="609600" y="1600200"/>
-                <a:ext cx="10972800" cy="4800600"/>
-              </a:xfrm>
-              <a:blipFill>
-                <a:blip r:embed="rId3"/>
-                <a:stretch>
-                  <a:fillRect l="-1278" r="-889"/>
-                </a:stretch>
-              </a:blipFill>
-            </p:spPr>
-            <p:txBody>
-              <a:bodyPr/>
-              <a:lstStyle/>
-              <a:p>
-                <a:r>
-                  <a:rPr lang="en-US">
-                    <a:noFill/>
-                  </a:rPr>
-                  <a:t> </a:t>
-                </a:r>
-              </a:p>
-            </p:txBody>
-          </p:sp>
-        </mc:Fallback>
-      </mc:AlternateContent>
-      <p:sp>
-        <p:nvSpPr>
-          <p:cNvPr id="4" name="Slide Number Placeholder 3"/>
-          <p:cNvSpPr>
-            <a:spLocks noGrp="1"/>
-          </p:cNvSpPr>
-          <p:nvPr>
-            <p:ph type="sldNum" sz="quarter" idx="12"/>
-          </p:nvPr>
-        </p:nvSpPr>
-        <p:spPr/>
-        <p:txBody>
-          <a:bodyPr/>
-          <a:lstStyle/>
-          <a:p>
-            <a:pPr>
-              <a:defRPr/>
-            </a:pPr>
-            <a:fld id="{0B9AA5AD-3701-488D-8337-65701EB767E3}" type="slidenum">
-              <a:rPr lang="en-US" smtClean="0"/>
-              <a:pPr>
-                <a:defRPr/>
-              </a:pPr>
-              <a:t>29</a:t>
-            </a:fld>
-            <a:endParaRPr lang="en-US" dirty="0"/>
-          </a:p>
-        </p:txBody>
-      </p:sp>
-    </p:spTree>
-    <p:extLst>
-      <p:ext uri="{BB962C8B-B14F-4D97-AF65-F5344CB8AC3E}">
-        <p14:creationId xmlns:p14="http://schemas.microsoft.com/office/powerpoint/2010/main" val="3365714410"/>
-      </p:ext>
-    </p:extLst>
-  </p:cSld>
-  <p:clrMapOvr>
-    <a:masterClrMapping/>
-  </p:clrMapOvr>
-  <p:timing>
-    <p:tnLst>
-      <p:par>
-        <p:cTn id="1" dur="indefinite" restart="never" nodeType="tmRoot">
-          <p:childTnLst>
-            <p:seq concurrent="1" nextAc="seek">
-              <p:cTn id="2" dur="indefinite" nodeType="mainSeq">
-                <p:childTnLst>
-                  <p:par>
-                    <p:cTn id="3" fill="hold">
-                      <p:stCondLst>
-                        <p:cond delay="indefinite"/>
-                      </p:stCondLst>
-                      <p:childTnLst>
-                        <p:par>
-                          <p:cTn id="4" fill="hold">
-                            <p:stCondLst>
-                              <p:cond delay="0"/>
-                            </p:stCondLst>
-                            <p:childTnLst>
-                              <p:par>
-                                <p:cTn id="5" presetID="1" presetClass="entr" presetSubtype="0" fill="hold" nodeType="clickEffect">
-                                  <p:stCondLst>
-                                    <p:cond delay="0"/>
-                                  </p:stCondLst>
-                                  <p:childTnLst>
-                                    <p:set>
-                                      <p:cBhvr>
-                                        <p:cTn id="6" dur="1" fill="hold">
-                                          <p:stCondLst>
-                                            <p:cond delay="0"/>
-                                          </p:stCondLst>
-                                        </p:cTn>
-                                        <p:tgtEl>
-                                          <p:spTgt spid="3">
-                                            <p:txEl>
-                                              <p:pRg st="2" end="2"/>
-                                            </p:txEl>
-                                          </p:spTgt>
-                                        </p:tgtEl>
-                                        <p:attrNameLst>
-                                          <p:attrName>style.visibility</p:attrName>
-                                        </p:attrNameLst>
-                                      </p:cBhvr>
-                                      <p:to>
-                                        <p:strVal val="visible"/>
-                                      </p:to>
-                                    </p:set>
-                                  </p:childTnLst>
-                                </p:cTn>
-                              </p:par>
-                            </p:childTnLst>
-                          </p:cTn>
-                        </p:par>
-                      </p:childTnLst>
-                    </p:cTn>
-                  </p:par>
-                  <p:par>
-                    <p:cTn id="7" fill="hold">
-                      <p:stCondLst>
-                        <p:cond delay="indefinite"/>
-                      </p:stCondLst>
-                      <p:childTnLst>
-                        <p:par>
-                          <p:cTn id="8" fill="hold">
-                            <p:stCondLst>
-                              <p:cond delay="0"/>
-                            </p:stCondLst>
-                            <p:childTnLst>
-                              <p:par>
-                                <p:cTn id="9" presetID="1" presetClass="entr" presetSubtype="0" fill="hold" nodeType="clickEffect">
-                                  <p:stCondLst>
-                                    <p:cond delay="0"/>
-                                  </p:stCondLst>
-                                  <p:childTnLst>
-                                    <p:set>
-                                      <p:cBhvr>
-                                        <p:cTn id="10" dur="1" fill="hold">
-                                          <p:stCondLst>
-                                            <p:cond delay="0"/>
-                                          </p:stCondLst>
-                                        </p:cTn>
-                                        <p:tgtEl>
-                                          <p:spTgt spid="3">
-                                            <p:txEl>
-                                              <p:pRg st="3" end="3"/>
-                                            </p:txEl>
-                                          </p:spTgt>
-                                        </p:tgtEl>
-                                        <p:attrNameLst>
-                                          <p:attrName>style.visibility</p:attrName>
-                                        </p:attrNameLst>
-                                      </p:cBhvr>
-                                      <p:to>
-                                        <p:strVal val="visible"/>
-                                      </p:to>
-                                    </p:set>
-                                  </p:childTnLst>
-                                </p:cTn>
-                              </p:par>
-                            </p:childTnLst>
-                          </p:cTn>
-                        </p:par>
-                      </p:childTnLst>
-                    </p:cTn>
-                  </p:par>
-                </p:childTnLst>
-              </p:cTn>
-              <p:prevCondLst>
-                <p:cond evt="onPrev" delay="0">
-                  <p:tgtEl>
-                    <p:sldTgt/>
-                  </p:tgtEl>
-                </p:cond>
-              </p:prevCondLst>
-              <p:nextCondLst>
-                <p:cond evt="onNext" delay="0">
-                  <p:tgtEl>
-                    <p:sldTgt/>
-                  </p:tgtEl>
-                </p:cond>
-              </p:nextCondLst>
-            </p:seq>
-          </p:childTnLst>
-        </p:cTn>
-      </p:par>
-    </p:tnLst>
-  </p:timing>
-</p:sld>
-</file>
-
 <file path=ppt/slides/slide3.xml><?xml version="1.0" encoding="utf-8"?>
 <p:sld xmlns:a="http://schemas.openxmlformats.org/drawingml/2006/main" xmlns:r="http://schemas.openxmlformats.org/officeDocument/2006/relationships" xmlns:p="http://schemas.openxmlformats.org/presentationml/2006/main">
   <p:cSld>
@@ -20187,8 +19758,8 @@
                     <m:sSub>
                       <m:sSubPr>
                         <m:ctrlPr>
-                          <a:rPr lang="en-US" i="1" smtClean="0">
-                            <a:latin typeface="Cambria Math" panose="02040503050406030204" pitchFamily="18" charset="0"/>
+                          <a:rPr lang="en-US" b="0" i="1" smtClean="0">
+                            <a:latin typeface="Cambria Math"/>
                           </a:rPr>
                         </m:ctrlPr>
                       </m:sSubPr>
@@ -20220,8 +19791,8 @@
                     <m:sSub>
                       <m:sSubPr>
                         <m:ctrlPr>
-                          <a:rPr lang="en-US" i="1" smtClean="0">
-                            <a:latin typeface="Cambria Math" panose="02040503050406030204" pitchFamily="18" charset="0"/>
+                          <a:rPr lang="en-US" b="0" i="1" smtClean="0">
+                            <a:latin typeface="Cambria Math"/>
                           </a:rPr>
                         </m:ctrlPr>
                       </m:sSubPr>
@@ -20264,7 +19835,7 @@
                       <m:sSubPr>
                         <m:ctrlPr>
                           <a:rPr lang="en-US" i="1">
-                            <a:latin typeface="Cambria Math" panose="02040503050406030204" pitchFamily="18" charset="0"/>
+                            <a:latin typeface="Cambria Math"/>
                           </a:rPr>
                         </m:ctrlPr>
                       </m:sSubPr>
@@ -20297,7 +19868,7 @@
                       <m:sSubPr>
                         <m:ctrlPr>
                           <a:rPr lang="en-US" i="1">
-                            <a:latin typeface="Cambria Math" panose="02040503050406030204" pitchFamily="18" charset="0"/>
+                            <a:latin typeface="Cambria Math"/>
                           </a:rPr>
                         </m:ctrlPr>
                       </m:sSubPr>
@@ -20623,6 +20194,527 @@
           <a:p>
             <a:r>
               <a:rPr lang="en-US" dirty="0"/>
+              <a:t>Marginal Propensity to Consume</a:t>
+            </a:r>
+          </a:p>
+        </p:txBody>
+      </p:sp>
+      <mc:AlternateContent xmlns:mc="http://schemas.openxmlformats.org/markup-compatibility/2006" xmlns:a14="http://schemas.microsoft.com/office/drawing/2010/main">
+        <mc:Choice Requires="a14">
+          <p:sp>
+            <p:nvSpPr>
+              <p:cNvPr id="3" name="Content Placeholder 2"/>
+              <p:cNvSpPr>
+                <a:spLocks noGrp="1"/>
+              </p:cNvSpPr>
+              <p:nvPr>
+                <p:ph idx="1"/>
+              </p:nvPr>
+            </p:nvSpPr>
+            <p:spPr>
+              <a:xfrm>
+                <a:off x="609600" y="1600200"/>
+                <a:ext cx="10972800" cy="4800600"/>
+              </a:xfrm>
+            </p:spPr>
+            <p:txBody>
+              <a:bodyPr/>
+              <a:lstStyle/>
+              <a:p>
+                <a:pPr marL="0" indent="0" algn="ctr">
+                  <a:buNone/>
+                </a:pPr>
+                <a14:m>
+                  <m:oMathPara xmlns:m="http://schemas.openxmlformats.org/officeDocument/2006/math">
+                    <m:oMath>
+                      <m:sSub>
+                        <m:sSubPr>
+                          <m:ctrlPr>
+                            <a:rPr lang="en-US" i="1">
+                              <a:latin typeface="Cambria Math"/>
+                            </a:rPr>
+                          </m:ctrlPr>
+                        </m:sSubPr>
+                        <m:e>
+                          <m:r>
+                            <a:rPr lang="en-US" i="1">
+                              <a:latin typeface="Cambria Math"/>
+                            </a:rPr>
+                            <m:t>𝐶</m:t>
+                          </m:r>
+                        </m:e>
+                        <m:sub>
+                          <m:r>
+                            <a:rPr lang="en-US" i="1">
+                              <a:latin typeface="Cambria Math"/>
+                            </a:rPr>
+                            <m:t>1</m:t>
+                          </m:r>
+                        </m:sub>
+                      </m:sSub>
+                      <m:r>
+                        <a:rPr lang="en-US" i="1">
+                          <a:latin typeface="Cambria Math"/>
+                        </a:rPr>
+                        <m:t>=</m:t>
+                      </m:r>
+                      <m:f>
+                        <m:fPr>
+                          <m:ctrlPr>
+                            <a:rPr lang="en-US" i="1">
+                              <a:latin typeface="Cambria Math"/>
+                            </a:rPr>
+                          </m:ctrlPr>
+                        </m:fPr>
+                        <m:num>
+                          <m:r>
+                            <a:rPr lang="en-US" i="1">
+                              <a:latin typeface="Cambria Math"/>
+                            </a:rPr>
+                            <m:t>1</m:t>
+                          </m:r>
+                        </m:num>
+                        <m:den>
+                          <m:r>
+                            <a:rPr lang="en-US" i="1">
+                              <a:latin typeface="Cambria Math"/>
+                            </a:rPr>
+                            <m:t>45</m:t>
+                          </m:r>
+                        </m:den>
+                      </m:f>
+                      <m:nary>
+                        <m:naryPr>
+                          <m:chr m:val="∑"/>
+                          <m:ctrlPr>
+                            <a:rPr lang="en-US" i="1">
+                              <a:latin typeface="Cambria Math"/>
+                            </a:rPr>
+                          </m:ctrlPr>
+                        </m:naryPr>
+                        <m:sub>
+                          <m:r>
+                            <m:rPr>
+                              <m:brk m:alnAt="23"/>
+                            </m:rPr>
+                            <a:rPr lang="en-US" i="1">
+                              <a:latin typeface="Cambria Math"/>
+                            </a:rPr>
+                            <m:t>𝑡</m:t>
+                          </m:r>
+                          <m:r>
+                            <a:rPr lang="en-US" i="1">
+                              <a:latin typeface="Cambria Math"/>
+                            </a:rPr>
+                            <m:t>=1</m:t>
+                          </m:r>
+                        </m:sub>
+                        <m:sup>
+                          <m:r>
+                            <a:rPr lang="en-US" i="1">
+                              <a:latin typeface="Cambria Math"/>
+                            </a:rPr>
+                            <m:t>45</m:t>
+                          </m:r>
+                        </m:sup>
+                        <m:e>
+                          <m:sSup>
+                            <m:sSupPr>
+                              <m:ctrlPr>
+                                <a:rPr lang="en-US" i="1">
+                                  <a:latin typeface="Cambria Math" panose="02040503050406030204" pitchFamily="18" charset="0"/>
+                                </a:rPr>
+                              </m:ctrlPr>
+                            </m:sSupPr>
+                            <m:e>
+                              <m:d>
+                                <m:dPr>
+                                  <m:ctrlPr>
+                                    <a:rPr lang="en-US" i="1">
+                                      <a:latin typeface="Cambria Math" panose="02040503050406030204" pitchFamily="18" charset="0"/>
+                                    </a:rPr>
+                                  </m:ctrlPr>
+                                </m:dPr>
+                                <m:e>
+                                  <m:f>
+                                    <m:fPr>
+                                      <m:ctrlPr>
+                                        <a:rPr lang="en-US" i="1">
+                                          <a:latin typeface="Cambria Math"/>
+                                        </a:rPr>
+                                      </m:ctrlPr>
+                                    </m:fPr>
+                                    <m:num>
+                                      <m:r>
+                                        <a:rPr lang="en-US" i="1">
+                                          <a:latin typeface="Cambria Math"/>
+                                        </a:rPr>
+                                        <m:t>1</m:t>
+                                      </m:r>
+                                    </m:num>
+                                    <m:den>
+                                      <m:r>
+                                        <a:rPr lang="en-US" i="1">
+                                          <a:latin typeface="Cambria Math"/>
+                                        </a:rPr>
+                                        <m:t>1+</m:t>
+                                      </m:r>
+                                      <m:r>
+                                        <a:rPr lang="en-US" i="1">
+                                          <a:latin typeface="Cambria Math"/>
+                                        </a:rPr>
+                                        <m:t>𝑅</m:t>
+                                      </m:r>
+                                    </m:den>
+                                  </m:f>
+                                </m:e>
+                              </m:d>
+                            </m:e>
+                            <m:sup>
+                              <m:r>
+                                <a:rPr lang="en-US" i="1">
+                                  <a:latin typeface="Cambria Math"/>
+                                </a:rPr>
+                                <m:t>𝑡</m:t>
+                              </m:r>
+                              <m:r>
+                                <a:rPr lang="en-US" i="1">
+                                  <a:latin typeface="Cambria Math"/>
+                                </a:rPr>
+                                <m:t>−1</m:t>
+                              </m:r>
+                            </m:sup>
+                          </m:sSup>
+                          <m:sSub>
+                            <m:sSubPr>
+                              <m:ctrlPr>
+                                <a:rPr lang="en-US" i="1">
+                                  <a:latin typeface="Cambria Math"/>
+                                </a:rPr>
+                              </m:ctrlPr>
+                            </m:sSubPr>
+                            <m:e>
+                              <m:r>
+                                <a:rPr lang="en-US" i="1">
+                                  <a:latin typeface="Cambria Math"/>
+                                </a:rPr>
+                                <m:t>𝑌</m:t>
+                              </m:r>
+                            </m:e>
+                            <m:sub>
+                              <m:r>
+                                <a:rPr lang="en-US" i="1">
+                                  <a:latin typeface="Cambria Math"/>
+                                </a:rPr>
+                                <m:t>𝑡</m:t>
+                              </m:r>
+                            </m:sub>
+                          </m:sSub>
+                        </m:e>
+                      </m:nary>
+                    </m:oMath>
+                  </m:oMathPara>
+                </a14:m>
+                <a:endParaRPr lang="en-US" dirty="0"/>
+              </a:p>
+              <a:p>
+                <a:r>
+                  <a:rPr lang="en-US" dirty="0"/>
+                  <a:t>An extra dollar of income today only raises consumption today by about </a:t>
+                </a:r>
+                <a14:m>
+                  <m:oMath xmlns:m="http://schemas.openxmlformats.org/officeDocument/2006/math">
+                    <m:r>
+                      <a:rPr lang="en-US" i="1" smtClean="0">
+                        <a:latin typeface="Cambria Math" panose="02040503050406030204" pitchFamily="18" charset="0"/>
+                        <a:ea typeface="Cambria Math" panose="02040503050406030204" pitchFamily="18" charset="0"/>
+                      </a:rPr>
+                      <m:t>≈</m:t>
+                    </m:r>
+                  </m:oMath>
+                </a14:m>
+                <a:r>
+                  <a:rPr lang="en-US" dirty="0"/>
+                  <a:t>2% (1/45)</a:t>
+                </a:r>
+              </a:p>
+              <a:p>
+                <a:r>
+                  <a:rPr lang="en-US" dirty="0">
+                    <a:solidFill>
+                      <a:schemeClr val="accent2"/>
+                    </a:solidFill>
+                  </a:rPr>
+                  <a:t>Marginal propensity to consume </a:t>
+                </a:r>
+                <a:r>
+                  <a:rPr lang="en-US" dirty="0"/>
+                  <a:t>(MPC)</a:t>
+                </a:r>
+                <a:r>
+                  <a:rPr lang="en-US" dirty="0">
+                    <a:solidFill>
+                      <a:schemeClr val="accent2"/>
+                    </a:solidFill>
+                  </a:rPr>
+                  <a:t> </a:t>
+                </a:r>
+                <a:r>
+                  <a:rPr lang="en-US" dirty="0"/>
+                  <a:t>is said to be 2%</a:t>
+                </a:r>
+              </a:p>
+              <a:p>
+                <a:r>
+                  <a:rPr lang="en-US" dirty="0"/>
+                  <a:t>MPC should be higher later in life </a:t>
+                </a:r>
+              </a:p>
+            </p:txBody>
+          </p:sp>
+        </mc:Choice>
+        <mc:Fallback xmlns="">
+          <p:sp>
+            <p:nvSpPr>
+              <p:cNvPr id="3" name="Content Placeholder 2"/>
+              <p:cNvSpPr>
+                <a:spLocks noGrp="1" noRot="1" noChangeAspect="1" noMove="1" noResize="1" noEditPoints="1" noAdjustHandles="1" noChangeArrowheads="1" noChangeShapeType="1" noTextEdit="1"/>
+              </p:cNvSpPr>
+              <p:nvPr>
+                <p:ph idx="1"/>
+              </p:nvPr>
+            </p:nvSpPr>
+            <p:spPr>
+              <a:xfrm>
+                <a:off x="609600" y="1600200"/>
+                <a:ext cx="10972800" cy="4800600"/>
+              </a:xfrm>
+              <a:blipFill>
+                <a:blip r:embed="rId3"/>
+                <a:stretch>
+                  <a:fillRect l="-1278" r="-889"/>
+                </a:stretch>
+              </a:blipFill>
+            </p:spPr>
+            <p:txBody>
+              <a:bodyPr/>
+              <a:lstStyle/>
+              <a:p>
+                <a:r>
+                  <a:rPr lang="en-US">
+                    <a:noFill/>
+                  </a:rPr>
+                  <a:t> </a:t>
+                </a:r>
+              </a:p>
+            </p:txBody>
+          </p:sp>
+        </mc:Fallback>
+      </mc:AlternateContent>
+      <p:sp>
+        <p:nvSpPr>
+          <p:cNvPr id="4" name="Slide Number Placeholder 3"/>
+          <p:cNvSpPr>
+            <a:spLocks noGrp="1"/>
+          </p:cNvSpPr>
+          <p:nvPr>
+            <p:ph type="sldNum" sz="quarter" idx="12"/>
+          </p:nvPr>
+        </p:nvSpPr>
+        <p:spPr/>
+        <p:txBody>
+          <a:bodyPr/>
+          <a:lstStyle/>
+          <a:p>
+            <a:pPr>
+              <a:defRPr/>
+            </a:pPr>
+            <a:fld id="{0B9AA5AD-3701-488D-8337-65701EB767E3}" type="slidenum">
+              <a:rPr lang="en-US" smtClean="0"/>
+              <a:pPr>
+                <a:defRPr/>
+              </a:pPr>
+              <a:t>30</a:t>
+            </a:fld>
+            <a:endParaRPr lang="en-US" dirty="0"/>
+          </a:p>
+        </p:txBody>
+      </p:sp>
+    </p:spTree>
+    <p:extLst>
+      <p:ext uri="{BB962C8B-B14F-4D97-AF65-F5344CB8AC3E}">
+        <p14:creationId xmlns:p14="http://schemas.microsoft.com/office/powerpoint/2010/main" val="3365714410"/>
+      </p:ext>
+    </p:extLst>
+  </p:cSld>
+  <p:clrMapOvr>
+    <a:masterClrMapping/>
+  </p:clrMapOvr>
+  <p:timing>
+    <p:tnLst>
+      <p:par>
+        <p:cTn id="1" dur="indefinite" restart="never" nodeType="tmRoot">
+          <p:childTnLst>
+            <p:seq concurrent="1" nextAc="seek">
+              <p:cTn id="2" dur="indefinite" nodeType="mainSeq">
+                <p:childTnLst>
+                  <p:par>
+                    <p:cTn id="3" fill="hold">
+                      <p:stCondLst>
+                        <p:cond delay="indefinite"/>
+                      </p:stCondLst>
+                      <p:childTnLst>
+                        <p:par>
+                          <p:cTn id="4" fill="hold">
+                            <p:stCondLst>
+                              <p:cond delay="0"/>
+                            </p:stCondLst>
+                            <p:childTnLst>
+                              <p:par>
+                                <p:cTn id="5" presetID="1" presetClass="entr" presetSubtype="0" fill="hold" nodeType="clickEffect">
+                                  <p:stCondLst>
+                                    <p:cond delay="0"/>
+                                  </p:stCondLst>
+                                  <p:childTnLst>
+                                    <p:set>
+                                      <p:cBhvr>
+                                        <p:cTn id="6" dur="1" fill="hold">
+                                          <p:stCondLst>
+                                            <p:cond delay="0"/>
+                                          </p:stCondLst>
+                                        </p:cTn>
+                                        <p:tgtEl>
+                                          <p:spTgt spid="3">
+                                            <p:txEl>
+                                              <p:pRg st="2" end="2"/>
+                                            </p:txEl>
+                                          </p:spTgt>
+                                        </p:tgtEl>
+                                        <p:attrNameLst>
+                                          <p:attrName>style.visibility</p:attrName>
+                                        </p:attrNameLst>
+                                      </p:cBhvr>
+                                      <p:to>
+                                        <p:strVal val="visible"/>
+                                      </p:to>
+                                    </p:set>
+                                  </p:childTnLst>
+                                </p:cTn>
+                              </p:par>
+                            </p:childTnLst>
+                          </p:cTn>
+                        </p:par>
+                      </p:childTnLst>
+                    </p:cTn>
+                  </p:par>
+                  <p:par>
+                    <p:cTn id="7" fill="hold">
+                      <p:stCondLst>
+                        <p:cond delay="indefinite"/>
+                      </p:stCondLst>
+                      <p:childTnLst>
+                        <p:par>
+                          <p:cTn id="8" fill="hold">
+                            <p:stCondLst>
+                              <p:cond delay="0"/>
+                            </p:stCondLst>
+                            <p:childTnLst>
+                              <p:par>
+                                <p:cTn id="9" presetID="1" presetClass="entr" presetSubtype="0" fill="hold" nodeType="clickEffect">
+                                  <p:stCondLst>
+                                    <p:cond delay="0"/>
+                                  </p:stCondLst>
+                                  <p:childTnLst>
+                                    <p:set>
+                                      <p:cBhvr>
+                                        <p:cTn id="10" dur="1" fill="hold">
+                                          <p:stCondLst>
+                                            <p:cond delay="0"/>
+                                          </p:stCondLst>
+                                        </p:cTn>
+                                        <p:tgtEl>
+                                          <p:spTgt spid="3">
+                                            <p:txEl>
+                                              <p:pRg st="3" end="3"/>
+                                            </p:txEl>
+                                          </p:spTgt>
+                                        </p:tgtEl>
+                                        <p:attrNameLst>
+                                          <p:attrName>style.visibility</p:attrName>
+                                        </p:attrNameLst>
+                                      </p:cBhvr>
+                                      <p:to>
+                                        <p:strVal val="visible"/>
+                                      </p:to>
+                                    </p:set>
+                                  </p:childTnLst>
+                                </p:cTn>
+                              </p:par>
+                            </p:childTnLst>
+                          </p:cTn>
+                        </p:par>
+                      </p:childTnLst>
+                    </p:cTn>
+                  </p:par>
+                </p:childTnLst>
+              </p:cTn>
+              <p:prevCondLst>
+                <p:cond evt="onPrev" delay="0">
+                  <p:tgtEl>
+                    <p:sldTgt/>
+                  </p:tgtEl>
+                </p:cond>
+              </p:prevCondLst>
+              <p:nextCondLst>
+                <p:cond evt="onNext" delay="0">
+                  <p:tgtEl>
+                    <p:sldTgt/>
+                  </p:tgtEl>
+                </p:cond>
+              </p:nextCondLst>
+            </p:seq>
+          </p:childTnLst>
+        </p:cTn>
+      </p:par>
+    </p:tnLst>
+  </p:timing>
+</p:sld>
+</file>
+
+<file path=ppt/slides/slide31.xml><?xml version="1.0" encoding="utf-8"?>
+<p:sld xmlns:a="http://schemas.openxmlformats.org/drawingml/2006/main" xmlns:r="http://schemas.openxmlformats.org/officeDocument/2006/relationships" xmlns:p="http://schemas.openxmlformats.org/presentationml/2006/main">
+  <p:cSld>
+    <p:spTree>
+      <p:nvGrpSpPr>
+        <p:cNvPr id="1" name=""/>
+        <p:cNvGrpSpPr/>
+        <p:nvPr/>
+      </p:nvGrpSpPr>
+      <p:grpSpPr>
+        <a:xfrm>
+          <a:off x="0" y="0"/>
+          <a:ext cx="0" cy="0"/>
+          <a:chOff x="0" y="0"/>
+          <a:chExt cx="0" cy="0"/>
+        </a:xfrm>
+      </p:grpSpPr>
+      <p:sp>
+        <p:nvSpPr>
+          <p:cNvPr id="2" name="Title 1"/>
+          <p:cNvSpPr>
+            <a:spLocks noGrp="1"/>
+          </p:cNvSpPr>
+          <p:nvPr>
+            <p:ph type="title"/>
+          </p:nvPr>
+        </p:nvSpPr>
+        <p:spPr/>
+        <p:txBody>
+          <a:bodyPr/>
+          <a:lstStyle/>
+          <a:p>
+            <a:r>
+              <a:rPr lang="en-US" dirty="0"/>
               <a:t>Forward-Looking Behavior</a:t>
             </a:r>
           </a:p>
@@ -20726,7 +20818,7 @@
               <a:pPr>
                 <a:defRPr/>
               </a:pPr>
-              <a:t>30</a:t>
+              <a:t>31</a:t>
             </a:fld>
             <a:endParaRPr lang="en-US" dirty="0"/>
           </a:p>
@@ -20824,7 +20916,7 @@
 </p:sld>
 </file>
 
-<file path=ppt/slides/slide31.xml><?xml version="1.0" encoding="utf-8"?>
+<file path=ppt/slides/slide32.xml><?xml version="1.0" encoding="utf-8"?>
 <p:sld xmlns:a="http://schemas.openxmlformats.org/drawingml/2006/main" xmlns:r="http://schemas.openxmlformats.org/officeDocument/2006/relationships" xmlns:p="http://schemas.openxmlformats.org/presentationml/2006/main">
   <p:cSld>
     <p:spTree>
@@ -20962,7 +21054,7 @@
               <a:pPr>
                 <a:defRPr/>
               </a:pPr>
-              <a:t>31</a:t>
+              <a:t>32</a:t>
             </a:fld>
             <a:endParaRPr lang="en-US" dirty="0"/>
           </a:p>
@@ -21091,7 +21183,7 @@
 </p:sld>
 </file>
 
-<file path=ppt/slides/slide32.xml><?xml version="1.0" encoding="utf-8"?>
+<file path=ppt/slides/slide33.xml><?xml version="1.0" encoding="utf-8"?>
 <p:sld xmlns:a="http://schemas.openxmlformats.org/drawingml/2006/main" xmlns:r="http://schemas.openxmlformats.org/officeDocument/2006/relationships" xmlns:p="http://schemas.openxmlformats.org/presentationml/2006/main">
   <p:cSld>
     <p:spTree>
@@ -21196,7 +21288,7 @@
             <a:fld id="{7A38D539-6BF2-4C53-B330-167D4393E1AC}" type="slidenum">
               <a:rPr lang="en-US" smtClean="0"/>
               <a:pPr/>
-              <a:t>32</a:t>
+              <a:t>33</a:t>
             </a:fld>
             <a:endParaRPr lang="en-US" dirty="0"/>
           </a:p>
@@ -21343,7 +21435,7 @@
 </p:sld>
 </file>
 
-<file path=ppt/slides/slide33.xml><?xml version="1.0" encoding="utf-8"?>
+<file path=ppt/slides/slide34.xml><?xml version="1.0" encoding="utf-8"?>
 <p:sld xmlns:a="http://schemas.openxmlformats.org/drawingml/2006/main" xmlns:r="http://schemas.openxmlformats.org/officeDocument/2006/relationships" xmlns:p="http://schemas.openxmlformats.org/presentationml/2006/main">
   <p:cSld>
     <p:spTree>
@@ -21470,7 +21562,7 @@
             <a:fld id="{7A38D539-6BF2-4C53-B330-167D4393E1AC}" type="slidenum">
               <a:rPr lang="en-US" smtClean="0"/>
               <a:pPr/>
-              <a:t>33</a:t>
+              <a:t>34</a:t>
             </a:fld>
             <a:endParaRPr lang="en-US" dirty="0"/>
           </a:p>
@@ -21648,7 +21740,7 @@
 </p:sld>
 </file>
 
-<file path=ppt/slides/slide34.xml><?xml version="1.0" encoding="utf-8"?>
+<file path=ppt/slides/slide35.xml><?xml version="1.0" encoding="utf-8"?>
 <p:sld xmlns:a="http://schemas.openxmlformats.org/drawingml/2006/main" xmlns:r="http://schemas.openxmlformats.org/officeDocument/2006/relationships" xmlns:p="http://schemas.openxmlformats.org/presentationml/2006/main">
   <p:cSld>
     <p:spTree>
@@ -21783,7 +21875,7 @@
             <a:fld id="{7A38D539-6BF2-4C53-B330-167D4393E1AC}" type="slidenum">
               <a:rPr lang="en-US" smtClean="0"/>
               <a:pPr/>
-              <a:t>34</a:t>
+              <a:t>35</a:t>
             </a:fld>
             <a:endParaRPr lang="en-US" dirty="0"/>
           </a:p>
@@ -22139,7 +22231,7 @@
 </p:sld>
 </file>
 
-<file path=ppt/slides/slide35.xml><?xml version="1.0" encoding="utf-8"?>
+<file path=ppt/slides/slide36.xml><?xml version="1.0" encoding="utf-8"?>
 <p:sld xmlns:a="http://schemas.openxmlformats.org/drawingml/2006/main" xmlns:r="http://schemas.openxmlformats.org/officeDocument/2006/relationships" xmlns:p="http://schemas.openxmlformats.org/presentationml/2006/main">
   <p:cSld>
     <p:spTree>
@@ -22213,15 +22305,12 @@
                 </a:pPr>
                 <a14:m>
                   <m:oMathPara xmlns:m="http://schemas.openxmlformats.org/officeDocument/2006/math">
-                    <m:oMathParaPr>
-                      <m:jc m:val="centerGroup"/>
-                    </m:oMathParaPr>
-                    <m:oMath xmlns:m="http://schemas.openxmlformats.org/officeDocument/2006/math">
+                    <m:oMath>
                       <m:sSup>
                         <m:sSupPr>
                           <m:ctrlPr>
                             <a:rPr lang="en-US" i="1">
-                              <a:latin typeface="Cambria Math" panose="02040503050406030204" pitchFamily="18" charset="0"/>
+                              <a:latin typeface="Cambria Math"/>
                             </a:rPr>
                           </m:ctrlPr>
                         </m:sSupPr>
@@ -22255,7 +22344,7 @@
                             <m:sSubPr>
                               <m:ctrlPr>
                                 <a:rPr lang="en-US" i="1">
-                                  <a:latin typeface="Cambria Math" panose="02040503050406030204" pitchFamily="18" charset="0"/>
+                                  <a:latin typeface="Cambria Math"/>
                                 </a:rPr>
                               </m:ctrlPr>
                             </m:sSubPr>
@@ -22295,7 +22384,7 @@
                         <m:dPr>
                           <m:ctrlPr>
                             <a:rPr lang="en-US" i="1">
-                              <a:latin typeface="Cambria Math" panose="02040503050406030204" pitchFamily="18" charset="0"/>
+                              <a:latin typeface="Cambria Math"/>
                               <a:ea typeface="Cambria Math"/>
                             </a:rPr>
                           </m:ctrlPr>
@@ -22321,7 +22410,7 @@
                         <m:sSupPr>
                           <m:ctrlPr>
                             <a:rPr lang="en-US" i="1">
-                              <a:latin typeface="Cambria Math" panose="02040503050406030204" pitchFamily="18" charset="0"/>
+                              <a:latin typeface="Cambria Math"/>
                               <a:ea typeface="Cambria Math"/>
                             </a:rPr>
                           </m:ctrlPr>
@@ -22359,7 +22448,7 @@
                             <m:sSubPr>
                               <m:ctrlPr>
                                 <a:rPr lang="en-US" i="1">
-                                  <a:latin typeface="Cambria Math" panose="02040503050406030204" pitchFamily="18" charset="0"/>
+                                  <a:latin typeface="Cambria Math"/>
                                   <a:ea typeface="Cambria Math"/>
                                 </a:rPr>
                               </m:ctrlPr>
@@ -22414,7 +22503,7 @@
                       <m:dPr>
                         <m:ctrlPr>
                           <a:rPr lang="en-US" i="1">
-                            <a:latin typeface="Cambria Math" panose="02040503050406030204" pitchFamily="18" charset="0"/>
+                            <a:latin typeface="Cambria Math"/>
                           </a:rPr>
                         </m:ctrlPr>
                       </m:dPr>
@@ -22436,8 +22525,8 @@
                     <m:func>
                       <m:funcPr>
                         <m:ctrlPr>
-                          <a:rPr lang="en-US" i="1">
-                            <a:latin typeface="Cambria Math" panose="02040503050406030204" pitchFamily="18" charset="0"/>
+                          <a:rPr lang="en-US">
+                            <a:latin typeface="Cambria Math"/>
                           </a:rPr>
                         </m:ctrlPr>
                       </m:funcPr>
@@ -22474,10 +22563,7 @@
                 </a:pPr>
                 <a14:m>
                   <m:oMathPara xmlns:m="http://schemas.openxmlformats.org/officeDocument/2006/math">
-                    <m:oMathParaPr>
-                      <m:jc m:val="centerGroup"/>
-                    </m:oMathParaPr>
-                    <m:oMath xmlns:m="http://schemas.openxmlformats.org/officeDocument/2006/math">
+                    <m:oMath>
                       <m:f>
                         <m:fPr>
                           <m:ctrlPr>
@@ -22491,7 +22577,7 @@
                             <m:sSubPr>
                               <m:ctrlPr>
                                 <a:rPr lang="en-US" i="1">
-                                  <a:latin typeface="Cambria Math" panose="02040503050406030204" pitchFamily="18" charset="0"/>
+                                  <a:latin typeface="Cambria Math"/>
                                 </a:rPr>
                               </m:ctrlPr>
                             </m:sSubPr>
@@ -22518,7 +22604,7 @@
                             <m:sSubPr>
                               <m:ctrlPr>
                                 <a:rPr lang="en-US" i="1">
-                                  <a:latin typeface="Cambria Math" panose="02040503050406030204" pitchFamily="18" charset="0"/>
+                                  <a:latin typeface="Cambria Math"/>
                                 </a:rPr>
                               </m:ctrlPr>
                             </m:sSubPr>
@@ -22558,7 +22644,7 @@
                         <m:dPr>
                           <m:ctrlPr>
                             <a:rPr lang="en-US" i="1">
-                              <a:latin typeface="Cambria Math" panose="02040503050406030204" pitchFamily="18" charset="0"/>
+                              <a:latin typeface="Cambria Math"/>
                               <a:ea typeface="Cambria Math"/>
                             </a:rPr>
                           </m:ctrlPr>
@@ -22658,7 +22744,7 @@
             <a:fld id="{7A38D539-6BF2-4C53-B330-167D4393E1AC}" type="slidenum">
               <a:rPr lang="en-US" smtClean="0"/>
               <a:pPr/>
-              <a:t>35</a:t>
+              <a:t>36</a:t>
             </a:fld>
             <a:endParaRPr lang="en-US" dirty="0"/>
           </a:p>
@@ -22849,7 +22935,7 @@
 </p:sld>
 </file>
 
-<file path=ppt/slides/slide36.xml><?xml version="1.0" encoding="utf-8"?>
+<file path=ppt/slides/slide37.xml><?xml version="1.0" encoding="utf-8"?>
 <p:sld xmlns:a="http://schemas.openxmlformats.org/drawingml/2006/main" xmlns:r="http://schemas.openxmlformats.org/officeDocument/2006/relationships" xmlns:p="http://schemas.openxmlformats.org/presentationml/2006/main">
   <p:cSld>
     <p:spTree>
@@ -22918,15 +23004,12 @@
                 </a:pPr>
                 <a14:m>
                   <m:oMathPara xmlns:m="http://schemas.openxmlformats.org/officeDocument/2006/math">
-                    <m:oMathParaPr>
-                      <m:jc m:val="centerGroup"/>
-                    </m:oMathParaPr>
-                    <m:oMath xmlns:m="http://schemas.openxmlformats.org/officeDocument/2006/math">
+                    <m:oMath>
                       <m:sSub>
                         <m:sSubPr>
                           <m:ctrlPr>
                             <a:rPr lang="en-US" i="1">
-                              <a:latin typeface="Cambria Math" panose="02040503050406030204" pitchFamily="18" charset="0"/>
+                              <a:latin typeface="Cambria Math"/>
                             </a:rPr>
                           </m:ctrlPr>
                         </m:sSubPr>
@@ -22957,7 +23040,7 @@
                         <m:fPr>
                           <m:ctrlPr>
                             <a:rPr lang="en-US" i="1">
-                              <a:latin typeface="Cambria Math" panose="02040503050406030204" pitchFamily="18" charset="0"/>
+                              <a:latin typeface="Cambria Math"/>
                             </a:rPr>
                           </m:ctrlPr>
                         </m:fPr>
@@ -22998,7 +23081,7 @@
                             <m:sSubPr>
                               <m:ctrlPr>
                                 <a:rPr lang="en-US" i="1">
-                                  <a:latin typeface="Cambria Math" panose="02040503050406030204" pitchFamily="18" charset="0"/>
+                                  <a:latin typeface="Cambria Math"/>
                                 </a:rPr>
                               </m:ctrlPr>
                             </m:sSubPr>
@@ -23029,7 +23112,7 @@
                             <m:fPr>
                               <m:ctrlPr>
                                 <a:rPr lang="en-US" i="1">
-                                  <a:latin typeface="Cambria Math" panose="02040503050406030204" pitchFamily="18" charset="0"/>
+                                  <a:latin typeface="Cambria Math"/>
                                 </a:rPr>
                               </m:ctrlPr>
                             </m:fPr>
@@ -23060,7 +23143,7 @@
                             <m:sSubPr>
                               <m:ctrlPr>
                                 <a:rPr lang="en-US" i="1">
-                                  <a:latin typeface="Cambria Math" panose="02040503050406030204" pitchFamily="18" charset="0"/>
+                                  <a:latin typeface="Cambria Math"/>
                                 </a:rPr>
                               </m:ctrlPr>
                             </m:sSubPr>
@@ -23194,7 +23277,7 @@
             <a:fld id="{7A38D539-6BF2-4C53-B330-167D4393E1AC}" type="slidenum">
               <a:rPr lang="en-US" smtClean="0"/>
               <a:pPr/>
-              <a:t>36</a:t>
+              <a:t>37</a:t>
             </a:fld>
             <a:endParaRPr lang="en-US" dirty="0"/>
           </a:p>
@@ -23323,7 +23406,7 @@
 </p:sld>
 </file>
 
-<file path=ppt/slides/slide37.xml><?xml version="1.0" encoding="utf-8"?>
+<file path=ppt/slides/slide38.xml><?xml version="1.0" encoding="utf-8"?>
 <p:sld xmlns:a="http://schemas.openxmlformats.org/drawingml/2006/main" xmlns:r="http://schemas.openxmlformats.org/officeDocument/2006/relationships" xmlns:p="http://schemas.openxmlformats.org/presentationml/2006/main">
   <p:cSld>
     <p:spTree>
@@ -23419,7 +23502,7 @@
               <a:pPr>
                 <a:defRPr/>
               </a:pPr>
-              <a:t>37</a:t>
+              <a:t>38</a:t>
             </a:fld>
             <a:endParaRPr lang="en-US" dirty="0"/>
           </a:p>
@@ -23471,7 +23554,7 @@
 </p:sld>
 </file>
 
-<file path=ppt/slides/slide38.xml><?xml version="1.0" encoding="utf-8"?>
+<file path=ppt/slides/slide39.xml><?xml version="1.0" encoding="utf-8"?>
 <p:sld xmlns:a="http://schemas.openxmlformats.org/drawingml/2006/main" xmlns:r="http://schemas.openxmlformats.org/officeDocument/2006/relationships" xmlns:p="http://schemas.openxmlformats.org/presentationml/2006/main">
   <p:cSld>
     <p:spTree>
@@ -23601,7 +23684,7 @@
               <a:pPr>
                 <a:defRPr/>
               </a:pPr>
-              <a:t>38</a:t>
+              <a:t>39</a:t>
             </a:fld>
             <a:endParaRPr lang="en-US" dirty="0"/>
           </a:p>
@@ -23846,7 +23929,7 @@
 </p:sld>
 </file>
 
-<file path=ppt/slides/slide39.xml><?xml version="1.0" encoding="utf-8"?>
+<file path=ppt/slides/slide4.xml><?xml version="1.0" encoding="utf-8"?>
 <p:sld xmlns:a="http://schemas.openxmlformats.org/drawingml/2006/main" xmlns:r="http://schemas.openxmlformats.org/officeDocument/2006/relationships" xmlns:p="http://schemas.openxmlformats.org/presentationml/2006/main">
   <p:cSld>
     <p:spTree>
@@ -23880,6 +23963,579 @@
           <a:p>
             <a:r>
               <a:rPr lang="en-US" dirty="0"/>
+              <a:t>A Savings Technology</a:t>
+            </a:r>
+          </a:p>
+        </p:txBody>
+      </p:sp>
+      <mc:AlternateContent xmlns:mc="http://schemas.openxmlformats.org/markup-compatibility/2006" xmlns:a14="http://schemas.microsoft.com/office/drawing/2010/main">
+        <mc:Choice Requires="a14">
+          <p:sp>
+            <p:nvSpPr>
+              <p:cNvPr id="3" name="Content Placeholder 2"/>
+              <p:cNvSpPr>
+                <a:spLocks noGrp="1"/>
+              </p:cNvSpPr>
+              <p:nvPr>
+                <p:ph idx="1"/>
+              </p:nvPr>
+            </p:nvSpPr>
+            <p:spPr>
+              <a:xfrm>
+                <a:off x="609600" y="1600200"/>
+                <a:ext cx="10972800" cy="4953000"/>
+              </a:xfrm>
+            </p:spPr>
+            <p:txBody>
+              <a:bodyPr/>
+              <a:lstStyle/>
+              <a:p>
+                <a:r>
+                  <a:rPr lang="en-US" dirty="0"/>
+                  <a:t>Robinson Crusoe has access to a “savings technology” </a:t>
+                </a:r>
+                <a:br>
+                  <a:rPr lang="en-US" dirty="0"/>
+                </a:br>
+                <a:r>
+                  <a:rPr lang="en-US" dirty="0"/>
+                  <a:t>(safe investment opportunity)</a:t>
+                </a:r>
+              </a:p>
+              <a:p>
+                <a:r>
+                  <a:rPr lang="en-US" dirty="0"/>
+                  <a:t>He can choose to save some of </a:t>
+                </a:r>
+                <a14:m>
+                  <m:oMath xmlns:m="http://schemas.openxmlformats.org/officeDocument/2006/math">
+                    <m:sSub>
+                      <m:sSubPr>
+                        <m:ctrlPr>
+                          <a:rPr lang="en-US" b="0" i="1" smtClean="0">
+                            <a:latin typeface="Cambria Math"/>
+                          </a:rPr>
+                        </m:ctrlPr>
+                      </m:sSubPr>
+                      <m:e>
+                        <m:r>
+                          <a:rPr lang="en-US" b="0" i="1" smtClean="0">
+                            <a:latin typeface="Cambria Math"/>
+                          </a:rPr>
+                          <m:t>𝑌</m:t>
+                        </m:r>
+                      </m:e>
+                      <m:sub>
+                        <m:r>
+                          <a:rPr lang="en-US" b="0" i="1" smtClean="0">
+                            <a:latin typeface="Cambria Math"/>
+                          </a:rPr>
+                          <m:t>1</m:t>
+                        </m:r>
+                      </m:sub>
+                    </m:sSub>
+                  </m:oMath>
+                </a14:m>
+                <a:endParaRPr lang="en-US" dirty="0"/>
+              </a:p>
+              <a:p>
+                <a:r>
+                  <a:rPr lang="en-US" dirty="0"/>
+                  <a:t>If he saves </a:t>
+                </a:r>
+                <a14:m>
+                  <m:oMath xmlns:m="http://schemas.openxmlformats.org/officeDocument/2006/math">
+                    <m:r>
+                      <a:rPr lang="en-US" b="0" i="1" smtClean="0">
+                        <a:latin typeface="Cambria Math"/>
+                      </a:rPr>
+                      <m:t>𝐵</m:t>
+                    </m:r>
+                  </m:oMath>
+                </a14:m>
+                <a:r>
+                  <a:rPr lang="en-US" dirty="0"/>
+                  <a:t> coconuts at time 1, the savings technology </a:t>
+                </a:r>
+                <a:br>
+                  <a:rPr lang="en-US" dirty="0"/>
+                </a:br>
+                <a:r>
+                  <a:rPr lang="en-US" dirty="0"/>
+                  <a:t>yields </a:t>
+                </a:r>
+                <a14:m>
+                  <m:oMath xmlns:m="http://schemas.openxmlformats.org/officeDocument/2006/math">
+                    <m:d>
+                      <m:dPr>
+                        <m:ctrlPr>
+                          <a:rPr lang="en-US" b="0" i="1" smtClean="0">
+                            <a:latin typeface="Cambria Math"/>
+                          </a:rPr>
+                        </m:ctrlPr>
+                      </m:dPr>
+                      <m:e>
+                        <m:r>
+                          <a:rPr lang="en-US" b="0" i="1" smtClean="0">
+                            <a:latin typeface="Cambria Math"/>
+                          </a:rPr>
+                          <m:t>1+</m:t>
+                        </m:r>
+                        <m:r>
+                          <a:rPr lang="en-US" b="0" i="1" smtClean="0">
+                            <a:latin typeface="Cambria Math"/>
+                          </a:rPr>
+                          <m:t>𝑅</m:t>
+                        </m:r>
+                      </m:e>
+                    </m:d>
+                    <m:r>
+                      <a:rPr lang="en-US" b="0" i="1" smtClean="0">
+                        <a:latin typeface="Cambria Math"/>
+                      </a:rPr>
+                      <m:t>𝐵</m:t>
+                    </m:r>
+                  </m:oMath>
+                </a14:m>
+                <a:r>
+                  <a:rPr lang="en-US" dirty="0"/>
+                  <a:t> coconuts at time 2</a:t>
+                </a:r>
+              </a:p>
+              <a:p>
+                <a:r>
+                  <a:rPr lang="en-US" dirty="0"/>
+                  <a:t>We say that the savings technology has a </a:t>
+                </a:r>
+                <a:r>
+                  <a:rPr lang="en-US" dirty="0">
+                    <a:solidFill>
+                      <a:schemeClr val="accent2"/>
+                    </a:solidFill>
+                  </a:rPr>
+                  <a:t>gross return</a:t>
+                </a:r>
+                <a:r>
+                  <a:rPr lang="en-US" dirty="0"/>
+                  <a:t> </a:t>
+                </a:r>
+                <a:br>
+                  <a:rPr lang="en-US" dirty="0"/>
+                </a:br>
+                <a:r>
+                  <a:rPr lang="en-US" dirty="0"/>
+                  <a:t>of </a:t>
+                </a:r>
+                <a14:m>
+                  <m:oMath xmlns:m="http://schemas.openxmlformats.org/officeDocument/2006/math">
+                    <m:d>
+                      <m:dPr>
+                        <m:ctrlPr>
+                          <a:rPr lang="en-US" b="0" i="1" smtClean="0">
+                            <a:latin typeface="Cambria Math"/>
+                          </a:rPr>
+                        </m:ctrlPr>
+                      </m:dPr>
+                      <m:e>
+                        <m:r>
+                          <a:rPr lang="en-US" b="0" i="1" smtClean="0">
+                            <a:latin typeface="Cambria Math"/>
+                          </a:rPr>
+                          <m:t>1+</m:t>
+                        </m:r>
+                        <m:r>
+                          <a:rPr lang="en-US" b="0" i="1" smtClean="0">
+                            <a:latin typeface="Cambria Math"/>
+                          </a:rPr>
+                          <m:t>𝑅</m:t>
+                        </m:r>
+                      </m:e>
+                    </m:d>
+                  </m:oMath>
+                </a14:m>
+                <a:r>
+                  <a:rPr lang="en-US" dirty="0"/>
+                  <a:t> and a </a:t>
+                </a:r>
+                <a:r>
+                  <a:rPr lang="en-US" dirty="0">
+                    <a:solidFill>
+                      <a:schemeClr val="accent2"/>
+                    </a:solidFill>
+                  </a:rPr>
+                  <a:t>net return </a:t>
+                </a:r>
+                <a:r>
+                  <a:rPr lang="en-US" dirty="0"/>
+                  <a:t>of </a:t>
+                </a:r>
+                <a14:m>
+                  <m:oMath xmlns:m="http://schemas.openxmlformats.org/officeDocument/2006/math">
+                    <m:r>
+                      <a:rPr lang="en-US" b="0" i="1" smtClean="0">
+                        <a:latin typeface="Cambria Math"/>
+                      </a:rPr>
+                      <m:t>𝑅</m:t>
+                    </m:r>
+                  </m:oMath>
+                </a14:m>
+                <a:endParaRPr lang="en-US" dirty="0"/>
+              </a:p>
+              <a:p>
+                <a:pPr lvl="1"/>
+                <a14:m>
+                  <m:oMath xmlns:m="http://schemas.openxmlformats.org/officeDocument/2006/math">
+                    <m:r>
+                      <a:rPr lang="en-US" i="1">
+                        <a:latin typeface="Cambria Math"/>
+                      </a:rPr>
+                      <m:t>𝑅</m:t>
+                    </m:r>
+                  </m:oMath>
+                </a14:m>
+                <a:r>
+                  <a:rPr lang="en-US" dirty="0"/>
+                  <a:t> is the “interest rate” in the economy</a:t>
+                </a:r>
+              </a:p>
+              <a:p>
+                <a:pPr lvl="1"/>
+                <a:endParaRPr lang="en-US" dirty="0"/>
+              </a:p>
+            </p:txBody>
+          </p:sp>
+        </mc:Choice>
+        <mc:Fallback xmlns="">
+          <p:sp>
+            <p:nvSpPr>
+              <p:cNvPr id="3" name="Content Placeholder 2"/>
+              <p:cNvSpPr>
+                <a:spLocks noGrp="1" noRot="1" noChangeAspect="1" noMove="1" noResize="1" noEditPoints="1" noAdjustHandles="1" noChangeArrowheads="1" noChangeShapeType="1" noTextEdit="1"/>
+              </p:cNvSpPr>
+              <p:nvPr>
+                <p:ph idx="1"/>
+              </p:nvPr>
+            </p:nvSpPr>
+            <p:spPr>
+              <a:xfrm>
+                <a:off x="609600" y="1600200"/>
+                <a:ext cx="10972800" cy="4953000"/>
+              </a:xfrm>
+              <a:blipFill>
+                <a:blip r:embed="rId3"/>
+                <a:stretch>
+                  <a:fillRect l="-1278" t="-1601"/>
+                </a:stretch>
+              </a:blipFill>
+            </p:spPr>
+            <p:txBody>
+              <a:bodyPr/>
+              <a:lstStyle/>
+              <a:p>
+                <a:r>
+                  <a:rPr lang="en-US">
+                    <a:noFill/>
+                  </a:rPr>
+                  <a:t> </a:t>
+                </a:r>
+              </a:p>
+            </p:txBody>
+          </p:sp>
+        </mc:Fallback>
+      </mc:AlternateContent>
+      <p:sp>
+        <p:nvSpPr>
+          <p:cNvPr id="4" name="Slide Number Placeholder 3"/>
+          <p:cNvSpPr>
+            <a:spLocks noGrp="1"/>
+          </p:cNvSpPr>
+          <p:nvPr>
+            <p:ph type="sldNum" sz="quarter" idx="12"/>
+          </p:nvPr>
+        </p:nvSpPr>
+        <p:spPr/>
+        <p:txBody>
+          <a:bodyPr/>
+          <a:lstStyle/>
+          <a:p>
+            <a:pPr>
+              <a:defRPr/>
+            </a:pPr>
+            <a:fld id="{0B9AA5AD-3701-488D-8337-65701EB767E3}" type="slidenum">
+              <a:rPr lang="en-US" smtClean="0"/>
+              <a:pPr>
+                <a:defRPr/>
+              </a:pPr>
+              <a:t>4</a:t>
+            </a:fld>
+            <a:endParaRPr lang="en-US" dirty="0"/>
+          </a:p>
+        </p:txBody>
+      </p:sp>
+    </p:spTree>
+    <p:extLst>
+      <p:ext uri="{BB962C8B-B14F-4D97-AF65-F5344CB8AC3E}">
+        <p14:creationId xmlns:p14="http://schemas.microsoft.com/office/powerpoint/2010/main" val="2593400015"/>
+      </p:ext>
+    </p:extLst>
+  </p:cSld>
+  <p:clrMapOvr>
+    <a:masterClrMapping/>
+  </p:clrMapOvr>
+  <p:timing>
+    <p:tnLst>
+      <p:par>
+        <p:cTn id="1" dur="indefinite" restart="never" nodeType="tmRoot">
+          <p:childTnLst>
+            <p:seq concurrent="1" nextAc="seek">
+              <p:cTn id="2" dur="indefinite" nodeType="mainSeq">
+                <p:childTnLst>
+                  <p:par>
+                    <p:cTn id="3" fill="hold">
+                      <p:stCondLst>
+                        <p:cond delay="indefinite"/>
+                      </p:stCondLst>
+                      <p:childTnLst>
+                        <p:par>
+                          <p:cTn id="4" fill="hold">
+                            <p:stCondLst>
+                              <p:cond delay="0"/>
+                            </p:stCondLst>
+                            <p:childTnLst>
+                              <p:par>
+                                <p:cTn id="5" presetID="1" presetClass="entr" presetSubtype="0" fill="hold" nodeType="clickEffect">
+                                  <p:stCondLst>
+                                    <p:cond delay="0"/>
+                                  </p:stCondLst>
+                                  <p:childTnLst>
+                                    <p:set>
+                                      <p:cBhvr>
+                                        <p:cTn id="6" dur="1" fill="hold">
+                                          <p:stCondLst>
+                                            <p:cond delay="0"/>
+                                          </p:stCondLst>
+                                        </p:cTn>
+                                        <p:tgtEl>
+                                          <p:spTgt spid="3">
+                                            <p:txEl>
+                                              <p:pRg st="1" end="1"/>
+                                            </p:txEl>
+                                          </p:spTgt>
+                                        </p:tgtEl>
+                                        <p:attrNameLst>
+                                          <p:attrName>style.visibility</p:attrName>
+                                        </p:attrNameLst>
+                                      </p:cBhvr>
+                                      <p:to>
+                                        <p:strVal val="visible"/>
+                                      </p:to>
+                                    </p:set>
+                                  </p:childTnLst>
+                                </p:cTn>
+                              </p:par>
+                            </p:childTnLst>
+                          </p:cTn>
+                        </p:par>
+                      </p:childTnLst>
+                    </p:cTn>
+                  </p:par>
+                  <p:par>
+                    <p:cTn id="7" fill="hold">
+                      <p:stCondLst>
+                        <p:cond delay="indefinite"/>
+                      </p:stCondLst>
+                      <p:childTnLst>
+                        <p:par>
+                          <p:cTn id="8" fill="hold">
+                            <p:stCondLst>
+                              <p:cond delay="0"/>
+                            </p:stCondLst>
+                            <p:childTnLst>
+                              <p:par>
+                                <p:cTn id="9" presetID="1" presetClass="entr" presetSubtype="0" fill="hold" nodeType="clickEffect">
+                                  <p:stCondLst>
+                                    <p:cond delay="0"/>
+                                  </p:stCondLst>
+                                  <p:childTnLst>
+                                    <p:set>
+                                      <p:cBhvr>
+                                        <p:cTn id="10" dur="1" fill="hold">
+                                          <p:stCondLst>
+                                            <p:cond delay="0"/>
+                                          </p:stCondLst>
+                                        </p:cTn>
+                                        <p:tgtEl>
+                                          <p:spTgt spid="3">
+                                            <p:txEl>
+                                              <p:pRg st="2" end="2"/>
+                                            </p:txEl>
+                                          </p:spTgt>
+                                        </p:tgtEl>
+                                        <p:attrNameLst>
+                                          <p:attrName>style.visibility</p:attrName>
+                                        </p:attrNameLst>
+                                      </p:cBhvr>
+                                      <p:to>
+                                        <p:strVal val="visible"/>
+                                      </p:to>
+                                    </p:set>
+                                  </p:childTnLst>
+                                </p:cTn>
+                              </p:par>
+                            </p:childTnLst>
+                          </p:cTn>
+                        </p:par>
+                      </p:childTnLst>
+                    </p:cTn>
+                  </p:par>
+                  <p:par>
+                    <p:cTn id="11" fill="hold">
+                      <p:stCondLst>
+                        <p:cond delay="indefinite"/>
+                      </p:stCondLst>
+                      <p:childTnLst>
+                        <p:par>
+                          <p:cTn id="12" fill="hold">
+                            <p:stCondLst>
+                              <p:cond delay="0"/>
+                            </p:stCondLst>
+                            <p:childTnLst>
+                              <p:par>
+                                <p:cTn id="13" presetID="1" presetClass="entr" presetSubtype="0" fill="hold" nodeType="clickEffect">
+                                  <p:stCondLst>
+                                    <p:cond delay="0"/>
+                                  </p:stCondLst>
+                                  <p:childTnLst>
+                                    <p:set>
+                                      <p:cBhvr>
+                                        <p:cTn id="14" dur="1" fill="hold">
+                                          <p:stCondLst>
+                                            <p:cond delay="0"/>
+                                          </p:stCondLst>
+                                        </p:cTn>
+                                        <p:tgtEl>
+                                          <p:spTgt spid="3">
+                                            <p:txEl>
+                                              <p:pRg st="3" end="3"/>
+                                            </p:txEl>
+                                          </p:spTgt>
+                                        </p:tgtEl>
+                                        <p:attrNameLst>
+                                          <p:attrName>style.visibility</p:attrName>
+                                        </p:attrNameLst>
+                                      </p:cBhvr>
+                                      <p:to>
+                                        <p:strVal val="visible"/>
+                                      </p:to>
+                                    </p:set>
+                                  </p:childTnLst>
+                                </p:cTn>
+                              </p:par>
+                            </p:childTnLst>
+                          </p:cTn>
+                        </p:par>
+                        <p:par>
+                          <p:cTn id="15" fill="hold">
+                            <p:stCondLst>
+                              <p:cond delay="0"/>
+                            </p:stCondLst>
+                            <p:childTnLst>
+                              <p:par>
+                                <p:cTn id="16" presetID="1" presetClass="entr" presetSubtype="0" fill="hold" nodeType="afterEffect">
+                                  <p:stCondLst>
+                                    <p:cond delay="0"/>
+                                  </p:stCondLst>
+                                  <p:childTnLst>
+                                    <p:set>
+                                      <p:cBhvr>
+                                        <p:cTn id="17" dur="1" fill="hold">
+                                          <p:stCondLst>
+                                            <p:cond delay="0"/>
+                                          </p:stCondLst>
+                                        </p:cTn>
+                                        <p:tgtEl>
+                                          <p:spTgt spid="3">
+                                            <p:txEl>
+                                              <p:pRg st="4" end="4"/>
+                                            </p:txEl>
+                                          </p:spTgt>
+                                        </p:tgtEl>
+                                        <p:attrNameLst>
+                                          <p:attrName>style.visibility</p:attrName>
+                                        </p:attrNameLst>
+                                      </p:cBhvr>
+                                      <p:to>
+                                        <p:strVal val="visible"/>
+                                      </p:to>
+                                    </p:set>
+                                  </p:childTnLst>
+                                </p:cTn>
+                              </p:par>
+                            </p:childTnLst>
+                          </p:cTn>
+                        </p:par>
+                      </p:childTnLst>
+                    </p:cTn>
+                  </p:par>
+                </p:childTnLst>
+              </p:cTn>
+              <p:prevCondLst>
+                <p:cond evt="onPrev" delay="0">
+                  <p:tgtEl>
+                    <p:sldTgt/>
+                  </p:tgtEl>
+                </p:cond>
+              </p:prevCondLst>
+              <p:nextCondLst>
+                <p:cond evt="onNext" delay="0">
+                  <p:tgtEl>
+                    <p:sldTgt/>
+                  </p:tgtEl>
+                </p:cond>
+              </p:nextCondLst>
+            </p:seq>
+          </p:childTnLst>
+        </p:cTn>
+      </p:par>
+    </p:tnLst>
+  </p:timing>
+</p:sld>
+</file>
+
+<file path=ppt/slides/slide40.xml><?xml version="1.0" encoding="utf-8"?>
+<p:sld xmlns:a="http://schemas.openxmlformats.org/drawingml/2006/main" xmlns:r="http://schemas.openxmlformats.org/officeDocument/2006/relationships" xmlns:p="http://schemas.openxmlformats.org/presentationml/2006/main">
+  <p:cSld>
+    <p:spTree>
+      <p:nvGrpSpPr>
+        <p:cNvPr id="1" name=""/>
+        <p:cNvGrpSpPr/>
+        <p:nvPr/>
+      </p:nvGrpSpPr>
+      <p:grpSpPr>
+        <a:xfrm>
+          <a:off x="0" y="0"/>
+          <a:ext cx="0" cy="0"/>
+          <a:chOff x="0" y="0"/>
+          <a:chExt cx="0" cy="0"/>
+        </a:xfrm>
+      </p:grpSpPr>
+      <p:sp>
+        <p:nvSpPr>
+          <p:cNvPr id="2" name="Title 1"/>
+          <p:cNvSpPr>
+            <a:spLocks noGrp="1"/>
+          </p:cNvSpPr>
+          <p:nvPr>
+            <p:ph type="title"/>
+          </p:nvPr>
+        </p:nvSpPr>
+        <p:spPr/>
+        <p:txBody>
+          <a:bodyPr/>
+          <a:lstStyle/>
+          <a:p>
+            <a:r>
+              <a:rPr lang="en-US" dirty="0"/>
               <a:t>What Is Wrong with the Model?</a:t>
             </a:r>
           </a:p>
@@ -23986,7 +24642,7 @@
             <a:fld id="{7A38D539-6BF2-4C53-B330-167D4393E1AC}" type="slidenum">
               <a:rPr lang="en-US" smtClean="0"/>
               <a:pPr/>
-              <a:t>39</a:t>
+              <a:t>40</a:t>
             </a:fld>
             <a:endParaRPr lang="en-US" dirty="0"/>
           </a:p>
@@ -24293,580 +24949,7 @@
 </p:sld>
 </file>
 
-<file path=ppt/slides/slide4.xml><?xml version="1.0" encoding="utf-8"?>
-<p:sld xmlns:a="http://schemas.openxmlformats.org/drawingml/2006/main" xmlns:r="http://schemas.openxmlformats.org/officeDocument/2006/relationships" xmlns:p="http://schemas.openxmlformats.org/presentationml/2006/main">
-  <p:cSld>
-    <p:spTree>
-      <p:nvGrpSpPr>
-        <p:cNvPr id="1" name=""/>
-        <p:cNvGrpSpPr/>
-        <p:nvPr/>
-      </p:nvGrpSpPr>
-      <p:grpSpPr>
-        <a:xfrm>
-          <a:off x="0" y="0"/>
-          <a:ext cx="0" cy="0"/>
-          <a:chOff x="0" y="0"/>
-          <a:chExt cx="0" cy="0"/>
-        </a:xfrm>
-      </p:grpSpPr>
-      <p:sp>
-        <p:nvSpPr>
-          <p:cNvPr id="2" name="Title 1"/>
-          <p:cNvSpPr>
-            <a:spLocks noGrp="1"/>
-          </p:cNvSpPr>
-          <p:nvPr>
-            <p:ph type="title"/>
-          </p:nvPr>
-        </p:nvSpPr>
-        <p:spPr/>
-        <p:txBody>
-          <a:bodyPr/>
-          <a:lstStyle/>
-          <a:p>
-            <a:r>
-              <a:rPr lang="en-US" dirty="0"/>
-              <a:t>A Savings Technology</a:t>
-            </a:r>
-          </a:p>
-        </p:txBody>
-      </p:sp>
-      <mc:AlternateContent xmlns:mc="http://schemas.openxmlformats.org/markup-compatibility/2006" xmlns:a14="http://schemas.microsoft.com/office/drawing/2010/main">
-        <mc:Choice Requires="a14">
-          <p:sp>
-            <p:nvSpPr>
-              <p:cNvPr id="3" name="Content Placeholder 2"/>
-              <p:cNvSpPr>
-                <a:spLocks noGrp="1"/>
-              </p:cNvSpPr>
-              <p:nvPr>
-                <p:ph idx="1"/>
-              </p:nvPr>
-            </p:nvSpPr>
-            <p:spPr>
-              <a:xfrm>
-                <a:off x="609600" y="1600200"/>
-                <a:ext cx="10972800" cy="4953000"/>
-              </a:xfrm>
-            </p:spPr>
-            <p:txBody>
-              <a:bodyPr/>
-              <a:lstStyle/>
-              <a:p>
-                <a:r>
-                  <a:rPr lang="en-US" dirty="0"/>
-                  <a:t>Robinson Crusoe has access to a “savings technology” </a:t>
-                </a:r>
-                <a:br>
-                  <a:rPr lang="en-US" dirty="0"/>
-                </a:br>
-                <a:r>
-                  <a:rPr lang="en-US" dirty="0"/>
-                  <a:t>(safe investment opportunity)</a:t>
-                </a:r>
-              </a:p>
-              <a:p>
-                <a:r>
-                  <a:rPr lang="en-US" dirty="0"/>
-                  <a:t>He can choose to save some of </a:t>
-                </a:r>
-                <a14:m>
-                  <m:oMath xmlns:m="http://schemas.openxmlformats.org/officeDocument/2006/math">
-                    <m:sSub>
-                      <m:sSubPr>
-                        <m:ctrlPr>
-                          <a:rPr lang="en-US" i="1" smtClean="0">
-                            <a:latin typeface="Cambria Math" panose="02040503050406030204" pitchFamily="18" charset="0"/>
-                          </a:rPr>
-                        </m:ctrlPr>
-                      </m:sSubPr>
-                      <m:e>
-                        <m:r>
-                          <a:rPr lang="en-US" b="0" i="1" smtClean="0">
-                            <a:latin typeface="Cambria Math"/>
-                          </a:rPr>
-                          <m:t>𝑌</m:t>
-                        </m:r>
-                      </m:e>
-                      <m:sub>
-                        <m:r>
-                          <a:rPr lang="en-US" b="0" i="1" smtClean="0">
-                            <a:latin typeface="Cambria Math"/>
-                          </a:rPr>
-                          <m:t>1</m:t>
-                        </m:r>
-                      </m:sub>
-                    </m:sSub>
-                  </m:oMath>
-                </a14:m>
-                <a:endParaRPr lang="en-US" dirty="0"/>
-              </a:p>
-              <a:p>
-                <a:r>
-                  <a:rPr lang="en-US" dirty="0"/>
-                  <a:t>If he saves </a:t>
-                </a:r>
-                <a14:m>
-                  <m:oMath xmlns:m="http://schemas.openxmlformats.org/officeDocument/2006/math">
-                    <m:r>
-                      <a:rPr lang="en-US" b="0" i="1" smtClean="0">
-                        <a:latin typeface="Cambria Math"/>
-                      </a:rPr>
-                      <m:t>𝐵</m:t>
-                    </m:r>
-                  </m:oMath>
-                </a14:m>
-                <a:r>
-                  <a:rPr lang="en-US" dirty="0"/>
-                  <a:t> coconuts at time 1, the savings technology </a:t>
-                </a:r>
-                <a:br>
-                  <a:rPr lang="en-US" dirty="0"/>
-                </a:br>
-                <a:r>
-                  <a:rPr lang="en-US" dirty="0"/>
-                  <a:t>yields </a:t>
-                </a:r>
-                <a14:m>
-                  <m:oMath xmlns:m="http://schemas.openxmlformats.org/officeDocument/2006/math">
-                    <m:d>
-                      <m:dPr>
-                        <m:ctrlPr>
-                          <a:rPr lang="en-US" i="1" smtClean="0">
-                            <a:latin typeface="Cambria Math" panose="02040503050406030204" pitchFamily="18" charset="0"/>
-                          </a:rPr>
-                        </m:ctrlPr>
-                      </m:dPr>
-                      <m:e>
-                        <m:r>
-                          <a:rPr lang="en-US" b="0" i="1" smtClean="0">
-                            <a:latin typeface="Cambria Math"/>
-                          </a:rPr>
-                          <m:t>1+</m:t>
-                        </m:r>
-                        <m:r>
-                          <a:rPr lang="en-US" b="0" i="1" smtClean="0">
-                            <a:latin typeface="Cambria Math"/>
-                          </a:rPr>
-                          <m:t>𝑅</m:t>
-                        </m:r>
-                      </m:e>
-                    </m:d>
-                    <m:r>
-                      <a:rPr lang="en-US" b="0" i="1" smtClean="0">
-                        <a:latin typeface="Cambria Math"/>
-                      </a:rPr>
-                      <m:t>𝐵</m:t>
-                    </m:r>
-                  </m:oMath>
-                </a14:m>
-                <a:r>
-                  <a:rPr lang="en-US" dirty="0"/>
-                  <a:t> coconuts at time 2</a:t>
-                </a:r>
-              </a:p>
-              <a:p>
-                <a:r>
-                  <a:rPr lang="en-US" dirty="0"/>
-                  <a:t>We say that the savings technology has a </a:t>
-                </a:r>
-                <a:r>
-                  <a:rPr lang="en-US" dirty="0">
-                    <a:solidFill>
-                      <a:schemeClr val="accent2"/>
-                    </a:solidFill>
-                  </a:rPr>
-                  <a:t>gross return</a:t>
-                </a:r>
-                <a:r>
-                  <a:rPr lang="en-US" dirty="0"/>
-                  <a:t> </a:t>
-                </a:r>
-                <a:br>
-                  <a:rPr lang="en-US" dirty="0"/>
-                </a:br>
-                <a:r>
-                  <a:rPr lang="en-US" dirty="0"/>
-                  <a:t>of </a:t>
-                </a:r>
-                <a14:m>
-                  <m:oMath xmlns:m="http://schemas.openxmlformats.org/officeDocument/2006/math">
-                    <m:d>
-                      <m:dPr>
-                        <m:ctrlPr>
-                          <a:rPr lang="en-US" i="1" smtClean="0">
-                            <a:latin typeface="Cambria Math" panose="02040503050406030204" pitchFamily="18" charset="0"/>
-                          </a:rPr>
-                        </m:ctrlPr>
-                      </m:dPr>
-                      <m:e>
-                        <m:r>
-                          <a:rPr lang="en-US" b="0" i="1" smtClean="0">
-                            <a:latin typeface="Cambria Math"/>
-                          </a:rPr>
-                          <m:t>1+</m:t>
-                        </m:r>
-                        <m:r>
-                          <a:rPr lang="en-US" b="0" i="1" smtClean="0">
-                            <a:latin typeface="Cambria Math"/>
-                          </a:rPr>
-                          <m:t>𝑅</m:t>
-                        </m:r>
-                      </m:e>
-                    </m:d>
-                  </m:oMath>
-                </a14:m>
-                <a:r>
-                  <a:rPr lang="en-US" dirty="0"/>
-                  <a:t> and a </a:t>
-                </a:r>
-                <a:r>
-                  <a:rPr lang="en-US" dirty="0">
-                    <a:solidFill>
-                      <a:schemeClr val="accent2"/>
-                    </a:solidFill>
-                  </a:rPr>
-                  <a:t>net return </a:t>
-                </a:r>
-                <a:r>
-                  <a:rPr lang="en-US" dirty="0"/>
-                  <a:t>of </a:t>
-                </a:r>
-                <a14:m>
-                  <m:oMath xmlns:m="http://schemas.openxmlformats.org/officeDocument/2006/math">
-                    <m:r>
-                      <a:rPr lang="en-US" b="0" i="1" smtClean="0">
-                        <a:latin typeface="Cambria Math"/>
-                      </a:rPr>
-                      <m:t>𝑅</m:t>
-                    </m:r>
-                  </m:oMath>
-                </a14:m>
-                <a:endParaRPr lang="en-US" dirty="0"/>
-              </a:p>
-              <a:p>
-                <a:pPr lvl="1"/>
-                <a14:m>
-                  <m:oMath xmlns:m="http://schemas.openxmlformats.org/officeDocument/2006/math">
-                    <m:r>
-                      <a:rPr lang="en-US" i="1">
-                        <a:latin typeface="Cambria Math"/>
-                      </a:rPr>
-                      <m:t>𝑅</m:t>
-                    </m:r>
-                  </m:oMath>
-                </a14:m>
-                <a:r>
-                  <a:rPr lang="en-US" dirty="0"/>
-                  <a:t> is the “interest rate” in the economy</a:t>
-                </a:r>
-              </a:p>
-              <a:p>
-                <a:pPr lvl="1"/>
-                <a:endParaRPr lang="en-US" dirty="0"/>
-              </a:p>
-            </p:txBody>
-          </p:sp>
-        </mc:Choice>
-        <mc:Fallback xmlns="">
-          <p:sp>
-            <p:nvSpPr>
-              <p:cNvPr id="3" name="Content Placeholder 2"/>
-              <p:cNvSpPr>
-                <a:spLocks noGrp="1" noRot="1" noChangeAspect="1" noMove="1" noResize="1" noEditPoints="1" noAdjustHandles="1" noChangeArrowheads="1" noChangeShapeType="1" noTextEdit="1"/>
-              </p:cNvSpPr>
-              <p:nvPr>
-                <p:ph idx="1"/>
-              </p:nvPr>
-            </p:nvSpPr>
-            <p:spPr>
-              <a:xfrm>
-                <a:off x="609600" y="1600200"/>
-                <a:ext cx="10972800" cy="4953000"/>
-              </a:xfrm>
-              <a:blipFill>
-                <a:blip r:embed="rId3"/>
-                <a:stretch>
-                  <a:fillRect l="-1278" t="-1601"/>
-                </a:stretch>
-              </a:blipFill>
-            </p:spPr>
-            <p:txBody>
-              <a:bodyPr/>
-              <a:lstStyle/>
-              <a:p>
-                <a:r>
-                  <a:rPr lang="en-US">
-                    <a:noFill/>
-                  </a:rPr>
-                  <a:t> </a:t>
-                </a:r>
-              </a:p>
-            </p:txBody>
-          </p:sp>
-        </mc:Fallback>
-      </mc:AlternateContent>
-      <p:sp>
-        <p:nvSpPr>
-          <p:cNvPr id="4" name="Slide Number Placeholder 3"/>
-          <p:cNvSpPr>
-            <a:spLocks noGrp="1"/>
-          </p:cNvSpPr>
-          <p:nvPr>
-            <p:ph type="sldNum" sz="quarter" idx="12"/>
-          </p:nvPr>
-        </p:nvSpPr>
-        <p:spPr/>
-        <p:txBody>
-          <a:bodyPr/>
-          <a:lstStyle/>
-          <a:p>
-            <a:pPr>
-              <a:defRPr/>
-            </a:pPr>
-            <a:fld id="{0B9AA5AD-3701-488D-8337-65701EB767E3}" type="slidenum">
-              <a:rPr lang="en-US" smtClean="0"/>
-              <a:pPr>
-                <a:defRPr/>
-              </a:pPr>
-              <a:t>4</a:t>
-            </a:fld>
-            <a:endParaRPr lang="en-US" dirty="0"/>
-          </a:p>
-        </p:txBody>
-      </p:sp>
-    </p:spTree>
-    <p:extLst>
-      <p:ext uri="{BB962C8B-B14F-4D97-AF65-F5344CB8AC3E}">
-        <p14:creationId xmlns:p14="http://schemas.microsoft.com/office/powerpoint/2010/main" val="2593400015"/>
-      </p:ext>
-    </p:extLst>
-  </p:cSld>
-  <p:clrMapOvr>
-    <a:masterClrMapping/>
-  </p:clrMapOvr>
-  <p:timing>
-    <p:tnLst>
-      <p:par>
-        <p:cTn id="1" dur="indefinite" restart="never" nodeType="tmRoot">
-          <p:childTnLst>
-            <p:seq concurrent="1" nextAc="seek">
-              <p:cTn id="2" dur="indefinite" nodeType="mainSeq">
-                <p:childTnLst>
-                  <p:par>
-                    <p:cTn id="3" fill="hold">
-                      <p:stCondLst>
-                        <p:cond delay="indefinite"/>
-                      </p:stCondLst>
-                      <p:childTnLst>
-                        <p:par>
-                          <p:cTn id="4" fill="hold">
-                            <p:stCondLst>
-                              <p:cond delay="0"/>
-                            </p:stCondLst>
-                            <p:childTnLst>
-                              <p:par>
-                                <p:cTn id="5" presetID="1" presetClass="entr" presetSubtype="0" fill="hold" nodeType="clickEffect">
-                                  <p:stCondLst>
-                                    <p:cond delay="0"/>
-                                  </p:stCondLst>
-                                  <p:childTnLst>
-                                    <p:set>
-                                      <p:cBhvr>
-                                        <p:cTn id="6" dur="1" fill="hold">
-                                          <p:stCondLst>
-                                            <p:cond delay="0"/>
-                                          </p:stCondLst>
-                                        </p:cTn>
-                                        <p:tgtEl>
-                                          <p:spTgt spid="3">
-                                            <p:txEl>
-                                              <p:pRg st="1" end="1"/>
-                                            </p:txEl>
-                                          </p:spTgt>
-                                        </p:tgtEl>
-                                        <p:attrNameLst>
-                                          <p:attrName>style.visibility</p:attrName>
-                                        </p:attrNameLst>
-                                      </p:cBhvr>
-                                      <p:to>
-                                        <p:strVal val="visible"/>
-                                      </p:to>
-                                    </p:set>
-                                  </p:childTnLst>
-                                </p:cTn>
-                              </p:par>
-                            </p:childTnLst>
-                          </p:cTn>
-                        </p:par>
-                      </p:childTnLst>
-                    </p:cTn>
-                  </p:par>
-                  <p:par>
-                    <p:cTn id="7" fill="hold">
-                      <p:stCondLst>
-                        <p:cond delay="indefinite"/>
-                      </p:stCondLst>
-                      <p:childTnLst>
-                        <p:par>
-                          <p:cTn id="8" fill="hold">
-                            <p:stCondLst>
-                              <p:cond delay="0"/>
-                            </p:stCondLst>
-                            <p:childTnLst>
-                              <p:par>
-                                <p:cTn id="9" presetID="1" presetClass="entr" presetSubtype="0" fill="hold" nodeType="clickEffect">
-                                  <p:stCondLst>
-                                    <p:cond delay="0"/>
-                                  </p:stCondLst>
-                                  <p:childTnLst>
-                                    <p:set>
-                                      <p:cBhvr>
-                                        <p:cTn id="10" dur="1" fill="hold">
-                                          <p:stCondLst>
-                                            <p:cond delay="0"/>
-                                          </p:stCondLst>
-                                        </p:cTn>
-                                        <p:tgtEl>
-                                          <p:spTgt spid="3">
-                                            <p:txEl>
-                                              <p:pRg st="2" end="2"/>
-                                            </p:txEl>
-                                          </p:spTgt>
-                                        </p:tgtEl>
-                                        <p:attrNameLst>
-                                          <p:attrName>style.visibility</p:attrName>
-                                        </p:attrNameLst>
-                                      </p:cBhvr>
-                                      <p:to>
-                                        <p:strVal val="visible"/>
-                                      </p:to>
-                                    </p:set>
-                                  </p:childTnLst>
-                                </p:cTn>
-                              </p:par>
-                            </p:childTnLst>
-                          </p:cTn>
-                        </p:par>
-                      </p:childTnLst>
-                    </p:cTn>
-                  </p:par>
-                  <p:par>
-                    <p:cTn id="11" fill="hold">
-                      <p:stCondLst>
-                        <p:cond delay="indefinite"/>
-                      </p:stCondLst>
-                      <p:childTnLst>
-                        <p:par>
-                          <p:cTn id="12" fill="hold">
-                            <p:stCondLst>
-                              <p:cond delay="0"/>
-                            </p:stCondLst>
-                            <p:childTnLst>
-                              <p:par>
-                                <p:cTn id="13" presetID="1" presetClass="entr" presetSubtype="0" fill="hold" nodeType="clickEffect">
-                                  <p:stCondLst>
-                                    <p:cond delay="0"/>
-                                  </p:stCondLst>
-                                  <p:childTnLst>
-                                    <p:set>
-                                      <p:cBhvr>
-                                        <p:cTn id="14" dur="1" fill="hold">
-                                          <p:stCondLst>
-                                            <p:cond delay="0"/>
-                                          </p:stCondLst>
-                                        </p:cTn>
-                                        <p:tgtEl>
-                                          <p:spTgt spid="3">
-                                            <p:txEl>
-                                              <p:pRg st="3" end="3"/>
-                                            </p:txEl>
-                                          </p:spTgt>
-                                        </p:tgtEl>
-                                        <p:attrNameLst>
-                                          <p:attrName>style.visibility</p:attrName>
-                                        </p:attrNameLst>
-                                      </p:cBhvr>
-                                      <p:to>
-                                        <p:strVal val="visible"/>
-                                      </p:to>
-                                    </p:set>
-                                  </p:childTnLst>
-                                </p:cTn>
-                              </p:par>
-                            </p:childTnLst>
-                          </p:cTn>
-                        </p:par>
-                        <p:par>
-                          <p:cTn id="15" fill="hold">
-                            <p:stCondLst>
-                              <p:cond delay="0"/>
-                            </p:stCondLst>
-                            <p:childTnLst>
-                              <p:par>
-                                <p:cTn id="16" presetID="1" presetClass="entr" presetSubtype="0" fill="hold" nodeType="afterEffect">
-                                  <p:stCondLst>
-                                    <p:cond delay="0"/>
-                                  </p:stCondLst>
-                                  <p:childTnLst>
-                                    <p:set>
-                                      <p:cBhvr>
-                                        <p:cTn id="17" dur="1" fill="hold">
-                                          <p:stCondLst>
-                                            <p:cond delay="0"/>
-                                          </p:stCondLst>
-                                        </p:cTn>
-                                        <p:tgtEl>
-                                          <p:spTgt spid="3">
-                                            <p:txEl>
-                                              <p:pRg st="4" end="4"/>
-                                            </p:txEl>
-                                          </p:spTgt>
-                                        </p:tgtEl>
-                                        <p:attrNameLst>
-                                          <p:attrName>style.visibility</p:attrName>
-                                        </p:attrNameLst>
-                                      </p:cBhvr>
-                                      <p:to>
-                                        <p:strVal val="visible"/>
-                                      </p:to>
-                                    </p:set>
-                                  </p:childTnLst>
-                                </p:cTn>
-                              </p:par>
-                            </p:childTnLst>
-                          </p:cTn>
-                        </p:par>
-                      </p:childTnLst>
-                    </p:cTn>
-                  </p:par>
-                </p:childTnLst>
-              </p:cTn>
-              <p:prevCondLst>
-                <p:cond evt="onPrev" delay="0">
-                  <p:tgtEl>
-                    <p:sldTgt/>
-                  </p:tgtEl>
-                </p:cond>
-              </p:prevCondLst>
-              <p:nextCondLst>
-                <p:cond evt="onNext" delay="0">
-                  <p:tgtEl>
-                    <p:sldTgt/>
-                  </p:tgtEl>
-                </p:cond>
-              </p:nextCondLst>
-            </p:seq>
-          </p:childTnLst>
-        </p:cTn>
-      </p:par>
-    </p:tnLst>
-  </p:timing>
-</p:sld>
-</file>
-
-<file path=ppt/slides/slide40.xml><?xml version="1.0" encoding="utf-8"?>
+<file path=ppt/slides/slide41.xml><?xml version="1.0" encoding="utf-8"?>
 <p:sld xmlns:a="http://schemas.openxmlformats.org/drawingml/2006/main" xmlns:r="http://schemas.openxmlformats.org/officeDocument/2006/relationships" xmlns:p="http://schemas.openxmlformats.org/presentationml/2006/main">
   <p:cSld>
     <p:spTree>
@@ -25067,7 +25150,7 @@
               <a:pPr>
                 <a:defRPr/>
               </a:pPr>
-              <a:t>40</a:t>
+              <a:t>41</a:t>
             </a:fld>
             <a:endParaRPr lang="en-US" dirty="0"/>
           </a:p>
@@ -25423,7 +25506,7 @@
 </p:sld>
 </file>
 
-<file path=ppt/slides/slide41.xml><?xml version="1.0" encoding="utf-8"?>
+<file path=ppt/slides/slide42.xml><?xml version="1.0" encoding="utf-8"?>
 <p:sld xmlns:a="http://schemas.openxmlformats.org/drawingml/2006/main" xmlns:r="http://schemas.openxmlformats.org/officeDocument/2006/relationships" xmlns:p="http://schemas.openxmlformats.org/presentationml/2006/main">
   <p:cSld>
     <p:spTree>
@@ -25574,7 +25657,7 @@
             <a:fld id="{7A38D539-6BF2-4C53-B330-167D4393E1AC}" type="slidenum">
               <a:rPr lang="en-US" smtClean="0"/>
               <a:pPr/>
-              <a:t>41</a:t>
+              <a:t>42</a:t>
             </a:fld>
             <a:endParaRPr lang="en-US" dirty="0"/>
           </a:p>
@@ -25783,7 +25866,7 @@
 </p:sld>
 </file>
 
-<file path=ppt/slides/slide42.xml><?xml version="1.0" encoding="utf-8"?>
+<file path=ppt/slides/slide43.xml><?xml version="1.0" encoding="utf-8"?>
 <p:sld xmlns:a="http://schemas.openxmlformats.org/drawingml/2006/main" xmlns:r="http://schemas.openxmlformats.org/officeDocument/2006/relationships" xmlns:p="http://schemas.openxmlformats.org/presentationml/2006/main">
   <p:cSld>
     <p:spTree>
@@ -25881,15 +25964,12 @@
                 </a:pPr>
                 <a14:m>
                   <m:oMathPara xmlns:m="http://schemas.openxmlformats.org/officeDocument/2006/math">
-                    <m:oMathParaPr>
-                      <m:jc m:val="centerGroup"/>
-                    </m:oMathParaPr>
-                    <m:oMath xmlns:m="http://schemas.openxmlformats.org/officeDocument/2006/math">
+                    <m:oMath>
                       <m:sSub>
                         <m:sSubPr>
                           <m:ctrlPr>
-                            <a:rPr lang="en-US" i="1" smtClean="0">
-                              <a:latin typeface="Cambria Math" panose="02040503050406030204" pitchFamily="18" charset="0"/>
+                            <a:rPr lang="en-US" b="0" i="1" smtClean="0">
+                              <a:latin typeface="Cambria Math"/>
                             </a:rPr>
                           </m:ctrlPr>
                         </m:sSubPr>
@@ -25938,7 +26018,7 @@
                         <m:sSubPr>
                           <m:ctrlPr>
                             <a:rPr lang="en-US" b="0" i="1" smtClean="0">
-                              <a:latin typeface="Cambria Math" panose="02040503050406030204" pitchFamily="18" charset="0"/>
+                              <a:latin typeface="Cambria Math"/>
                             </a:rPr>
                           </m:ctrlPr>
                         </m:sSubPr>
@@ -26123,7 +26203,7 @@
               <a:pPr>
                 <a:defRPr/>
               </a:pPr>
-              <a:t>42</a:t>
+              <a:t>43</a:t>
             </a:fld>
             <a:endParaRPr lang="en-US" dirty="0"/>
           </a:p>
@@ -26479,7 +26559,7 @@
 </p:sld>
 </file>
 
-<file path=ppt/slides/slide43.xml><?xml version="1.0" encoding="utf-8"?>
+<file path=ppt/slides/slide44.xml><?xml version="1.0" encoding="utf-8"?>
 <p:sld xmlns:a="http://schemas.openxmlformats.org/drawingml/2006/main" xmlns:r="http://schemas.openxmlformats.org/officeDocument/2006/relationships" xmlns:p="http://schemas.openxmlformats.org/presentationml/2006/main">
   <p:cSld>
     <p:spTree>
@@ -26605,7 +26685,7 @@
               <a:pPr>
                 <a:defRPr/>
               </a:pPr>
-              <a:t>43</a:t>
+              <a:t>44</a:t>
             </a:fld>
             <a:endParaRPr lang="en-US" dirty="0"/>
           </a:p>
@@ -26881,7 +26961,7 @@
 </p:sld>
 </file>
 
-<file path=ppt/slides/slide44.xml><?xml version="1.0" encoding="utf-8"?>
+<file path=ppt/slides/slide45.xml><?xml version="1.0" encoding="utf-8"?>
 <p:sld xmlns:a="http://schemas.openxmlformats.org/drawingml/2006/main" xmlns:r="http://schemas.openxmlformats.org/officeDocument/2006/relationships" xmlns:p="http://schemas.openxmlformats.org/presentationml/2006/main">
   <p:cSld>
     <p:spTree>
@@ -27045,7 +27125,7 @@
               <a:pPr>
                 <a:defRPr/>
               </a:pPr>
-              <a:t>44</a:t>
+              <a:t>45</a:t>
             </a:fld>
             <a:endParaRPr lang="en-US" dirty="0"/>
           </a:p>
@@ -27064,7 +27144,7 @@
 </p:sld>
 </file>
 
-<file path=ppt/slides/slide45.xml><?xml version="1.0" encoding="utf-8"?>
+<file path=ppt/slides/slide46.xml><?xml version="1.0" encoding="utf-8"?>
 <p:sld xmlns:a="http://schemas.openxmlformats.org/drawingml/2006/main" xmlns:r="http://schemas.openxmlformats.org/officeDocument/2006/relationships" xmlns:p="http://schemas.openxmlformats.org/presentationml/2006/main">
   <p:cSld>
     <p:spTree>
@@ -27215,7 +27295,7 @@
               <a:pPr>
                 <a:defRPr/>
               </a:pPr>
-              <a:t>45</a:t>
+              <a:t>46</a:t>
             </a:fld>
             <a:endParaRPr lang="en-US" dirty="0"/>
           </a:p>
@@ -27460,7 +27540,7 @@
 </p:sld>
 </file>
 
-<file path=ppt/slides/slide46.xml><?xml version="1.0" encoding="utf-8"?>
+<file path=ppt/slides/slide47.xml><?xml version="1.0" encoding="utf-8"?>
 <p:sld xmlns:a="http://schemas.openxmlformats.org/drawingml/2006/main" xmlns:r="http://schemas.openxmlformats.org/officeDocument/2006/relationships" xmlns:p="http://schemas.openxmlformats.org/presentationml/2006/main">
   <p:cSld>
     <p:spTree>
@@ -27617,7 +27697,7 @@
               <a:pPr>
                 <a:defRPr/>
               </a:pPr>
-              <a:t>46</a:t>
+              <a:t>47</a:t>
             </a:fld>
             <a:endParaRPr lang="en-US" dirty="0"/>
           </a:p>
@@ -27813,7 +27893,7 @@
 </p:sld>
 </file>
 
-<file path=ppt/slides/slide47.xml><?xml version="1.0" encoding="utf-8"?>
+<file path=ppt/slides/slide48.xml><?xml version="1.0" encoding="utf-8"?>
 <p:sld xmlns:a="http://schemas.openxmlformats.org/drawingml/2006/main" xmlns:r="http://schemas.openxmlformats.org/officeDocument/2006/relationships" xmlns:p="http://schemas.openxmlformats.org/presentationml/2006/main">
   <p:cSld>
     <p:spTree>
@@ -27911,7 +27991,7 @@
               <a:pPr>
                 <a:defRPr/>
               </a:pPr>
-              <a:t>47</a:t>
+              <a:t>48</a:t>
             </a:fld>
             <a:endParaRPr lang="en-US" dirty="0"/>
           </a:p>
@@ -28009,7 +28089,7 @@
 </p:sld>
 </file>
 
-<file path=ppt/slides/slide48.xml><?xml version="1.0" encoding="utf-8"?>
+<file path=ppt/slides/slide49.xml><?xml version="1.0" encoding="utf-8"?>
 <p:sld xmlns:a="http://schemas.openxmlformats.org/drawingml/2006/main" xmlns:r="http://schemas.openxmlformats.org/officeDocument/2006/relationships" xmlns:p="http://schemas.openxmlformats.org/presentationml/2006/main">
   <p:cSld>
     <p:spTree>
@@ -28143,7 +28223,7 @@
               <a:pPr>
                 <a:defRPr/>
               </a:pPr>
-              <a:t>48</a:t>
+              <a:t>49</a:t>
             </a:fld>
             <a:endParaRPr lang="en-US" dirty="0"/>
           </a:p>
@@ -28339,314 +28419,6 @@
 </p:sld>
 </file>
 
-<file path=ppt/slides/slide49.xml><?xml version="1.0" encoding="utf-8"?>
-<p:sld xmlns:a="http://schemas.openxmlformats.org/drawingml/2006/main" xmlns:r="http://schemas.openxmlformats.org/officeDocument/2006/relationships" xmlns:p="http://schemas.openxmlformats.org/presentationml/2006/main">
-  <p:cSld>
-    <p:spTree>
-      <p:nvGrpSpPr>
-        <p:cNvPr id="1" name=""/>
-        <p:cNvGrpSpPr/>
-        <p:nvPr/>
-      </p:nvGrpSpPr>
-      <p:grpSpPr>
-        <a:xfrm>
-          <a:off x="0" y="0"/>
-          <a:ext cx="0" cy="0"/>
-          <a:chOff x="0" y="0"/>
-          <a:chExt cx="0" cy="0"/>
-        </a:xfrm>
-      </p:grpSpPr>
-      <p:sp>
-        <p:nvSpPr>
-          <p:cNvPr id="2" name="Title 1"/>
-          <p:cNvSpPr>
-            <a:spLocks noGrp="1"/>
-          </p:cNvSpPr>
-          <p:nvPr>
-            <p:ph type="title"/>
-          </p:nvPr>
-        </p:nvSpPr>
-        <p:spPr/>
-        <p:txBody>
-          <a:bodyPr/>
-          <a:lstStyle/>
-          <a:p>
-            <a:r>
-              <a:rPr lang="en-US" dirty="0"/>
-              <a:t>History of Thought</a:t>
-            </a:r>
-          </a:p>
-        </p:txBody>
-      </p:sp>
-      <p:sp>
-        <p:nvSpPr>
-          <p:cNvPr id="3" name="Content Placeholder 2"/>
-          <p:cNvSpPr>
-            <a:spLocks noGrp="1"/>
-          </p:cNvSpPr>
-          <p:nvPr>
-            <p:ph idx="1"/>
-          </p:nvPr>
-        </p:nvSpPr>
-        <p:spPr/>
-        <p:txBody>
-          <a:bodyPr/>
-          <a:lstStyle/>
-          <a:p>
-            <a:r>
-              <a:rPr lang="en-US" dirty="0"/>
-              <a:t>Since 1980:</a:t>
-            </a:r>
-          </a:p>
-          <a:p>
-            <a:pPr lvl="1"/>
-            <a:r>
-              <a:rPr lang="en-US" dirty="0"/>
-              <a:t>Economists incorporate </a:t>
-            </a:r>
-            <a:r>
-              <a:rPr lang="en-US" dirty="0">
-                <a:solidFill>
-                  <a:schemeClr val="accent2"/>
-                </a:solidFill>
-              </a:rPr>
-              <a:t>borrowing constraints </a:t>
-            </a:r>
-            <a:r>
-              <a:rPr lang="en-US" dirty="0"/>
-              <a:t>and </a:t>
-            </a:r>
-            <a:r>
-              <a:rPr lang="en-US" dirty="0">
-                <a:solidFill>
-                  <a:schemeClr val="accent2"/>
-                </a:solidFill>
-              </a:rPr>
-              <a:t>precautionary savings </a:t>
-            </a:r>
-            <a:r>
-              <a:rPr lang="en-US" dirty="0"/>
-              <a:t>due to uncertainty about the future into model</a:t>
-            </a:r>
-          </a:p>
-          <a:p>
-            <a:pPr lvl="1"/>
-            <a:r>
-              <a:rPr lang="en-US" dirty="0"/>
-              <a:t>This raises MPC in the model back up to 0.2-0.4</a:t>
-            </a:r>
-          </a:p>
-          <a:p>
-            <a:pPr lvl="1"/>
-            <a:r>
-              <a:rPr lang="en-US" dirty="0"/>
-              <a:t>Key </a:t>
-            </a:r>
-            <a:r>
-              <a:rPr lang="en-US" dirty="0" err="1"/>
-              <a:t>contributers</a:t>
-            </a:r>
-            <a:r>
-              <a:rPr lang="en-US" dirty="0"/>
-              <a:t>: Stephen </a:t>
-            </a:r>
-            <a:r>
-              <a:rPr lang="en-US" dirty="0" err="1"/>
-              <a:t>Zeldes</a:t>
-            </a:r>
-            <a:r>
-              <a:rPr lang="en-US" dirty="0"/>
-              <a:t>, Christopher </a:t>
-            </a:r>
-            <a:r>
-              <a:rPr lang="en-US" dirty="0" err="1"/>
-              <a:t>Carrol</a:t>
-            </a:r>
-            <a:r>
-              <a:rPr lang="en-US" dirty="0"/>
-              <a:t>, Pierre-Olivier </a:t>
-            </a:r>
-            <a:r>
-              <a:rPr lang="en-US" dirty="0" err="1"/>
-              <a:t>Gourinchas</a:t>
-            </a:r>
-            <a:r>
-              <a:rPr lang="en-US" dirty="0"/>
-              <a:t> and Jonathan Parker.</a:t>
-            </a:r>
-          </a:p>
-        </p:txBody>
-      </p:sp>
-      <p:sp>
-        <p:nvSpPr>
-          <p:cNvPr id="4" name="Slide Number Placeholder 3"/>
-          <p:cNvSpPr>
-            <a:spLocks noGrp="1"/>
-          </p:cNvSpPr>
-          <p:nvPr>
-            <p:ph type="sldNum" sz="quarter" idx="12"/>
-          </p:nvPr>
-        </p:nvSpPr>
-        <p:spPr/>
-        <p:txBody>
-          <a:bodyPr/>
-          <a:lstStyle/>
-          <a:p>
-            <a:pPr>
-              <a:defRPr/>
-            </a:pPr>
-            <a:fld id="{0B9AA5AD-3701-488D-8337-65701EB767E3}" type="slidenum">
-              <a:rPr lang="en-US" smtClean="0"/>
-              <a:pPr>
-                <a:defRPr/>
-              </a:pPr>
-              <a:t>49</a:t>
-            </a:fld>
-            <a:endParaRPr lang="en-US" dirty="0"/>
-          </a:p>
-        </p:txBody>
-      </p:sp>
-    </p:spTree>
-    <p:extLst>
-      <p:ext uri="{BB962C8B-B14F-4D97-AF65-F5344CB8AC3E}">
-        <p14:creationId xmlns:p14="http://schemas.microsoft.com/office/powerpoint/2010/main" val="2391170080"/>
-      </p:ext>
-    </p:extLst>
-  </p:cSld>
-  <p:clrMapOvr>
-    <a:masterClrMapping/>
-  </p:clrMapOvr>
-  <p:timing>
-    <p:tnLst>
-      <p:par>
-        <p:cTn id="1" dur="indefinite" restart="never" nodeType="tmRoot">
-          <p:childTnLst>
-            <p:seq concurrent="1" nextAc="seek">
-              <p:cTn id="2" dur="indefinite" nodeType="mainSeq">
-                <p:childTnLst>
-                  <p:par>
-                    <p:cTn id="3" fill="hold">
-                      <p:stCondLst>
-                        <p:cond delay="indefinite"/>
-                      </p:stCondLst>
-                      <p:childTnLst>
-                        <p:par>
-                          <p:cTn id="4" fill="hold">
-                            <p:stCondLst>
-                              <p:cond delay="0"/>
-                            </p:stCondLst>
-                            <p:childTnLst>
-                              <p:par>
-                                <p:cTn id="5" presetID="1" presetClass="entr" presetSubtype="0" fill="hold" nodeType="clickEffect">
-                                  <p:stCondLst>
-                                    <p:cond delay="0"/>
-                                  </p:stCondLst>
-                                  <p:childTnLst>
-                                    <p:set>
-                                      <p:cBhvr>
-                                        <p:cTn id="6" dur="1" fill="hold">
-                                          <p:stCondLst>
-                                            <p:cond delay="0"/>
-                                          </p:stCondLst>
-                                        </p:cTn>
-                                        <p:tgtEl>
-                                          <p:spTgt spid="3">
-                                            <p:txEl>
-                                              <p:pRg st="2" end="2"/>
-                                            </p:txEl>
-                                          </p:spTgt>
-                                        </p:tgtEl>
-                                        <p:attrNameLst>
-                                          <p:attrName>style.visibility</p:attrName>
-                                        </p:attrNameLst>
-                                      </p:cBhvr>
-                                      <p:to>
-                                        <p:strVal val="visible"/>
-                                      </p:to>
-                                    </p:set>
-                                  </p:childTnLst>
-                                </p:cTn>
-                              </p:par>
-                            </p:childTnLst>
-                          </p:cTn>
-                        </p:par>
-                      </p:childTnLst>
-                    </p:cTn>
-                  </p:par>
-                  <p:par>
-                    <p:cTn id="7" fill="hold">
-                      <p:stCondLst>
-                        <p:cond delay="indefinite"/>
-                      </p:stCondLst>
-                      <p:childTnLst>
-                        <p:par>
-                          <p:cTn id="8" fill="hold">
-                            <p:stCondLst>
-                              <p:cond delay="0"/>
-                            </p:stCondLst>
-                            <p:childTnLst>
-                              <p:par>
-                                <p:cTn id="9" presetID="1" presetClass="entr" presetSubtype="0" fill="hold" nodeType="clickEffect">
-                                  <p:stCondLst>
-                                    <p:cond delay="0"/>
-                                  </p:stCondLst>
-                                  <p:childTnLst>
-                                    <p:set>
-                                      <p:cBhvr>
-                                        <p:cTn id="10" dur="1" fill="hold">
-                                          <p:stCondLst>
-                                            <p:cond delay="0"/>
-                                          </p:stCondLst>
-                                        </p:cTn>
-                                        <p:tgtEl>
-                                          <p:spTgt spid="3">
-                                            <p:txEl>
-                                              <p:pRg st="3" end="3"/>
-                                            </p:txEl>
-                                          </p:spTgt>
-                                        </p:tgtEl>
-                                        <p:attrNameLst>
-                                          <p:attrName>style.visibility</p:attrName>
-                                        </p:attrNameLst>
-                                      </p:cBhvr>
-                                      <p:to>
-                                        <p:strVal val="visible"/>
-                                      </p:to>
-                                    </p:set>
-                                  </p:childTnLst>
-                                </p:cTn>
-                              </p:par>
-                            </p:childTnLst>
-                          </p:cTn>
-                        </p:par>
-                      </p:childTnLst>
-                    </p:cTn>
-                  </p:par>
-                </p:childTnLst>
-              </p:cTn>
-              <p:prevCondLst>
-                <p:cond evt="onPrev" delay="0">
-                  <p:tgtEl>
-                    <p:sldTgt/>
-                  </p:tgtEl>
-                </p:cond>
-              </p:prevCondLst>
-              <p:nextCondLst>
-                <p:cond evt="onNext" delay="0">
-                  <p:tgtEl>
-                    <p:sldTgt/>
-                  </p:tgtEl>
-                </p:cond>
-              </p:nextCondLst>
-            </p:seq>
-          </p:childTnLst>
-        </p:cTn>
-      </p:par>
-    </p:tnLst>
-  </p:timing>
-</p:sld>
-</file>
-
 <file path=ppt/slides/slide5.xml><?xml version="1.0" encoding="utf-8"?>
 <p:sld xmlns:a="http://schemas.openxmlformats.org/drawingml/2006/main" xmlns:r="http://schemas.openxmlformats.org/officeDocument/2006/relationships" xmlns:p="http://schemas.openxmlformats.org/presentationml/2006/main">
   <p:cSld>
@@ -29014,6 +28786,314 @@
 </p:sld>
 </file>
 
+<file path=ppt/slides/slide50.xml><?xml version="1.0" encoding="utf-8"?>
+<p:sld xmlns:a="http://schemas.openxmlformats.org/drawingml/2006/main" xmlns:r="http://schemas.openxmlformats.org/officeDocument/2006/relationships" xmlns:p="http://schemas.openxmlformats.org/presentationml/2006/main">
+  <p:cSld>
+    <p:spTree>
+      <p:nvGrpSpPr>
+        <p:cNvPr id="1" name=""/>
+        <p:cNvGrpSpPr/>
+        <p:nvPr/>
+      </p:nvGrpSpPr>
+      <p:grpSpPr>
+        <a:xfrm>
+          <a:off x="0" y="0"/>
+          <a:ext cx="0" cy="0"/>
+          <a:chOff x="0" y="0"/>
+          <a:chExt cx="0" cy="0"/>
+        </a:xfrm>
+      </p:grpSpPr>
+      <p:sp>
+        <p:nvSpPr>
+          <p:cNvPr id="2" name="Title 1"/>
+          <p:cNvSpPr>
+            <a:spLocks noGrp="1"/>
+          </p:cNvSpPr>
+          <p:nvPr>
+            <p:ph type="title"/>
+          </p:nvPr>
+        </p:nvSpPr>
+        <p:spPr/>
+        <p:txBody>
+          <a:bodyPr/>
+          <a:lstStyle/>
+          <a:p>
+            <a:r>
+              <a:rPr lang="en-US" dirty="0"/>
+              <a:t>History of Thought</a:t>
+            </a:r>
+          </a:p>
+        </p:txBody>
+      </p:sp>
+      <p:sp>
+        <p:nvSpPr>
+          <p:cNvPr id="3" name="Content Placeholder 2"/>
+          <p:cNvSpPr>
+            <a:spLocks noGrp="1"/>
+          </p:cNvSpPr>
+          <p:nvPr>
+            <p:ph idx="1"/>
+          </p:nvPr>
+        </p:nvSpPr>
+        <p:spPr/>
+        <p:txBody>
+          <a:bodyPr/>
+          <a:lstStyle/>
+          <a:p>
+            <a:r>
+              <a:rPr lang="en-US" dirty="0"/>
+              <a:t>Since 1980:</a:t>
+            </a:r>
+          </a:p>
+          <a:p>
+            <a:pPr lvl="1"/>
+            <a:r>
+              <a:rPr lang="en-US" dirty="0"/>
+              <a:t>Economists incorporate </a:t>
+            </a:r>
+            <a:r>
+              <a:rPr lang="en-US" dirty="0">
+                <a:solidFill>
+                  <a:schemeClr val="accent2"/>
+                </a:solidFill>
+              </a:rPr>
+              <a:t>borrowing constraints </a:t>
+            </a:r>
+            <a:r>
+              <a:rPr lang="en-US" dirty="0"/>
+              <a:t>and </a:t>
+            </a:r>
+            <a:r>
+              <a:rPr lang="en-US" dirty="0">
+                <a:solidFill>
+                  <a:schemeClr val="accent2"/>
+                </a:solidFill>
+              </a:rPr>
+              <a:t>precautionary savings </a:t>
+            </a:r>
+            <a:r>
+              <a:rPr lang="en-US" dirty="0"/>
+              <a:t>due to uncertainty about the future into model</a:t>
+            </a:r>
+          </a:p>
+          <a:p>
+            <a:pPr lvl="1"/>
+            <a:r>
+              <a:rPr lang="en-US" dirty="0"/>
+              <a:t>This raises MPC in the model back up to 0.2-0.4</a:t>
+            </a:r>
+          </a:p>
+          <a:p>
+            <a:pPr lvl="1"/>
+            <a:r>
+              <a:rPr lang="en-US" dirty="0"/>
+              <a:t>Key </a:t>
+            </a:r>
+            <a:r>
+              <a:rPr lang="en-US" dirty="0" err="1"/>
+              <a:t>contributers</a:t>
+            </a:r>
+            <a:r>
+              <a:rPr lang="en-US" dirty="0"/>
+              <a:t>: Stephen </a:t>
+            </a:r>
+            <a:r>
+              <a:rPr lang="en-US" dirty="0" err="1"/>
+              <a:t>Zeldes</a:t>
+            </a:r>
+            <a:r>
+              <a:rPr lang="en-US" dirty="0"/>
+              <a:t>, Christopher </a:t>
+            </a:r>
+            <a:r>
+              <a:rPr lang="en-US" dirty="0" err="1"/>
+              <a:t>Carrol</a:t>
+            </a:r>
+            <a:r>
+              <a:rPr lang="en-US" dirty="0"/>
+              <a:t>, Pierre-Olivier </a:t>
+            </a:r>
+            <a:r>
+              <a:rPr lang="en-US" dirty="0" err="1"/>
+              <a:t>Gourinchas</a:t>
+            </a:r>
+            <a:r>
+              <a:rPr lang="en-US" dirty="0"/>
+              <a:t> and Jonathan Parker.</a:t>
+            </a:r>
+          </a:p>
+        </p:txBody>
+      </p:sp>
+      <p:sp>
+        <p:nvSpPr>
+          <p:cNvPr id="4" name="Slide Number Placeholder 3"/>
+          <p:cNvSpPr>
+            <a:spLocks noGrp="1"/>
+          </p:cNvSpPr>
+          <p:nvPr>
+            <p:ph type="sldNum" sz="quarter" idx="12"/>
+          </p:nvPr>
+        </p:nvSpPr>
+        <p:spPr/>
+        <p:txBody>
+          <a:bodyPr/>
+          <a:lstStyle/>
+          <a:p>
+            <a:pPr>
+              <a:defRPr/>
+            </a:pPr>
+            <a:fld id="{0B9AA5AD-3701-488D-8337-65701EB767E3}" type="slidenum">
+              <a:rPr lang="en-US" smtClean="0"/>
+              <a:pPr>
+                <a:defRPr/>
+              </a:pPr>
+              <a:t>50</a:t>
+            </a:fld>
+            <a:endParaRPr lang="en-US" dirty="0"/>
+          </a:p>
+        </p:txBody>
+      </p:sp>
+    </p:spTree>
+    <p:extLst>
+      <p:ext uri="{BB962C8B-B14F-4D97-AF65-F5344CB8AC3E}">
+        <p14:creationId xmlns:p14="http://schemas.microsoft.com/office/powerpoint/2010/main" val="2391170080"/>
+      </p:ext>
+    </p:extLst>
+  </p:cSld>
+  <p:clrMapOvr>
+    <a:masterClrMapping/>
+  </p:clrMapOvr>
+  <p:timing>
+    <p:tnLst>
+      <p:par>
+        <p:cTn id="1" dur="indefinite" restart="never" nodeType="tmRoot">
+          <p:childTnLst>
+            <p:seq concurrent="1" nextAc="seek">
+              <p:cTn id="2" dur="indefinite" nodeType="mainSeq">
+                <p:childTnLst>
+                  <p:par>
+                    <p:cTn id="3" fill="hold">
+                      <p:stCondLst>
+                        <p:cond delay="indefinite"/>
+                      </p:stCondLst>
+                      <p:childTnLst>
+                        <p:par>
+                          <p:cTn id="4" fill="hold">
+                            <p:stCondLst>
+                              <p:cond delay="0"/>
+                            </p:stCondLst>
+                            <p:childTnLst>
+                              <p:par>
+                                <p:cTn id="5" presetID="1" presetClass="entr" presetSubtype="0" fill="hold" nodeType="clickEffect">
+                                  <p:stCondLst>
+                                    <p:cond delay="0"/>
+                                  </p:stCondLst>
+                                  <p:childTnLst>
+                                    <p:set>
+                                      <p:cBhvr>
+                                        <p:cTn id="6" dur="1" fill="hold">
+                                          <p:stCondLst>
+                                            <p:cond delay="0"/>
+                                          </p:stCondLst>
+                                        </p:cTn>
+                                        <p:tgtEl>
+                                          <p:spTgt spid="3">
+                                            <p:txEl>
+                                              <p:pRg st="2" end="2"/>
+                                            </p:txEl>
+                                          </p:spTgt>
+                                        </p:tgtEl>
+                                        <p:attrNameLst>
+                                          <p:attrName>style.visibility</p:attrName>
+                                        </p:attrNameLst>
+                                      </p:cBhvr>
+                                      <p:to>
+                                        <p:strVal val="visible"/>
+                                      </p:to>
+                                    </p:set>
+                                  </p:childTnLst>
+                                </p:cTn>
+                              </p:par>
+                            </p:childTnLst>
+                          </p:cTn>
+                        </p:par>
+                      </p:childTnLst>
+                    </p:cTn>
+                  </p:par>
+                  <p:par>
+                    <p:cTn id="7" fill="hold">
+                      <p:stCondLst>
+                        <p:cond delay="indefinite"/>
+                      </p:stCondLst>
+                      <p:childTnLst>
+                        <p:par>
+                          <p:cTn id="8" fill="hold">
+                            <p:stCondLst>
+                              <p:cond delay="0"/>
+                            </p:stCondLst>
+                            <p:childTnLst>
+                              <p:par>
+                                <p:cTn id="9" presetID="1" presetClass="entr" presetSubtype="0" fill="hold" nodeType="clickEffect">
+                                  <p:stCondLst>
+                                    <p:cond delay="0"/>
+                                  </p:stCondLst>
+                                  <p:childTnLst>
+                                    <p:set>
+                                      <p:cBhvr>
+                                        <p:cTn id="10" dur="1" fill="hold">
+                                          <p:stCondLst>
+                                            <p:cond delay="0"/>
+                                          </p:stCondLst>
+                                        </p:cTn>
+                                        <p:tgtEl>
+                                          <p:spTgt spid="3">
+                                            <p:txEl>
+                                              <p:pRg st="3" end="3"/>
+                                            </p:txEl>
+                                          </p:spTgt>
+                                        </p:tgtEl>
+                                        <p:attrNameLst>
+                                          <p:attrName>style.visibility</p:attrName>
+                                        </p:attrNameLst>
+                                      </p:cBhvr>
+                                      <p:to>
+                                        <p:strVal val="visible"/>
+                                      </p:to>
+                                    </p:set>
+                                  </p:childTnLst>
+                                </p:cTn>
+                              </p:par>
+                            </p:childTnLst>
+                          </p:cTn>
+                        </p:par>
+                      </p:childTnLst>
+                    </p:cTn>
+                  </p:par>
+                </p:childTnLst>
+              </p:cTn>
+              <p:prevCondLst>
+                <p:cond evt="onPrev" delay="0">
+                  <p:tgtEl>
+                    <p:sldTgt/>
+                  </p:tgtEl>
+                </p:cond>
+              </p:prevCondLst>
+              <p:nextCondLst>
+                <p:cond evt="onNext" delay="0">
+                  <p:tgtEl>
+                    <p:sldTgt/>
+                  </p:tgtEl>
+                </p:cond>
+              </p:nextCondLst>
+            </p:seq>
+          </p:childTnLst>
+        </p:cTn>
+      </p:par>
+    </p:tnLst>
+  </p:timing>
+</p:sld>
+</file>
+
 <file path=ppt/slides/slide6.xml><?xml version="1.0" encoding="utf-8"?>
 <p:sld xmlns:a="http://schemas.openxmlformats.org/drawingml/2006/main" xmlns:r="http://schemas.openxmlformats.org/officeDocument/2006/relationships" xmlns:p="http://schemas.openxmlformats.org/presentationml/2006/main">
   <p:cSld>
@@ -29087,15 +29167,12 @@
                 </a:pPr>
                 <a14:m>
                   <m:oMathPara xmlns:m="http://schemas.openxmlformats.org/officeDocument/2006/math">
-                    <m:oMathParaPr>
-                      <m:jc m:val="centerGroup"/>
-                    </m:oMathParaPr>
-                    <m:oMath xmlns:m="http://schemas.openxmlformats.org/officeDocument/2006/math">
+                    <m:oMath>
                       <m:sSub>
                         <m:sSubPr>
                           <m:ctrlPr>
                             <a:rPr lang="en-US" i="1">
-                              <a:latin typeface="Cambria Math" panose="02040503050406030204" pitchFamily="18" charset="0"/>
+                              <a:latin typeface="Cambria Math"/>
                             </a:rPr>
                           </m:ctrlPr>
                         </m:sSubPr>
@@ -29138,7 +29215,7 @@
                         <m:sSubPr>
                           <m:ctrlPr>
                             <a:rPr lang="en-US" i="1">
-                              <a:latin typeface="Cambria Math" panose="02040503050406030204" pitchFamily="18" charset="0"/>
+                              <a:latin typeface="Cambria Math"/>
                             </a:rPr>
                           </m:ctrlPr>
                         </m:sSubPr>
@@ -29176,15 +29253,12 @@
                 </a:pPr>
                 <a14:m>
                   <m:oMathPara xmlns:m="http://schemas.openxmlformats.org/officeDocument/2006/math">
-                    <m:oMathParaPr>
-                      <m:jc m:val="centerGroup"/>
-                    </m:oMathParaPr>
-                    <m:oMath xmlns:m="http://schemas.openxmlformats.org/officeDocument/2006/math">
+                    <m:oMath>
                       <m:sSub>
                         <m:sSubPr>
                           <m:ctrlPr>
                             <a:rPr lang="en-US" i="1">
-                              <a:latin typeface="Cambria Math" panose="02040503050406030204" pitchFamily="18" charset="0"/>
+                              <a:latin typeface="Cambria Math"/>
                             </a:rPr>
                           </m:ctrlPr>
                         </m:sSubPr>
@@ -29215,7 +29289,7 @@
                         <m:sSubPr>
                           <m:ctrlPr>
                             <a:rPr lang="en-US" i="1">
-                              <a:latin typeface="Cambria Math" panose="02040503050406030204" pitchFamily="18" charset="0"/>
+                              <a:latin typeface="Cambria Math"/>
                             </a:rPr>
                           </m:ctrlPr>
                         </m:sSubPr>
@@ -29246,7 +29320,7 @@
                         <m:dPr>
                           <m:ctrlPr>
                             <a:rPr lang="en-US" i="1">
-                              <a:latin typeface="Cambria Math" panose="02040503050406030204" pitchFamily="18" charset="0"/>
+                              <a:latin typeface="Cambria Math"/>
                             </a:rPr>
                           </m:ctrlPr>
                         </m:dPr>
@@ -29610,7 +29684,7 @@
                     <m:oMathParaPr>
                       <m:jc m:val="center"/>
                     </m:oMathParaPr>
-                    <m:oMath xmlns:m="http://schemas.openxmlformats.org/officeDocument/2006/math">
+                    <m:oMath>
                       <m:r>
                         <a:rPr lang="en-US" b="0" i="1" smtClean="0">
                           <a:latin typeface="Cambria Math"/>
@@ -29628,7 +29702,7 @@
                         <m:sSubPr>
                           <m:ctrlPr>
                             <a:rPr lang="en-US" b="0" i="1" smtClean="0">
-                              <a:latin typeface="Cambria Math" panose="02040503050406030204" pitchFamily="18" charset="0"/>
+                              <a:latin typeface="Cambria Math"/>
                             </a:rPr>
                           </m:ctrlPr>
                         </m:sSubPr>
@@ -29677,7 +29751,7 @@
                       <m:dPr>
                         <m:ctrlPr>
                           <a:rPr lang="en-US" b="0" i="1" smtClean="0">
-                            <a:latin typeface="Cambria Math" panose="02040503050406030204" pitchFamily="18" charset="0"/>
+                            <a:latin typeface="Cambria Math"/>
                           </a:rPr>
                         </m:ctrlPr>
                       </m:dPr>
@@ -29801,7 +29875,7 @@
                           <m:sSubPr>
                             <m:ctrlPr>
                               <a:rPr lang="en-US" b="0" i="1" smtClean="0">
-                                <a:latin typeface="Cambria Math" panose="02040503050406030204" pitchFamily="18" charset="0"/>
+                                <a:latin typeface="Cambria Math"/>
                               </a:rPr>
                             </m:ctrlPr>
                           </m:sSubPr>
@@ -29828,7 +29902,7 @@
                           <m:dPr>
                             <m:ctrlPr>
                               <a:rPr lang="en-US" b="0" i="1" smtClean="0">
-                                <a:latin typeface="Cambria Math" panose="02040503050406030204" pitchFamily="18" charset="0"/>
+                                <a:latin typeface="Cambria Math"/>
                               </a:rPr>
                             </m:ctrlPr>
                           </m:dPr>
@@ -30216,10 +30290,7 @@
                 </a:pPr>
                 <a14:m>
                   <m:oMathPara xmlns:m="http://schemas.openxmlformats.org/officeDocument/2006/math">
-                    <m:oMathParaPr>
-                      <m:jc m:val="centerGroup"/>
-                    </m:oMathParaPr>
-                    <m:oMath xmlns:m="http://schemas.openxmlformats.org/officeDocument/2006/math">
+                    <m:oMath>
                       <m:r>
                         <a:rPr lang="en-US" b="0" i="1" smtClean="0">
                           <a:latin typeface="Cambria Math"/>
@@ -30239,7 +30310,7 @@
                             <m:sSubPr>
                               <m:ctrlPr>
                                 <a:rPr lang="en-US" b="0" i="1" smtClean="0">
-                                  <a:latin typeface="Cambria Math" panose="02040503050406030204" pitchFamily="18" charset="0"/>
+                                  <a:latin typeface="Cambria Math"/>
                                 </a:rPr>
                               </m:ctrlPr>
                             </m:sSubPr>
@@ -30270,7 +30341,7 @@
                             <m:sSubPr>
                               <m:ctrlPr>
                                 <a:rPr lang="en-US" b="0" i="1" smtClean="0">
-                                  <a:latin typeface="Cambria Math" panose="02040503050406030204" pitchFamily="18" charset="0"/>
+                                  <a:latin typeface="Cambria Math"/>
                                 </a:rPr>
                               </m:ctrlPr>
                             </m:sSubPr>
@@ -30310,10 +30381,7 @@
                 </a:pPr>
                 <a14:m>
                   <m:oMathPara xmlns:m="http://schemas.openxmlformats.org/officeDocument/2006/math">
-                    <m:oMathParaPr>
-                      <m:jc m:val="centerGroup"/>
-                    </m:oMathParaPr>
-                    <m:oMath xmlns:m="http://schemas.openxmlformats.org/officeDocument/2006/math">
+                    <m:oMath>
                       <m:r>
                         <a:rPr lang="en-US" b="0" i="1" smtClean="0">
                           <a:latin typeface="Cambria Math"/>
@@ -30333,7 +30401,7 @@
                             <m:sSubPr>
                               <m:ctrlPr>
                                 <a:rPr lang="en-US" b="0" i="1" smtClean="0">
-                                  <a:latin typeface="Cambria Math" panose="02040503050406030204" pitchFamily="18" charset="0"/>
+                                  <a:latin typeface="Cambria Math"/>
                                 </a:rPr>
                               </m:ctrlPr>
                             </m:sSubPr>
@@ -30390,7 +30458,7 @@
                             <m:sSubPr>
                               <m:ctrlPr>
                                 <a:rPr lang="en-US" b="0" i="1" smtClean="0">
-                                  <a:latin typeface="Cambria Math" panose="02040503050406030204" pitchFamily="18" charset="0"/>
+                                  <a:latin typeface="Cambria Math"/>
                                   <a:ea typeface="Cambria Math"/>
                                 </a:rPr>
                               </m:ctrlPr>
@@ -30810,10 +30878,7 @@
                 </a:pPr>
                 <a14:m>
                   <m:oMathPara xmlns:m="http://schemas.openxmlformats.org/officeDocument/2006/math">
-                    <m:oMathParaPr>
-                      <m:jc m:val="centerGroup"/>
-                    </m:oMathParaPr>
-                    <m:oMath xmlns:m="http://schemas.openxmlformats.org/officeDocument/2006/math">
+                    <m:oMath>
                       <m:r>
                         <a:rPr lang="en-US" i="1" smtClean="0">
                           <a:latin typeface="Cambria Math"/>
@@ -30833,7 +30898,7 @@
                             <m:sSubPr>
                               <m:ctrlPr>
                                 <a:rPr lang="en-US" i="1">
-                                  <a:latin typeface="Cambria Math" panose="02040503050406030204" pitchFamily="18" charset="0"/>
+                                  <a:latin typeface="Cambria Math"/>
                                 </a:rPr>
                               </m:ctrlPr>
                             </m:sSubPr>
@@ -30890,7 +30955,7 @@
                             <m:sSubPr>
                               <m:ctrlPr>
                                 <a:rPr lang="en-US" i="1">
-                                  <a:latin typeface="Cambria Math" panose="02040503050406030204" pitchFamily="18" charset="0"/>
+                                  <a:latin typeface="Cambria Math"/>
                                   <a:ea typeface="Cambria Math"/>
                                 </a:rPr>
                               </m:ctrlPr>
@@ -31051,7 +31116,14 @@
                         <a:latin typeface="Cambria Math"/>
                         <a:ea typeface="Cambria Math"/>
                       </a:rPr>
-                      <m:t>0.98</m:t>
+                      <m:t>0.9</m:t>
+                    </m:r>
+                    <m:r>
+                      <a:rPr lang="en-US" b="0" i="1" smtClean="0">
+                        <a:latin typeface="Cambria Math" panose="02040503050406030204" pitchFamily="18" charset="0"/>
+                        <a:ea typeface="Cambria Math"/>
+                      </a:rPr>
+                      <m:t>6</m:t>
                     </m:r>
                   </m:oMath>
                 </a14:m>
@@ -31277,15 +31349,33 @@
                                   </p:childTnLst>
                                 </p:cTn>
                               </p:par>
+                            </p:childTnLst>
+                          </p:cTn>
+                        </p:par>
+                      </p:childTnLst>
+                    </p:cTn>
+                  </p:par>
+                  <p:par>
+                    <p:cTn id="13" fill="hold">
+                      <p:stCondLst>
+                        <p:cond delay="indefinite"/>
+                      </p:stCondLst>
+                      <p:childTnLst>
+                        <p:par>
+                          <p:cTn id="14" fill="hold">
+                            <p:stCondLst>
+                              <p:cond delay="0"/>
+                            </p:stCondLst>
+                            <p:childTnLst>
                               <p:par>
-                                <p:cTn id="13" presetID="1" presetClass="entr" presetSubtype="0" fill="hold" nodeType="withEffect">
+                                <p:cTn id="15" presetID="1" presetClass="entr" presetSubtype="0" fill="hold" nodeType="clickEffect">
                                   <p:stCondLst>
                                     <p:cond delay="0"/>
                                   </p:stCondLst>
                                   <p:childTnLst>
                                     <p:set>
                                       <p:cBhvr>
-                                        <p:cTn id="14" dur="1" fill="hold">
+                                        <p:cTn id="16" dur="1" fill="hold">
                                           <p:stCondLst>
                                             <p:cond delay="0"/>
                                           </p:stCondLst>
